--- a/templates/template3.pptx
+++ b/templates/template3.pptx
@@ -1,15 +1,15 @@
 
 <file path=ppt/presentation.xml><?xml version="1.0" encoding="utf-8"?>
-<p:presentation xmlns:a="http://schemas.openxmlformats.org/drawingml/2006/main" xmlns:r="http://schemas.openxmlformats.org/officeDocument/2006/relationships" xmlns:p="http://schemas.openxmlformats.org/presentationml/2006/main" saveSubsetFonts="1" autoCompressPictures="0">
+<p:presentation xmlns:a="http://schemas.openxmlformats.org/drawingml/2006/main" xmlns:r="http://schemas.openxmlformats.org/officeDocument/2006/relationships" xmlns:p="http://schemas.openxmlformats.org/presentationml/2006/main" xmlns:m="http://schemas.openxmlformats.org/officeDocument/2006/math" xmlns:w="http://schemas.openxmlformats.org/wordprocessingml/2006/main" autoCompressPictures="0" saveSubsetFonts="1">
   <p:sldMasterIdLst>
     <p:sldMasterId id="2147483648" r:id="rId1"/>
   </p:sldMasterIdLst>
   <p:notesMasterIdLst>
-    <p:notesMasterId r:id="rId4"/>
+    <p:notesMasterId r:id="rId6"/>
   </p:notesMasterIdLst>
   <p:sldIdLst>
-    <p:sldId id="285" r:id="rId2"/>
-    <p:sldId id="536" r:id="rId3"/>
+    <p:sldId id="256" r:id="rId4"/>
+    <p:sldId id="257" r:id="rId5"/>
   </p:sldIdLst>
   <p:sldSz cx="12192000" cy="6858000"/>
   <p:notesSz cx="6858000" cy="9144000"/>
@@ -17,8 +17,8 @@
     <a:defPPr>
       <a:defRPr lang="fr-FR"/>
     </a:defPPr>
-    <a:lvl1pPr marL="0" algn="l" defTabSz="914400" rtl="0" eaLnBrk="1" latinLnBrk="0" hangingPunct="1">
-      <a:defRPr sz="1800" kern="1200">
+    <a:lvl1pPr marL="0" algn="l" defTabSz="914400" rtl="0">
+      <a:defRPr sz="1800">
         <a:solidFill>
           <a:schemeClr val="tx1"/>
         </a:solidFill>
@@ -27,8 +27,8 @@
         <a:cs typeface="+mn-cs"/>
       </a:defRPr>
     </a:lvl1pPr>
-    <a:lvl2pPr marL="457200" algn="l" defTabSz="914400" rtl="0" eaLnBrk="1" latinLnBrk="0" hangingPunct="1">
-      <a:defRPr sz="1800" kern="1200">
+    <a:lvl2pPr marL="457200" algn="l" defTabSz="914400" rtl="0">
+      <a:defRPr sz="1800">
         <a:solidFill>
           <a:schemeClr val="tx1"/>
         </a:solidFill>
@@ -37,8 +37,8 @@
         <a:cs typeface="+mn-cs"/>
       </a:defRPr>
     </a:lvl2pPr>
-    <a:lvl3pPr marL="914400" algn="l" defTabSz="914400" rtl="0" eaLnBrk="1" latinLnBrk="0" hangingPunct="1">
-      <a:defRPr sz="1800" kern="1200">
+    <a:lvl3pPr marL="914400" algn="l" defTabSz="914400" rtl="0">
+      <a:defRPr sz="1800">
         <a:solidFill>
           <a:schemeClr val="tx1"/>
         </a:solidFill>
@@ -47,8 +47,8 @@
         <a:cs typeface="+mn-cs"/>
       </a:defRPr>
     </a:lvl3pPr>
-    <a:lvl4pPr marL="1371600" algn="l" defTabSz="914400" rtl="0" eaLnBrk="1" latinLnBrk="0" hangingPunct="1">
-      <a:defRPr sz="1800" kern="1200">
+    <a:lvl4pPr marL="1371600" algn="l" defTabSz="914400" rtl="0">
+      <a:defRPr sz="1800">
         <a:solidFill>
           <a:schemeClr val="tx1"/>
         </a:solidFill>
@@ -57,8 +57,8 @@
         <a:cs typeface="+mn-cs"/>
       </a:defRPr>
     </a:lvl4pPr>
-    <a:lvl5pPr marL="1828800" algn="l" defTabSz="914400" rtl="0" eaLnBrk="1" latinLnBrk="0" hangingPunct="1">
-      <a:defRPr sz="1800" kern="1200">
+    <a:lvl5pPr marL="1828800" algn="l" defTabSz="914400" rtl="0">
+      <a:defRPr sz="1800">
         <a:solidFill>
           <a:schemeClr val="tx1"/>
         </a:solidFill>
@@ -67,8 +67,8 @@
         <a:cs typeface="+mn-cs"/>
       </a:defRPr>
     </a:lvl5pPr>
-    <a:lvl6pPr marL="2286000" algn="l" defTabSz="914400" rtl="0" eaLnBrk="1" latinLnBrk="0" hangingPunct="1">
-      <a:defRPr sz="1800" kern="1200">
+    <a:lvl6pPr marL="2286000" algn="l" defTabSz="914400" rtl="0">
+      <a:defRPr sz="1800">
         <a:solidFill>
           <a:schemeClr val="tx1"/>
         </a:solidFill>
@@ -77,8 +77,8 @@
         <a:cs typeface="+mn-cs"/>
       </a:defRPr>
     </a:lvl6pPr>
-    <a:lvl7pPr marL="2743200" algn="l" defTabSz="914400" rtl="0" eaLnBrk="1" latinLnBrk="0" hangingPunct="1">
-      <a:defRPr sz="1800" kern="1200">
+    <a:lvl7pPr marL="2743200" algn="l" defTabSz="914400" rtl="0">
+      <a:defRPr sz="1800">
         <a:solidFill>
           <a:schemeClr val="tx1"/>
         </a:solidFill>
@@ -87,8 +87,8 @@
         <a:cs typeface="+mn-cs"/>
       </a:defRPr>
     </a:lvl7pPr>
-    <a:lvl8pPr marL="3200400" algn="l" defTabSz="914400" rtl="0" eaLnBrk="1" latinLnBrk="0" hangingPunct="1">
-      <a:defRPr sz="1800" kern="1200">
+    <a:lvl8pPr marL="3200400" algn="l" defTabSz="914400" rtl="0">
+      <a:defRPr sz="1800">
         <a:solidFill>
           <a:schemeClr val="tx1"/>
         </a:solidFill>
@@ -97,8 +97,8 @@
         <a:cs typeface="+mn-cs"/>
       </a:defRPr>
     </a:lvl8pPr>
-    <a:lvl9pPr marL="3657600" algn="l" defTabSz="914400" rtl="0" eaLnBrk="1" latinLnBrk="0" hangingPunct="1">
-      <a:defRPr sz="1800" kern="1200">
+    <a:lvl9pPr marL="3657600" algn="l" defTabSz="914400" rtl="0">
+      <a:defRPr sz="1800">
         <a:solidFill>
           <a:schemeClr val="tx1"/>
         </a:solidFill>
@@ -108,30 +108,12 @@
       </a:defRPr>
     </a:lvl9pPr>
   </p:defaultTextStyle>
-  <p:extLst>
-    <p:ext uri="{EFAFB233-063F-42B5-8137-9DF3F51BA10A}">
-      <p15:sldGuideLst xmlns:p15="http://schemas.microsoft.com/office/powerpoint/2012/main"/>
-    </p:ext>
-  </p:extLst>
 </p:presentation>
-</file>
-
-<file path=ppt/revisionInfo.xml><?xml version="1.0" encoding="utf-8"?>
-<p1510:revInfo xmlns:a="http://schemas.openxmlformats.org/drawingml/2006/main" xmlns:r="http://schemas.openxmlformats.org/officeDocument/2006/relationships" xmlns:p1510="http://schemas.microsoft.com/office/powerpoint/2015/10/main">
-  <p1510:revLst>
-    <p1510:client id="{070A465E-0F7A-5E18-E417-C6C76D68DE24}" v="100" dt="2026-05-14T10:50:11.713"/>
-    <p1510:client id="{44273B2E-605A-40C7-4483-88731E6C1CE2}" v="236" dt="2026-05-13T16:04:57.409"/>
-    <p1510:client id="{5238C5EE-D8BB-698B-1543-97DB9AB41213}" v="114" dt="2026-05-15T11:18:48.134"/>
-    <p1510:client id="{8B26CBBF-949B-BB3C-C70A-2C8526ECD49B}" v="159" dt="2026-05-14T09:12:38.247"/>
-    <p1510:client id="{E94C5293-EF22-C3C8-1384-3EA8ECCE828F}" v="56" dt="2026-05-14T09:49:23.555"/>
-    <p1510:client id="{EDC20371-EB64-6556-285C-4E93509F2755}" v="5" dt="2026-05-15T09:53:11.708"/>
-  </p1510:revLst>
-</p1510:revInfo>
 </file>
 
 <file path=ppt/notesMasters/notesMaster1.xml><?xml version="1.0" encoding="utf-8"?>
 <p:notesMaster xmlns:a="http://schemas.openxmlformats.org/drawingml/2006/main" xmlns:r="http://schemas.openxmlformats.org/officeDocument/2006/relationships" xmlns:p="http://schemas.openxmlformats.org/presentationml/2006/main">
-  <p:cSld>
+  <p:cSld name="">
     <p:bg>
       <p:bgRef idx="1001">
         <a:schemeClr val="bg1"/>
@@ -143,7 +125,7 @@
         <p:cNvGrpSpPr/>
         <p:nvPr/>
       </p:nvGrpSpPr>
-      <p:grpSpPr>
+      <p:grpSpPr bwMode="auto">
         <a:xfrm>
           <a:off x="0" y="0"/>
           <a:ext cx="0" cy="0"/>
@@ -153,7 +135,7 @@
       </p:grpSpPr>
       <p:sp>
         <p:nvSpPr>
-          <p:cNvPr id="2" name="Espace réservé de l'en-tête 1"/>
+          <p:cNvPr id="1318569634" name="Espace réservé de l'en-tête 1"/>
           <p:cNvSpPr>
             <a:spLocks noGrp="1"/>
           </p:cNvSpPr>
@@ -161,7 +143,7 @@
             <p:ph type="hdr" sz="quarter"/>
           </p:nvPr>
         </p:nvSpPr>
-        <p:spPr>
+        <p:spPr bwMode="auto">
           <a:xfrm>
             <a:off x="0" y="0"/>
             <a:ext cx="2971800" cy="458788"/>
@@ -178,13 +160,16 @@
             </a:lvl1pPr>
           </a:lstStyle>
           <a:p>
+            <a:pPr>
+              <a:defRPr/>
+            </a:pPr>
             <a:endParaRPr lang="fr-FR"/>
           </a:p>
         </p:txBody>
       </p:sp>
       <p:sp>
         <p:nvSpPr>
-          <p:cNvPr id="3" name="Espace réservé de la date 2"/>
+          <p:cNvPr id="689272151" name="Espace réservé de la date 2"/>
           <p:cNvSpPr>
             <a:spLocks noGrp="1"/>
           </p:cNvSpPr>
@@ -192,7 +177,7 @@
             <p:ph type="dt" idx="1"/>
           </p:nvPr>
         </p:nvSpPr>
-        <p:spPr>
+        <p:spPr bwMode="auto">
           <a:xfrm>
             <a:off x="3884613" y="0"/>
             <a:ext cx="2971800" cy="458788"/>
@@ -209,8 +194,11 @@
             </a:lvl1pPr>
           </a:lstStyle>
           <a:p>
+            <a:pPr>
+              <a:defRPr/>
+            </a:pPr>
             <a:fld id="{34DCE42B-DA9F-8242-806F-7F8979AB1BDA}" type="datetimeFigureOut">
-              <a:rPr lang="fr-FR" smtClean="0"/>
+              <a:rPr lang="fr-FR"/>
               <a:t>15/05/2026</a:t>
             </a:fld>
             <a:endParaRPr lang="fr-FR"/>
@@ -219,15 +207,15 @@
       </p:sp>
       <p:sp>
         <p:nvSpPr>
-          <p:cNvPr id="4" name="Espace réservé de l'image des diapositives 3"/>
+          <p:cNvPr id="1341394984" name="Espace réservé de l'image des diapositives 3"/>
           <p:cNvSpPr>
-            <a:spLocks noGrp="1" noRot="1" noChangeAspect="1"/>
+            <a:spLocks noChangeAspect="1" noGrp="1" noRot="1"/>
           </p:cNvSpPr>
           <p:nvPr>
             <p:ph type="sldImg" idx="2"/>
           </p:nvPr>
         </p:nvSpPr>
-        <p:spPr>
+        <p:spPr bwMode="auto">
           <a:xfrm>
             <a:off x="685800" y="1143000"/>
             <a:ext cx="5486400" cy="3086100"/>
@@ -246,13 +234,16 @@
           <a:bodyPr vert="horz" lIns="91440" tIns="45720" rIns="91440" bIns="45720" rtlCol="0" anchor="ctr"/>
           <a:lstStyle/>
           <a:p>
+            <a:pPr>
+              <a:defRPr/>
+            </a:pPr>
             <a:endParaRPr lang="fr-FR"/>
           </a:p>
         </p:txBody>
       </p:sp>
       <p:sp>
         <p:nvSpPr>
-          <p:cNvPr id="5" name="Espace réservé des notes 4"/>
+          <p:cNvPr id="430235344" name="Espace réservé des notes 4"/>
           <p:cNvSpPr>
             <a:spLocks noGrp="1"/>
           </p:cNvSpPr>
@@ -260,7 +251,7 @@
             <p:ph type="body" sz="quarter" idx="3"/>
           </p:nvPr>
         </p:nvSpPr>
-        <p:spPr>
+        <p:spPr bwMode="auto">
           <a:xfrm>
             <a:off x="685800" y="4400550"/>
             <a:ext cx="5486400" cy="3600450"/>
@@ -273,20 +264,48 @@
           <a:bodyPr vert="horz" lIns="91440" tIns="45720" rIns="91440" bIns="45720" rtlCol="0"/>
           <a:lstStyle/>
           <a:p>
+            <a:pPr>
+              <a:defRPr/>
+            </a:pPr>
             <a:r>
               <a:rPr lang="fr-FR"/>
-              <a:t>Modifier les styles du texte du masque
-Deuxième niveau
-Troisième niveau
-Quatrième niveau
-Cinquième niveau</a:t>
+              <a:t>Modifier les styles du texte du masque</a:t>
             </a:r>
+            <a:br>
+              <a:rPr lang="fr-FR"/>
+            </a:br>
+            <a:r>
+              <a:rPr lang="fr-FR"/>
+              <a:t>Deuxième niveau</a:t>
+            </a:r>
+            <a:br>
+              <a:rPr lang="fr-FR"/>
+            </a:br>
+            <a:r>
+              <a:rPr lang="fr-FR"/>
+              <a:t>Troisième niveau</a:t>
+            </a:r>
+            <a:br>
+              <a:rPr lang="fr-FR"/>
+            </a:br>
+            <a:r>
+              <a:rPr lang="fr-FR"/>
+              <a:t>Quatrième niveau</a:t>
+            </a:r>
+            <a:br>
+              <a:rPr lang="fr-FR"/>
+            </a:br>
+            <a:r>
+              <a:rPr lang="fr-FR"/>
+              <a:t>Cinquième niveau</a:t>
+            </a:r>
+            <a:endParaRPr/>
           </a:p>
         </p:txBody>
       </p:sp>
       <p:sp>
         <p:nvSpPr>
-          <p:cNvPr id="6" name="Espace réservé du pied de page 5"/>
+          <p:cNvPr id="369757172" name="Espace réservé du pied de page 5"/>
           <p:cNvSpPr>
             <a:spLocks noGrp="1"/>
           </p:cNvSpPr>
@@ -294,7 +313,7 @@
             <p:ph type="ftr" sz="quarter" idx="4"/>
           </p:nvPr>
         </p:nvSpPr>
-        <p:spPr>
+        <p:spPr bwMode="auto">
           <a:xfrm>
             <a:off x="0" y="8685213"/>
             <a:ext cx="2971800" cy="458787"/>
@@ -311,13 +330,16 @@
             </a:lvl1pPr>
           </a:lstStyle>
           <a:p>
+            <a:pPr>
+              <a:defRPr/>
+            </a:pPr>
             <a:endParaRPr lang="fr-FR"/>
           </a:p>
         </p:txBody>
       </p:sp>
       <p:sp>
         <p:nvSpPr>
-          <p:cNvPr id="7" name="Espace réservé du numéro de diapositive 6"/>
+          <p:cNvPr id="1741213541" name="Espace réservé du numéro de diapositive 6"/>
           <p:cNvSpPr>
             <a:spLocks noGrp="1"/>
           </p:cNvSpPr>
@@ -325,7 +347,7 @@
             <p:ph type="sldNum" sz="quarter" idx="5"/>
           </p:nvPr>
         </p:nvSpPr>
-        <p:spPr>
+        <p:spPr bwMode="auto">
           <a:xfrm>
             <a:off x="3884613" y="8685213"/>
             <a:ext cx="2971800" cy="458787"/>
@@ -342,8 +364,11 @@
             </a:lvl1pPr>
           </a:lstStyle>
           <a:p>
+            <a:pPr>
+              <a:defRPr/>
+            </a:pPr>
             <a:fld id="{AFA22E5B-262A-4540-B147-1710E76D33DE}" type="slidenum">
-              <a:rPr lang="fr-FR" smtClean="0"/>
+              <a:rPr lang="fr-FR"/>
               <a:t>‹#›</a:t>
             </a:fld>
             <a:endParaRPr lang="fr-FR"/>
@@ -351,16 +376,11 @@
         </p:txBody>
       </p:sp>
     </p:spTree>
-    <p:extLst>
-      <p:ext uri="{BB962C8B-B14F-4D97-AF65-F5344CB8AC3E}">
-        <p14:creationId xmlns:p14="http://schemas.microsoft.com/office/powerpoint/2010/main" val="1620157620"/>
-      </p:ext>
-    </p:extLst>
   </p:cSld>
   <p:clrMap bg1="lt1" tx1="dk1" bg2="lt2" tx2="dk2" accent1="accent1" accent2="accent2" accent3="accent3" accent4="accent4" accent5="accent5" accent6="accent6" hlink="hlink" folHlink="folHlink"/>
   <p:notesStyle>
-    <a:lvl1pPr marL="0" algn="l" defTabSz="914400" rtl="0" eaLnBrk="1" latinLnBrk="0" hangingPunct="1">
-      <a:defRPr sz="1200" kern="1200">
+    <a:lvl1pPr marL="0" algn="l" defTabSz="914400" rtl="0">
+      <a:defRPr sz="1200">
         <a:solidFill>
           <a:schemeClr val="tx1"/>
         </a:solidFill>
@@ -369,8 +389,8 @@
         <a:cs typeface="+mn-cs"/>
       </a:defRPr>
     </a:lvl1pPr>
-    <a:lvl2pPr marL="457200" algn="l" defTabSz="914400" rtl="0" eaLnBrk="1" latinLnBrk="0" hangingPunct="1">
-      <a:defRPr sz="1200" kern="1200">
+    <a:lvl2pPr marL="457200" algn="l" defTabSz="914400" rtl="0">
+      <a:defRPr sz="1200">
         <a:solidFill>
           <a:schemeClr val="tx1"/>
         </a:solidFill>
@@ -379,8 +399,8 @@
         <a:cs typeface="+mn-cs"/>
       </a:defRPr>
     </a:lvl2pPr>
-    <a:lvl3pPr marL="914400" algn="l" defTabSz="914400" rtl="0" eaLnBrk="1" latinLnBrk="0" hangingPunct="1">
-      <a:defRPr sz="1200" kern="1200">
+    <a:lvl3pPr marL="914400" algn="l" defTabSz="914400" rtl="0">
+      <a:defRPr sz="1200">
         <a:solidFill>
           <a:schemeClr val="tx1"/>
         </a:solidFill>
@@ -389,8 +409,8 @@
         <a:cs typeface="+mn-cs"/>
       </a:defRPr>
     </a:lvl3pPr>
-    <a:lvl4pPr marL="1371600" algn="l" defTabSz="914400" rtl="0" eaLnBrk="1" latinLnBrk="0" hangingPunct="1">
-      <a:defRPr sz="1200" kern="1200">
+    <a:lvl4pPr marL="1371600" algn="l" defTabSz="914400" rtl="0">
+      <a:defRPr sz="1200">
         <a:solidFill>
           <a:schemeClr val="tx1"/>
         </a:solidFill>
@@ -399,8 +419,8 @@
         <a:cs typeface="+mn-cs"/>
       </a:defRPr>
     </a:lvl4pPr>
-    <a:lvl5pPr marL="1828800" algn="l" defTabSz="914400" rtl="0" eaLnBrk="1" latinLnBrk="0" hangingPunct="1">
-      <a:defRPr sz="1200" kern="1200">
+    <a:lvl5pPr marL="1828800" algn="l" defTabSz="914400" rtl="0">
+      <a:defRPr sz="1200">
         <a:solidFill>
           <a:schemeClr val="tx1"/>
         </a:solidFill>
@@ -409,8 +429,8 @@
         <a:cs typeface="+mn-cs"/>
       </a:defRPr>
     </a:lvl5pPr>
-    <a:lvl6pPr marL="2286000" algn="l" defTabSz="914400" rtl="0" eaLnBrk="1" latinLnBrk="0" hangingPunct="1">
-      <a:defRPr sz="1200" kern="1200">
+    <a:lvl6pPr marL="2286000" algn="l" defTabSz="914400" rtl="0">
+      <a:defRPr sz="1200">
         <a:solidFill>
           <a:schemeClr val="tx1"/>
         </a:solidFill>
@@ -419,8 +439,8 @@
         <a:cs typeface="+mn-cs"/>
       </a:defRPr>
     </a:lvl6pPr>
-    <a:lvl7pPr marL="2743200" algn="l" defTabSz="914400" rtl="0" eaLnBrk="1" latinLnBrk="0" hangingPunct="1">
-      <a:defRPr sz="1200" kern="1200">
+    <a:lvl7pPr marL="2743200" algn="l" defTabSz="914400" rtl="0">
+      <a:defRPr sz="1200">
         <a:solidFill>
           <a:schemeClr val="tx1"/>
         </a:solidFill>
@@ -429,8 +449,8 @@
         <a:cs typeface="+mn-cs"/>
       </a:defRPr>
     </a:lvl7pPr>
-    <a:lvl8pPr marL="3200400" algn="l" defTabSz="914400" rtl="0" eaLnBrk="1" latinLnBrk="0" hangingPunct="1">
-      <a:defRPr sz="1200" kern="1200">
+    <a:lvl8pPr marL="3200400" algn="l" defTabSz="914400" rtl="0">
+      <a:defRPr sz="1200">
         <a:solidFill>
           <a:schemeClr val="tx1"/>
         </a:solidFill>
@@ -439,8 +459,8 @@
         <a:cs typeface="+mn-cs"/>
       </a:defRPr>
     </a:lvl8pPr>
-    <a:lvl9pPr marL="3657600" algn="l" defTabSz="914400" rtl="0" eaLnBrk="1" latinLnBrk="0" hangingPunct="1">
-      <a:defRPr sz="1200" kern="1200">
+    <a:lvl9pPr marL="3657600" algn="l" defTabSz="914400" rtl="0">
+      <a:defRPr sz="1200">
         <a:solidFill>
           <a:schemeClr val="tx1"/>
         </a:solidFill>
@@ -454,15 +474,15 @@
 </file>
 
 <file path=ppt/notesSlides/notesSlide1.xml><?xml version="1.0" encoding="utf-8"?>
-<p:notes xmlns:a="http://schemas.openxmlformats.org/drawingml/2006/main" xmlns:r="http://schemas.openxmlformats.org/officeDocument/2006/relationships" xmlns:p="http://schemas.openxmlformats.org/presentationml/2006/main">
-  <p:cSld>
+<p:notes xmlns:a="http://schemas.openxmlformats.org/drawingml/2006/main" xmlns:r="http://schemas.openxmlformats.org/officeDocument/2006/relationships" xmlns:p="http://schemas.openxmlformats.org/presentationml/2006/main" xmlns:m="http://schemas.openxmlformats.org/officeDocument/2006/math" xmlns:w="http://schemas.openxmlformats.org/wordprocessingml/2006/main">
+  <p:cSld name="">
     <p:spTree>
       <p:nvGrpSpPr>
         <p:cNvPr id="1" name=""/>
         <p:cNvGrpSpPr/>
         <p:nvPr/>
       </p:nvGrpSpPr>
-      <p:grpSpPr>
+      <p:grpSpPr bwMode="auto">
         <a:xfrm>
           <a:off x="0" y="0"/>
           <a:ext cx="0" cy="0"/>
@@ -472,19 +492,19 @@
       </p:grpSpPr>
       <p:sp>
         <p:nvSpPr>
-          <p:cNvPr id="2" name="Slide Image Placeholder 1"/>
+          <p:cNvPr id="983334661" name="Slide Image Placeholder 1"/>
           <p:cNvSpPr>
-            <a:spLocks noGrp="1" noRot="1" noChangeAspect="1"/>
+            <a:spLocks noChangeAspect="1" noGrp="1" noRot="1"/>
           </p:cNvSpPr>
           <p:nvPr>
             <p:ph type="sldImg"/>
           </p:nvPr>
         </p:nvSpPr>
-        <p:spPr/>
+        <p:spPr bwMode="auto"/>
       </p:sp>
       <p:sp>
         <p:nvSpPr>
-          <p:cNvPr id="3" name="Notes Placeholder 2"/>
+          <p:cNvPr id="2014383657" name="Notes Placeholder 2"/>
           <p:cNvSpPr>
             <a:spLocks noGrp="1"/>
           </p:cNvSpPr>
@@ -492,18 +512,21 @@
             <p:ph type="body" idx="1"/>
           </p:nvPr>
         </p:nvSpPr>
-        <p:spPr/>
+        <p:spPr bwMode="auto"/>
         <p:txBody>
           <a:bodyPr/>
           <a:lstStyle/>
           <a:p>
-            <a:endParaRPr lang="en-MA"/>
+            <a:pPr>
+              <a:defRPr/>
+            </a:pPr>
+            <a:endParaRPr/>
           </a:p>
         </p:txBody>
       </p:sp>
       <p:sp>
         <p:nvSpPr>
-          <p:cNvPr id="4" name="Slide Number Placeholder 3"/>
+          <p:cNvPr id="42704699" name="Slide Number Placeholder 3"/>
           <p:cNvSpPr>
             <a:spLocks noGrp="1"/>
           </p:cNvSpPr>
@@ -511,25 +534,23 @@
             <p:ph type="sldNum" sz="quarter" idx="5"/>
           </p:nvPr>
         </p:nvSpPr>
-        <p:spPr/>
+        <p:spPr bwMode="auto"/>
         <p:txBody>
           <a:bodyPr/>
           <a:lstStyle/>
           <a:p>
+            <a:pPr>
+              <a:defRPr/>
+            </a:pPr>
             <a:fld id="{24383A2B-8653-2641-A3B9-F84DFE18686C}" type="slidenum">
-              <a:rPr lang="en-MA" smtClean="0"/>
+              <a:rPr/>
               <a:t>1</a:t>
             </a:fld>
-            <a:endParaRPr lang="en-MA"/>
+            <a:endParaRPr/>
           </a:p>
         </p:txBody>
       </p:sp>
     </p:spTree>
-    <p:extLst>
-      <p:ext uri="{BB962C8B-B14F-4D97-AF65-F5344CB8AC3E}">
-        <p14:creationId xmlns:p14="http://schemas.microsoft.com/office/powerpoint/2010/main" val="3356013480"/>
-      </p:ext>
-    </p:extLst>
   </p:cSld>
   <p:clrMapOvr>
     <a:masterClrMapping/>
@@ -538,15 +559,15 @@
 </file>
 
 <file path=ppt/notesSlides/notesSlide2.xml><?xml version="1.0" encoding="utf-8"?>
-<p:notes xmlns:a="http://schemas.openxmlformats.org/drawingml/2006/main" xmlns:r="http://schemas.openxmlformats.org/officeDocument/2006/relationships" xmlns:p="http://schemas.openxmlformats.org/presentationml/2006/main">
-  <p:cSld>
+<p:notes xmlns:a="http://schemas.openxmlformats.org/drawingml/2006/main" xmlns:r="http://schemas.openxmlformats.org/officeDocument/2006/relationships" xmlns:p="http://schemas.openxmlformats.org/presentationml/2006/main" xmlns:m="http://schemas.openxmlformats.org/officeDocument/2006/math" xmlns:w="http://schemas.openxmlformats.org/wordprocessingml/2006/main">
+  <p:cSld name="">
     <p:spTree>
       <p:nvGrpSpPr>
         <p:cNvPr id="1" name=""/>
         <p:cNvGrpSpPr/>
         <p:nvPr/>
       </p:nvGrpSpPr>
-      <p:grpSpPr>
+      <p:grpSpPr bwMode="auto">
         <a:xfrm>
           <a:off x="0" y="0"/>
           <a:ext cx="0" cy="0"/>
@@ -556,19 +577,19 @@
       </p:grpSpPr>
       <p:sp>
         <p:nvSpPr>
-          <p:cNvPr id="2" name="Slide Image Placeholder 1"/>
+          <p:cNvPr id="1539303260" name="Slide Image Placeholder 1"/>
           <p:cNvSpPr>
-            <a:spLocks noGrp="1" noRot="1" noChangeAspect="1"/>
+            <a:spLocks noChangeAspect="1" noGrp="1" noRot="1"/>
           </p:cNvSpPr>
           <p:nvPr>
             <p:ph type="sldImg"/>
           </p:nvPr>
         </p:nvSpPr>
-        <p:spPr/>
+        <p:spPr bwMode="auto"/>
       </p:sp>
       <p:sp>
         <p:nvSpPr>
-          <p:cNvPr id="3" name="Notes Placeholder 2"/>
+          <p:cNvPr id="2011295039" name="Notes Placeholder 2"/>
           <p:cNvSpPr>
             <a:spLocks noGrp="1"/>
           </p:cNvSpPr>
@@ -576,18 +597,21 @@
             <p:ph type="body" idx="1"/>
           </p:nvPr>
         </p:nvSpPr>
-        <p:spPr/>
+        <p:spPr bwMode="auto"/>
         <p:txBody>
           <a:bodyPr/>
           <a:lstStyle/>
           <a:p>
-            <a:endParaRPr lang="en-MA"/>
+            <a:pPr>
+              <a:defRPr/>
+            </a:pPr>
+            <a:endParaRPr/>
           </a:p>
         </p:txBody>
       </p:sp>
       <p:sp>
         <p:nvSpPr>
-          <p:cNvPr id="4" name="Slide Number Placeholder 3"/>
+          <p:cNvPr id="64098080" name="Slide Number Placeholder 3"/>
           <p:cNvSpPr>
             <a:spLocks noGrp="1"/>
           </p:cNvSpPr>
@@ -595,25 +619,23 @@
             <p:ph type="sldNum" sz="quarter" idx="5"/>
           </p:nvPr>
         </p:nvSpPr>
-        <p:spPr/>
+        <p:spPr bwMode="auto"/>
         <p:txBody>
           <a:bodyPr/>
           <a:lstStyle/>
           <a:p>
+            <a:pPr>
+              <a:defRPr/>
+            </a:pPr>
             <a:fld id="{24383A2B-8653-2641-A3B9-F84DFE18686C}" type="slidenum">
-              <a:rPr lang="en-MA" smtClean="0"/>
+              <a:rPr/>
               <a:t>2</a:t>
             </a:fld>
-            <a:endParaRPr lang="en-MA"/>
+            <a:endParaRPr/>
           </a:p>
         </p:txBody>
       </p:sp>
     </p:spTree>
-    <p:extLst>
-      <p:ext uri="{BB962C8B-B14F-4D97-AF65-F5344CB8AC3E}">
-        <p14:creationId xmlns:p14="http://schemas.microsoft.com/office/powerpoint/2010/main" val="2763089782"/>
-      </p:ext>
-    </p:extLst>
   </p:cSld>
   <p:clrMapOvr>
     <a:masterClrMapping/>
@@ -622,7 +644,7 @@
 </file>
 
 <file path=ppt/slideLayouts/slideLayout1.xml><?xml version="1.0" encoding="utf-8"?>
-<p:sldLayout xmlns:a="http://schemas.openxmlformats.org/drawingml/2006/main" xmlns:r="http://schemas.openxmlformats.org/officeDocument/2006/relationships" xmlns:p="http://schemas.openxmlformats.org/presentationml/2006/main" type="title" preserve="1">
+<p:sldLayout xmlns:a="http://schemas.openxmlformats.org/drawingml/2006/main" xmlns:r="http://schemas.openxmlformats.org/officeDocument/2006/relationships" xmlns:p="http://schemas.openxmlformats.org/presentationml/2006/main" xmlns:m="http://schemas.openxmlformats.org/officeDocument/2006/math" xmlns:w="http://schemas.openxmlformats.org/wordprocessingml/2006/main" matchingName="" preserve="1" showMasterPhAnim="0" showMasterSp="1" type="title" userDrawn="1">
   <p:cSld name="Diapositive de titre">
     <p:spTree>
       <p:nvGrpSpPr>
@@ -630,7 +652,7 @@
         <p:cNvGrpSpPr/>
         <p:nvPr/>
       </p:nvGrpSpPr>
-      <p:grpSpPr>
+      <p:grpSpPr bwMode="auto">
         <a:xfrm>
           <a:off x="0" y="0"/>
           <a:ext cx="0" cy="0"/>
@@ -640,13 +662,7 @@
       </p:grpSpPr>
       <p:sp>
         <p:nvSpPr>
-          <p:cNvPr id="2" name="Titre 1">
-            <a:extLst>
-              <a:ext uri="{FF2B5EF4-FFF2-40B4-BE49-F238E27FC236}">
-                <a16:creationId xmlns:a16="http://schemas.microsoft.com/office/drawing/2014/main" id="{A2E9E739-8833-6C4E-9EAC-BC1359B113E6}"/>
-              </a:ext>
-            </a:extLst>
-          </p:cNvPr>
+          <p:cNvPr id="106254025" name="Titre 1"/>
           <p:cNvSpPr>
             <a:spLocks noGrp="1"/>
           </p:cNvSpPr>
@@ -654,7 +670,7 @@
             <p:ph type="ctrTitle"/>
           </p:nvPr>
         </p:nvSpPr>
-        <p:spPr>
+        <p:spPr bwMode="auto">
           <a:xfrm>
             <a:off x="1524000" y="1122363"/>
             <a:ext cx="9144000" cy="2387600"/>
@@ -668,22 +684,20 @@
             </a:lvl1pPr>
           </a:lstStyle>
           <a:p>
+            <a:pPr>
+              <a:defRPr/>
+            </a:pPr>
             <a:r>
               <a:rPr lang="fr-FR"/>
               <a:t>Modifiez le style du titre</a:t>
             </a:r>
+            <a:endParaRPr/>
           </a:p>
         </p:txBody>
       </p:sp>
       <p:sp>
         <p:nvSpPr>
-          <p:cNvPr id="3" name="Sous-titre 2">
-            <a:extLst>
-              <a:ext uri="{FF2B5EF4-FFF2-40B4-BE49-F238E27FC236}">
-                <a16:creationId xmlns:a16="http://schemas.microsoft.com/office/drawing/2014/main" id="{0C0F303F-F518-064B-9757-FAEC83E90915}"/>
-              </a:ext>
-            </a:extLst>
-          </p:cNvPr>
+          <p:cNvPr id="127848010" name="Sous-titre 2"/>
           <p:cNvSpPr>
             <a:spLocks noGrp="1"/>
           </p:cNvSpPr>
@@ -691,7 +705,7 @@
             <p:ph type="subTitle" idx="1"/>
           </p:nvPr>
         </p:nvSpPr>
-        <p:spPr>
+        <p:spPr bwMode="auto">
           <a:xfrm>
             <a:off x="1524000" y="3602038"/>
             <a:ext cx="9144000" cy="1655762"/>
@@ -738,22 +752,20 @@
             </a:lvl9pPr>
           </a:lstStyle>
           <a:p>
+            <a:pPr>
+              <a:defRPr/>
+            </a:pPr>
             <a:r>
               <a:rPr lang="fr-FR"/>
               <a:t>Modifiez le style des sous-titres du masque</a:t>
             </a:r>
+            <a:endParaRPr/>
           </a:p>
         </p:txBody>
       </p:sp>
       <p:sp>
         <p:nvSpPr>
-          <p:cNvPr id="4" name="Espace réservé de la date 3">
-            <a:extLst>
-              <a:ext uri="{FF2B5EF4-FFF2-40B4-BE49-F238E27FC236}">
-                <a16:creationId xmlns:a16="http://schemas.microsoft.com/office/drawing/2014/main" id="{911BC5F6-0E3B-0446-89A8-9573D26CF145}"/>
-              </a:ext>
-            </a:extLst>
-          </p:cNvPr>
+          <p:cNvPr id="305500248" name="Espace réservé de la date 3"/>
           <p:cNvSpPr>
             <a:spLocks noGrp="1"/>
           </p:cNvSpPr>
@@ -761,13 +773,16 @@
             <p:ph type="dt" sz="half" idx="10"/>
           </p:nvPr>
         </p:nvSpPr>
-        <p:spPr/>
+        <p:spPr bwMode="auto"/>
         <p:txBody>
           <a:bodyPr/>
           <a:lstStyle/>
           <a:p>
+            <a:pPr>
+              <a:defRPr/>
+            </a:pPr>
             <a:fld id="{F585D4FA-9869-8449-9681-FA4BEB67A84F}" type="datetimeFigureOut">
-              <a:rPr lang="fr-FR" smtClean="0"/>
+              <a:rPr lang="fr-FR"/>
               <a:t>15/05/2026</a:t>
             </a:fld>
             <a:endParaRPr lang="fr-FR"/>
@@ -776,13 +791,7 @@
       </p:sp>
       <p:sp>
         <p:nvSpPr>
-          <p:cNvPr id="5" name="Espace réservé du pied de page 4">
-            <a:extLst>
-              <a:ext uri="{FF2B5EF4-FFF2-40B4-BE49-F238E27FC236}">
-                <a16:creationId xmlns:a16="http://schemas.microsoft.com/office/drawing/2014/main" id="{EB94FF80-908C-A34F-8153-6789C5CB8849}"/>
-              </a:ext>
-            </a:extLst>
-          </p:cNvPr>
+          <p:cNvPr id="1648456107" name="Espace réservé du pied de page 4"/>
           <p:cNvSpPr>
             <a:spLocks noGrp="1"/>
           </p:cNvSpPr>
@@ -790,24 +799,21 @@
             <p:ph type="ftr" sz="quarter" idx="11"/>
           </p:nvPr>
         </p:nvSpPr>
-        <p:spPr/>
+        <p:spPr bwMode="auto"/>
         <p:txBody>
           <a:bodyPr/>
           <a:lstStyle/>
           <a:p>
+            <a:pPr>
+              <a:defRPr/>
+            </a:pPr>
             <a:endParaRPr lang="fr-FR"/>
           </a:p>
         </p:txBody>
       </p:sp>
       <p:sp>
         <p:nvSpPr>
-          <p:cNvPr id="6" name="Espace réservé du numéro de diapositive 5">
-            <a:extLst>
-              <a:ext uri="{FF2B5EF4-FFF2-40B4-BE49-F238E27FC236}">
-                <a16:creationId xmlns:a16="http://schemas.microsoft.com/office/drawing/2014/main" id="{EAB60070-1C87-3945-B1C7-D01AF08A937E}"/>
-              </a:ext>
-            </a:extLst>
-          </p:cNvPr>
+          <p:cNvPr id="1401207002" name="Espace réservé du numéro de diapositive 5"/>
           <p:cNvSpPr>
             <a:spLocks noGrp="1"/>
           </p:cNvSpPr>
@@ -815,13 +821,16 @@
             <p:ph type="sldNum" sz="quarter" idx="12"/>
           </p:nvPr>
         </p:nvSpPr>
-        <p:spPr/>
+        <p:spPr bwMode="auto"/>
         <p:txBody>
           <a:bodyPr/>
           <a:lstStyle/>
           <a:p>
+            <a:pPr>
+              <a:defRPr/>
+            </a:pPr>
             <a:fld id="{A53C86B5-489E-E049-BD62-B07127F1532D}" type="slidenum">
-              <a:rPr lang="fr-FR" smtClean="0"/>
+              <a:rPr lang="fr-FR"/>
               <a:t>‹#›</a:t>
             </a:fld>
             <a:endParaRPr lang="fr-FR"/>
@@ -829,11 +838,6 @@
         </p:txBody>
       </p:sp>
     </p:spTree>
-    <p:extLst>
-      <p:ext uri="{BB962C8B-B14F-4D97-AF65-F5344CB8AC3E}">
-        <p14:creationId xmlns:p14="http://schemas.microsoft.com/office/powerpoint/2010/main" val="4153153895"/>
-      </p:ext>
-    </p:extLst>
   </p:cSld>
   <p:clrMapOvr>
     <a:masterClrMapping/>
@@ -842,7 +846,7 @@
 </file>
 
 <file path=ppt/slideLayouts/slideLayout10.xml><?xml version="1.0" encoding="utf-8"?>
-<p:sldLayout xmlns:a="http://schemas.openxmlformats.org/drawingml/2006/main" xmlns:r="http://schemas.openxmlformats.org/officeDocument/2006/relationships" xmlns:p="http://schemas.openxmlformats.org/presentationml/2006/main" type="vertTx" preserve="1">
+<p:sldLayout xmlns:a="http://schemas.openxmlformats.org/drawingml/2006/main" xmlns:r="http://schemas.openxmlformats.org/officeDocument/2006/relationships" xmlns:p="http://schemas.openxmlformats.org/presentationml/2006/main" xmlns:m="http://schemas.openxmlformats.org/officeDocument/2006/math" xmlns:w="http://schemas.openxmlformats.org/wordprocessingml/2006/main" matchingName="" preserve="1" showMasterPhAnim="0" showMasterSp="1" type="vertTx" userDrawn="1">
   <p:cSld name="Titre et texte vertical">
     <p:spTree>
       <p:nvGrpSpPr>
@@ -850,7 +854,7 @@
         <p:cNvGrpSpPr/>
         <p:nvPr/>
       </p:nvGrpSpPr>
-      <p:grpSpPr>
+      <p:grpSpPr bwMode="auto">
         <a:xfrm>
           <a:off x="0" y="0"/>
           <a:ext cx="0" cy="0"/>
@@ -860,13 +864,7 @@
       </p:grpSpPr>
       <p:sp>
         <p:nvSpPr>
-          <p:cNvPr id="2" name="Titre 1">
-            <a:extLst>
-              <a:ext uri="{FF2B5EF4-FFF2-40B4-BE49-F238E27FC236}">
-                <a16:creationId xmlns:a16="http://schemas.microsoft.com/office/drawing/2014/main" id="{38D9CE96-5912-4A49-A4DC-4B2341068D62}"/>
-              </a:ext>
-            </a:extLst>
-          </p:cNvPr>
+          <p:cNvPr id="1021733276" name="Titre 1"/>
           <p:cNvSpPr>
             <a:spLocks noGrp="1"/>
           </p:cNvSpPr>
@@ -874,27 +872,25 @@
             <p:ph type="title"/>
           </p:nvPr>
         </p:nvSpPr>
-        <p:spPr/>
+        <p:spPr bwMode="auto"/>
         <p:txBody>
           <a:bodyPr/>
           <a:lstStyle/>
           <a:p>
+            <a:pPr>
+              <a:defRPr/>
+            </a:pPr>
             <a:r>
               <a:rPr lang="fr-FR"/>
               <a:t>Modifiez le style du titre</a:t>
             </a:r>
+            <a:endParaRPr/>
           </a:p>
         </p:txBody>
       </p:sp>
       <p:sp>
         <p:nvSpPr>
-          <p:cNvPr id="3" name="Espace réservé du texte vertical 2">
-            <a:extLst>
-              <a:ext uri="{FF2B5EF4-FFF2-40B4-BE49-F238E27FC236}">
-                <a16:creationId xmlns:a16="http://schemas.microsoft.com/office/drawing/2014/main" id="{793D686F-A282-8146-BFCA-1CCB83A31634}"/>
-              </a:ext>
-            </a:extLst>
-          </p:cNvPr>
+          <p:cNvPr id="1358204247" name="Espace réservé du texte vertical 2"/>
           <p:cNvSpPr>
             <a:spLocks noGrp="1"/>
           </p:cNvSpPr>
@@ -902,31 +898,53 @@
             <p:ph type="body" orient="vert" idx="1"/>
           </p:nvPr>
         </p:nvSpPr>
-        <p:spPr/>
+        <p:spPr bwMode="auto"/>
         <p:txBody>
           <a:bodyPr vert="eaVert"/>
           <a:lstStyle/>
           <a:p>
+            <a:pPr>
+              <a:defRPr/>
+            </a:pPr>
             <a:r>
               <a:rPr lang="fr-FR"/>
-              <a:t>Modifier les styles du texte du masque
-Deuxième niveau
-Troisième niveau
-Quatrième niveau
-Cinquième niveau</a:t>
+              <a:t>Modifier les styles du texte du masque</a:t>
             </a:r>
+            <a:br>
+              <a:rPr lang="fr-FR"/>
+            </a:br>
+            <a:r>
+              <a:rPr lang="fr-FR"/>
+              <a:t>Deuxième niveau</a:t>
+            </a:r>
+            <a:br>
+              <a:rPr lang="fr-FR"/>
+            </a:br>
+            <a:r>
+              <a:rPr lang="fr-FR"/>
+              <a:t>Troisième niveau</a:t>
+            </a:r>
+            <a:br>
+              <a:rPr lang="fr-FR"/>
+            </a:br>
+            <a:r>
+              <a:rPr lang="fr-FR"/>
+              <a:t>Quatrième niveau</a:t>
+            </a:r>
+            <a:br>
+              <a:rPr lang="fr-FR"/>
+            </a:br>
+            <a:r>
+              <a:rPr lang="fr-FR"/>
+              <a:t>Cinquième niveau</a:t>
+            </a:r>
+            <a:endParaRPr/>
           </a:p>
         </p:txBody>
       </p:sp>
       <p:sp>
         <p:nvSpPr>
-          <p:cNvPr id="4" name="Espace réservé de la date 3">
-            <a:extLst>
-              <a:ext uri="{FF2B5EF4-FFF2-40B4-BE49-F238E27FC236}">
-                <a16:creationId xmlns:a16="http://schemas.microsoft.com/office/drawing/2014/main" id="{A76A4BCD-4FE5-E743-9A45-1CBEB5AD22A6}"/>
-              </a:ext>
-            </a:extLst>
-          </p:cNvPr>
+          <p:cNvPr id="372135861" name="Espace réservé de la date 3"/>
           <p:cNvSpPr>
             <a:spLocks noGrp="1"/>
           </p:cNvSpPr>
@@ -934,13 +952,16 @@
             <p:ph type="dt" sz="half" idx="10"/>
           </p:nvPr>
         </p:nvSpPr>
-        <p:spPr/>
+        <p:spPr bwMode="auto"/>
         <p:txBody>
           <a:bodyPr/>
           <a:lstStyle/>
           <a:p>
+            <a:pPr>
+              <a:defRPr/>
+            </a:pPr>
             <a:fld id="{F585D4FA-9869-8449-9681-FA4BEB67A84F}" type="datetimeFigureOut">
-              <a:rPr lang="fr-FR" smtClean="0"/>
+              <a:rPr lang="fr-FR"/>
               <a:t>15/05/2026</a:t>
             </a:fld>
             <a:endParaRPr lang="fr-FR"/>
@@ -949,13 +970,7 @@
       </p:sp>
       <p:sp>
         <p:nvSpPr>
-          <p:cNvPr id="5" name="Espace réservé du pied de page 4">
-            <a:extLst>
-              <a:ext uri="{FF2B5EF4-FFF2-40B4-BE49-F238E27FC236}">
-                <a16:creationId xmlns:a16="http://schemas.microsoft.com/office/drawing/2014/main" id="{52B18633-6009-4545-B059-4212D83B2EF9}"/>
-              </a:ext>
-            </a:extLst>
-          </p:cNvPr>
+          <p:cNvPr id="137244832" name="Espace réservé du pied de page 4"/>
           <p:cNvSpPr>
             <a:spLocks noGrp="1"/>
           </p:cNvSpPr>
@@ -963,24 +978,21 @@
             <p:ph type="ftr" sz="quarter" idx="11"/>
           </p:nvPr>
         </p:nvSpPr>
-        <p:spPr/>
+        <p:spPr bwMode="auto"/>
         <p:txBody>
           <a:bodyPr/>
           <a:lstStyle/>
           <a:p>
+            <a:pPr>
+              <a:defRPr/>
+            </a:pPr>
             <a:endParaRPr lang="fr-FR"/>
           </a:p>
         </p:txBody>
       </p:sp>
       <p:sp>
         <p:nvSpPr>
-          <p:cNvPr id="6" name="Espace réservé du numéro de diapositive 5">
-            <a:extLst>
-              <a:ext uri="{FF2B5EF4-FFF2-40B4-BE49-F238E27FC236}">
-                <a16:creationId xmlns:a16="http://schemas.microsoft.com/office/drawing/2014/main" id="{1E832A17-5816-A441-93D8-68F53DC63ECD}"/>
-              </a:ext>
-            </a:extLst>
-          </p:cNvPr>
+          <p:cNvPr id="509400345" name="Espace réservé du numéro de diapositive 5"/>
           <p:cNvSpPr>
             <a:spLocks noGrp="1"/>
           </p:cNvSpPr>
@@ -988,13 +1000,16 @@
             <p:ph type="sldNum" sz="quarter" idx="12"/>
           </p:nvPr>
         </p:nvSpPr>
-        <p:spPr/>
+        <p:spPr bwMode="auto"/>
         <p:txBody>
           <a:bodyPr/>
           <a:lstStyle/>
           <a:p>
+            <a:pPr>
+              <a:defRPr/>
+            </a:pPr>
             <a:fld id="{A53C86B5-489E-E049-BD62-B07127F1532D}" type="slidenum">
-              <a:rPr lang="fr-FR" smtClean="0"/>
+              <a:rPr lang="fr-FR"/>
               <a:t>‹#›</a:t>
             </a:fld>
             <a:endParaRPr lang="fr-FR"/>
@@ -1002,11 +1017,6 @@
         </p:txBody>
       </p:sp>
     </p:spTree>
-    <p:extLst>
-      <p:ext uri="{BB962C8B-B14F-4D97-AF65-F5344CB8AC3E}">
-        <p14:creationId xmlns:p14="http://schemas.microsoft.com/office/powerpoint/2010/main" val="1950194412"/>
-      </p:ext>
-    </p:extLst>
   </p:cSld>
   <p:clrMapOvr>
     <a:masterClrMapping/>
@@ -1015,7 +1025,7 @@
 </file>
 
 <file path=ppt/slideLayouts/slideLayout11.xml><?xml version="1.0" encoding="utf-8"?>
-<p:sldLayout xmlns:a="http://schemas.openxmlformats.org/drawingml/2006/main" xmlns:r="http://schemas.openxmlformats.org/officeDocument/2006/relationships" xmlns:p="http://schemas.openxmlformats.org/presentationml/2006/main" type="vertTitleAndTx" preserve="1">
+<p:sldLayout xmlns:a="http://schemas.openxmlformats.org/drawingml/2006/main" xmlns:r="http://schemas.openxmlformats.org/officeDocument/2006/relationships" xmlns:p="http://schemas.openxmlformats.org/presentationml/2006/main" xmlns:m="http://schemas.openxmlformats.org/officeDocument/2006/math" xmlns:w="http://schemas.openxmlformats.org/wordprocessingml/2006/main" matchingName="" preserve="1" showMasterPhAnim="0" showMasterSp="1" type="vertTitleAndTx" userDrawn="1">
   <p:cSld name="Titre vertical et texte">
     <p:spTree>
       <p:nvGrpSpPr>
@@ -1023,7 +1033,7 @@
         <p:cNvGrpSpPr/>
         <p:nvPr/>
       </p:nvGrpSpPr>
-      <p:grpSpPr>
+      <p:grpSpPr bwMode="auto">
         <a:xfrm>
           <a:off x="0" y="0"/>
           <a:ext cx="0" cy="0"/>
@@ -1033,13 +1043,7 @@
       </p:grpSpPr>
       <p:sp>
         <p:nvSpPr>
-          <p:cNvPr id="2" name="Titre vertical 1">
-            <a:extLst>
-              <a:ext uri="{FF2B5EF4-FFF2-40B4-BE49-F238E27FC236}">
-                <a16:creationId xmlns:a16="http://schemas.microsoft.com/office/drawing/2014/main" id="{2E45E569-1624-C242-9DB3-564B87EECFA1}"/>
-              </a:ext>
-            </a:extLst>
-          </p:cNvPr>
+          <p:cNvPr id="1852082440" name="Titre vertical 1"/>
           <p:cNvSpPr>
             <a:spLocks noGrp="1"/>
           </p:cNvSpPr>
@@ -1047,7 +1051,7 @@
             <p:ph type="title" orient="vert"/>
           </p:nvPr>
         </p:nvSpPr>
-        <p:spPr>
+        <p:spPr bwMode="auto">
           <a:xfrm>
             <a:off x="8724900" y="365125"/>
             <a:ext cx="2628900" cy="5811838"/>
@@ -1057,22 +1061,20 @@
           <a:bodyPr vert="eaVert"/>
           <a:lstStyle/>
           <a:p>
+            <a:pPr>
+              <a:defRPr/>
+            </a:pPr>
             <a:r>
               <a:rPr lang="fr-FR"/>
               <a:t>Modifiez le style du titre</a:t>
             </a:r>
+            <a:endParaRPr/>
           </a:p>
         </p:txBody>
       </p:sp>
       <p:sp>
         <p:nvSpPr>
-          <p:cNvPr id="3" name="Espace réservé du texte vertical 2">
-            <a:extLst>
-              <a:ext uri="{FF2B5EF4-FFF2-40B4-BE49-F238E27FC236}">
-                <a16:creationId xmlns:a16="http://schemas.microsoft.com/office/drawing/2014/main" id="{EE7DD028-DA71-C04C-BE2F-876C8A83661D}"/>
-              </a:ext>
-            </a:extLst>
-          </p:cNvPr>
+          <p:cNvPr id="497263316" name="Espace réservé du texte vertical 2"/>
           <p:cNvSpPr>
             <a:spLocks noGrp="1"/>
           </p:cNvSpPr>
@@ -1080,7 +1082,7 @@
             <p:ph type="body" orient="vert" idx="1"/>
           </p:nvPr>
         </p:nvSpPr>
-        <p:spPr>
+        <p:spPr bwMode="auto">
           <a:xfrm>
             <a:off x="838200" y="365125"/>
             <a:ext cx="7734300" cy="5811838"/>
@@ -1090,26 +1092,48 @@
           <a:bodyPr vert="eaVert"/>
           <a:lstStyle/>
           <a:p>
+            <a:pPr>
+              <a:defRPr/>
+            </a:pPr>
             <a:r>
               <a:rPr lang="fr-FR"/>
-              <a:t>Modifier les styles du texte du masque
-Deuxième niveau
-Troisième niveau
-Quatrième niveau
-Cinquième niveau</a:t>
+              <a:t>Modifier les styles du texte du masque</a:t>
             </a:r>
+            <a:br>
+              <a:rPr lang="fr-FR"/>
+            </a:br>
+            <a:r>
+              <a:rPr lang="fr-FR"/>
+              <a:t>Deuxième niveau</a:t>
+            </a:r>
+            <a:br>
+              <a:rPr lang="fr-FR"/>
+            </a:br>
+            <a:r>
+              <a:rPr lang="fr-FR"/>
+              <a:t>Troisième niveau</a:t>
+            </a:r>
+            <a:br>
+              <a:rPr lang="fr-FR"/>
+            </a:br>
+            <a:r>
+              <a:rPr lang="fr-FR"/>
+              <a:t>Quatrième niveau</a:t>
+            </a:r>
+            <a:br>
+              <a:rPr lang="fr-FR"/>
+            </a:br>
+            <a:r>
+              <a:rPr lang="fr-FR"/>
+              <a:t>Cinquième niveau</a:t>
+            </a:r>
+            <a:endParaRPr/>
           </a:p>
         </p:txBody>
       </p:sp>
       <p:sp>
         <p:nvSpPr>
-          <p:cNvPr id="4" name="Espace réservé de la date 3">
-            <a:extLst>
-              <a:ext uri="{FF2B5EF4-FFF2-40B4-BE49-F238E27FC236}">
-                <a16:creationId xmlns:a16="http://schemas.microsoft.com/office/drawing/2014/main" id="{6C713B4F-A8ED-3B47-A1B7-C0074F50D847}"/>
-              </a:ext>
-            </a:extLst>
-          </p:cNvPr>
+          <p:cNvPr id="1401835280" name="Espace réservé de la date 3"/>
           <p:cNvSpPr>
             <a:spLocks noGrp="1"/>
           </p:cNvSpPr>
@@ -1117,13 +1141,16 @@
             <p:ph type="dt" sz="half" idx="10"/>
           </p:nvPr>
         </p:nvSpPr>
-        <p:spPr/>
+        <p:spPr bwMode="auto"/>
         <p:txBody>
           <a:bodyPr/>
           <a:lstStyle/>
           <a:p>
+            <a:pPr>
+              <a:defRPr/>
+            </a:pPr>
             <a:fld id="{F585D4FA-9869-8449-9681-FA4BEB67A84F}" type="datetimeFigureOut">
-              <a:rPr lang="fr-FR" smtClean="0"/>
+              <a:rPr lang="fr-FR"/>
               <a:t>15/05/2026</a:t>
             </a:fld>
             <a:endParaRPr lang="fr-FR"/>
@@ -1132,13 +1159,7 @@
       </p:sp>
       <p:sp>
         <p:nvSpPr>
-          <p:cNvPr id="5" name="Espace réservé du pied de page 4">
-            <a:extLst>
-              <a:ext uri="{FF2B5EF4-FFF2-40B4-BE49-F238E27FC236}">
-                <a16:creationId xmlns:a16="http://schemas.microsoft.com/office/drawing/2014/main" id="{1C3CF49E-6089-454C-9121-B149F7C7D36A}"/>
-              </a:ext>
-            </a:extLst>
-          </p:cNvPr>
+          <p:cNvPr id="247141168" name="Espace réservé du pied de page 4"/>
           <p:cNvSpPr>
             <a:spLocks noGrp="1"/>
           </p:cNvSpPr>
@@ -1146,24 +1167,21 @@
             <p:ph type="ftr" sz="quarter" idx="11"/>
           </p:nvPr>
         </p:nvSpPr>
-        <p:spPr/>
+        <p:spPr bwMode="auto"/>
         <p:txBody>
           <a:bodyPr/>
           <a:lstStyle/>
           <a:p>
+            <a:pPr>
+              <a:defRPr/>
+            </a:pPr>
             <a:endParaRPr lang="fr-FR"/>
           </a:p>
         </p:txBody>
       </p:sp>
       <p:sp>
         <p:nvSpPr>
-          <p:cNvPr id="6" name="Espace réservé du numéro de diapositive 5">
-            <a:extLst>
-              <a:ext uri="{FF2B5EF4-FFF2-40B4-BE49-F238E27FC236}">
-                <a16:creationId xmlns:a16="http://schemas.microsoft.com/office/drawing/2014/main" id="{9F5F403A-6000-0347-997A-C5A4FB812877}"/>
-              </a:ext>
-            </a:extLst>
-          </p:cNvPr>
+          <p:cNvPr id="178719710" name="Espace réservé du numéro de diapositive 5"/>
           <p:cNvSpPr>
             <a:spLocks noGrp="1"/>
           </p:cNvSpPr>
@@ -1171,13 +1189,16 @@
             <p:ph type="sldNum" sz="quarter" idx="12"/>
           </p:nvPr>
         </p:nvSpPr>
-        <p:spPr/>
+        <p:spPr bwMode="auto"/>
         <p:txBody>
           <a:bodyPr/>
           <a:lstStyle/>
           <a:p>
+            <a:pPr>
+              <a:defRPr/>
+            </a:pPr>
             <a:fld id="{A53C86B5-489E-E049-BD62-B07127F1532D}" type="slidenum">
-              <a:rPr lang="fr-FR" smtClean="0"/>
+              <a:rPr lang="fr-FR"/>
               <a:t>‹#›</a:t>
             </a:fld>
             <a:endParaRPr lang="fr-FR"/>
@@ -1185,11 +1206,6 @@
         </p:txBody>
       </p:sp>
     </p:spTree>
-    <p:extLst>
-      <p:ext uri="{BB962C8B-B14F-4D97-AF65-F5344CB8AC3E}">
-        <p14:creationId xmlns:p14="http://schemas.microsoft.com/office/powerpoint/2010/main" val="3843702310"/>
-      </p:ext>
-    </p:extLst>
   </p:cSld>
   <p:clrMapOvr>
     <a:masterClrMapping/>
@@ -1198,7 +1214,7 @@
 </file>
 
 <file path=ppt/slideLayouts/slideLayout12.xml><?xml version="1.0" encoding="utf-8"?>
-<p:sldLayout xmlns:a="http://schemas.openxmlformats.org/drawingml/2006/main" xmlns:r="http://schemas.openxmlformats.org/officeDocument/2006/relationships" xmlns:p="http://schemas.openxmlformats.org/presentationml/2006/main" userDrawn="1">
+<p:sldLayout xmlns:a="http://schemas.openxmlformats.org/drawingml/2006/main" xmlns:r="http://schemas.openxmlformats.org/officeDocument/2006/relationships" xmlns:p="http://schemas.openxmlformats.org/presentationml/2006/main" xmlns:m="http://schemas.openxmlformats.org/officeDocument/2006/math" xmlns:w="http://schemas.openxmlformats.org/wordprocessingml/2006/main" matchingName="" preserve="0" showMasterPhAnim="0" showMasterSp="1" userDrawn="1">
   <p:cSld name="Blank">
     <p:spTree>
       <p:nvGrpSpPr>
@@ -1206,7 +1222,7 @@
         <p:cNvGrpSpPr/>
         <p:nvPr/>
       </p:nvGrpSpPr>
-      <p:grpSpPr>
+      <p:grpSpPr bwMode="auto">
         <a:xfrm>
           <a:off x="0" y="0"/>
           <a:ext cx="0" cy="0"/>
@@ -1215,11 +1231,6 @@
         </a:xfrm>
       </p:grpSpPr>
     </p:spTree>
-    <p:extLst>
-      <p:ext uri="{BB962C8B-B14F-4D97-AF65-F5344CB8AC3E}">
-        <p14:creationId xmlns:p14="http://schemas.microsoft.com/office/powerpoint/2010/main" val="863869714"/>
-      </p:ext>
-    </p:extLst>
   </p:cSld>
   <p:clrMapOvr>
     <a:masterClrMapping/>
@@ -1228,7 +1239,7 @@
 </file>
 
 <file path=ppt/slideLayouts/slideLayout13.xml><?xml version="1.0" encoding="utf-8"?>
-<p:sldLayout xmlns:a="http://schemas.openxmlformats.org/drawingml/2006/main" xmlns:r="http://schemas.openxmlformats.org/officeDocument/2006/relationships" xmlns:p="http://schemas.openxmlformats.org/presentationml/2006/main" userDrawn="1">
+<p:sldLayout xmlns:a="http://schemas.openxmlformats.org/drawingml/2006/main" xmlns:r="http://schemas.openxmlformats.org/officeDocument/2006/relationships" xmlns:p="http://schemas.openxmlformats.org/presentationml/2006/main" xmlns:m="http://schemas.openxmlformats.org/officeDocument/2006/math" xmlns:w="http://schemas.openxmlformats.org/wordprocessingml/2006/main" matchingName="" preserve="0" showMasterPhAnim="0" showMasterSp="1" userDrawn="1">
   <p:cSld name="Services 2">
     <p:spTree>
       <p:nvGrpSpPr>
@@ -1236,7 +1247,7 @@
         <p:cNvGrpSpPr/>
         <p:nvPr/>
       </p:nvGrpSpPr>
-      <p:grpSpPr>
+      <p:grpSpPr bwMode="auto">
         <a:xfrm>
           <a:off x="0" y="0"/>
           <a:ext cx="0" cy="0"/>
@@ -1246,13 +1257,7 @@
       </p:grpSpPr>
       <p:sp>
         <p:nvSpPr>
-          <p:cNvPr id="22" name="Picture Placeholder 21">
-            <a:extLst>
-              <a:ext uri="{FF2B5EF4-FFF2-40B4-BE49-F238E27FC236}">
-                <a16:creationId xmlns:a16="http://schemas.microsoft.com/office/drawing/2014/main" id="{935D8207-9348-426C-A2D0-D26389853580}"/>
-              </a:ext>
-            </a:extLst>
-          </p:cNvPr>
+          <p:cNvPr id="1219724099" name="Picture Placeholder 21"/>
           <p:cNvSpPr>
             <a:spLocks noGrp="1"/>
           </p:cNvSpPr>
@@ -1260,7 +1265,7 @@
             <p:ph type="pic" sz="quarter" idx="14"/>
           </p:nvPr>
         </p:nvSpPr>
-        <p:spPr>
+        <p:spPr bwMode="auto">
           <a:xfrm>
             <a:off x="3534072" y="3359160"/>
             <a:ext cx="3327399" cy="3498840"/>
@@ -1294,7 +1299,7 @@
             </a:cxnLst>
             <a:rect l="l" t="t" r="r" b="b"/>
             <a:pathLst>
-              <a:path w="3327399" h="3498840">
+              <a:path w="3327399" h="3498840" fill="norm" stroke="1" extrusionOk="0">
                 <a:moveTo>
                   <a:pt x="0" y="0"/>
                 </a:moveTo>
@@ -1327,26 +1332,22 @@
           <a:lstStyle>
             <a:lvl1pPr>
               <a:defRPr lang="en-US" sz="1200">
-                <a:latin typeface="Arial" panose="020B0604020202020204" pitchFamily="34" charset="0"/>
-                <a:cs typeface="Arial" panose="020B0604020202020204" pitchFamily="34" charset="0"/>
+                <a:latin typeface="Arial"/>
+                <a:cs typeface="Arial"/>
               </a:defRPr>
             </a:lvl1pPr>
           </a:lstStyle>
           <a:p>
-            <a:pPr lvl="0"/>
+            <a:pPr lvl="0">
+              <a:defRPr/>
+            </a:pPr>
             <a:endParaRPr lang="en-US"/>
           </a:p>
         </p:txBody>
       </p:sp>
       <p:sp>
         <p:nvSpPr>
-          <p:cNvPr id="19" name="Picture Placeholder 18">
-            <a:extLst>
-              <a:ext uri="{FF2B5EF4-FFF2-40B4-BE49-F238E27FC236}">
-                <a16:creationId xmlns:a16="http://schemas.microsoft.com/office/drawing/2014/main" id="{F6E13C0D-6FB5-4464-AB5A-6E9C5696DB64}"/>
-              </a:ext>
-            </a:extLst>
-          </p:cNvPr>
+          <p:cNvPr id="1271821076" name="Picture Placeholder 18"/>
           <p:cNvSpPr>
             <a:spLocks noGrp="1"/>
           </p:cNvSpPr>
@@ -1354,7 +1355,7 @@
             <p:ph type="pic" sz="quarter" idx="16"/>
           </p:nvPr>
         </p:nvSpPr>
-        <p:spPr>
+        <p:spPr bwMode="auto">
           <a:xfrm>
             <a:off x="0" y="4075799"/>
             <a:ext cx="3327399" cy="2782201"/>
@@ -1388,7 +1389,7 @@
             </a:cxnLst>
             <a:rect l="l" t="t" r="r" b="b"/>
             <a:pathLst>
-              <a:path w="3327399" h="2782201">
+              <a:path w="3327399" h="2782201" fill="norm" stroke="1" extrusionOk="0">
                 <a:moveTo>
                   <a:pt x="0" y="0"/>
                 </a:moveTo>
@@ -1421,26 +1422,22 @@
           <a:lstStyle>
             <a:lvl1pPr>
               <a:defRPr lang="en-US" sz="1200">
-                <a:latin typeface="Arial" panose="020B0604020202020204" pitchFamily="34" charset="0"/>
-                <a:cs typeface="Arial" panose="020B0604020202020204" pitchFamily="34" charset="0"/>
+                <a:latin typeface="Arial"/>
+                <a:cs typeface="Arial"/>
               </a:defRPr>
             </a:lvl1pPr>
           </a:lstStyle>
           <a:p>
-            <a:pPr lvl="0"/>
+            <a:pPr lvl="0">
+              <a:defRPr/>
+            </a:pPr>
             <a:endParaRPr lang="en-US"/>
           </a:p>
         </p:txBody>
       </p:sp>
       <p:sp>
         <p:nvSpPr>
-          <p:cNvPr id="21" name="Picture Placeholder 20">
-            <a:extLst>
-              <a:ext uri="{FF2B5EF4-FFF2-40B4-BE49-F238E27FC236}">
-                <a16:creationId xmlns:a16="http://schemas.microsoft.com/office/drawing/2014/main" id="{4A5D2BF9-7B50-4AD8-AA9C-D33F3E4D74C4}"/>
-              </a:ext>
-            </a:extLst>
-          </p:cNvPr>
+          <p:cNvPr id="1512100434" name="Picture Placeholder 20"/>
           <p:cNvSpPr>
             <a:spLocks noGrp="1"/>
           </p:cNvSpPr>
@@ -1448,7 +1445,7 @@
             <p:ph type="pic" sz="quarter" idx="17"/>
           </p:nvPr>
         </p:nvSpPr>
-        <p:spPr>
+        <p:spPr bwMode="auto">
           <a:xfrm>
             <a:off x="3534072" y="2"/>
             <a:ext cx="3327399" cy="3154089"/>
@@ -1482,7 +1479,7 @@
             </a:cxnLst>
             <a:rect l="l" t="t" r="r" b="b"/>
             <a:pathLst>
-              <a:path w="3327399" h="3154089">
+              <a:path w="3327399" h="3154089" fill="norm" stroke="1" extrusionOk="0">
                 <a:moveTo>
                   <a:pt x="0" y="0"/>
                 </a:moveTo>
@@ -1515,26 +1512,22 @@
           <a:lstStyle>
             <a:lvl1pPr>
               <a:defRPr lang="en-US" sz="1200">
-                <a:latin typeface="Arial" panose="020B0604020202020204" pitchFamily="34" charset="0"/>
-                <a:cs typeface="Arial" panose="020B0604020202020204" pitchFamily="34" charset="0"/>
+                <a:latin typeface="Arial"/>
+                <a:cs typeface="Arial"/>
               </a:defRPr>
             </a:lvl1pPr>
           </a:lstStyle>
           <a:p>
-            <a:pPr lvl="0"/>
+            <a:pPr lvl="0">
+              <a:defRPr/>
+            </a:pPr>
             <a:endParaRPr lang="en-US"/>
           </a:p>
         </p:txBody>
       </p:sp>
       <p:sp>
         <p:nvSpPr>
-          <p:cNvPr id="17" name="Picture Placeholder 16">
-            <a:extLst>
-              <a:ext uri="{FF2B5EF4-FFF2-40B4-BE49-F238E27FC236}">
-                <a16:creationId xmlns:a16="http://schemas.microsoft.com/office/drawing/2014/main" id="{0D1CCB46-54AC-40AB-8B77-9108DE16DB01}"/>
-              </a:ext>
-            </a:extLst>
-          </p:cNvPr>
+          <p:cNvPr id="1853393520" name="Picture Placeholder 16"/>
           <p:cNvSpPr>
             <a:spLocks noGrp="1"/>
           </p:cNvSpPr>
@@ -1542,7 +1535,7 @@
             <p:ph type="pic" sz="quarter" idx="15"/>
           </p:nvPr>
         </p:nvSpPr>
-        <p:spPr>
+        <p:spPr bwMode="auto">
           <a:xfrm>
             <a:off x="0" y="0"/>
             <a:ext cx="3327399" cy="3843939"/>
@@ -1576,7 +1569,7 @@
             </a:cxnLst>
             <a:rect l="l" t="t" r="r" b="b"/>
             <a:pathLst>
-              <a:path w="3327399" h="3843939">
+              <a:path w="3327399" h="3843939" fill="norm" stroke="1" extrusionOk="0">
                 <a:moveTo>
                   <a:pt x="0" y="0"/>
                 </a:moveTo>
@@ -1609,23 +1602,20 @@
           <a:lstStyle>
             <a:lvl1pPr>
               <a:defRPr lang="en-US" sz="1200">
-                <a:latin typeface="Arial" panose="020B0604020202020204" pitchFamily="34" charset="0"/>
-                <a:cs typeface="Arial" panose="020B0604020202020204" pitchFamily="34" charset="0"/>
+                <a:latin typeface="Arial"/>
+                <a:cs typeface="Arial"/>
               </a:defRPr>
             </a:lvl1pPr>
           </a:lstStyle>
           <a:p>
-            <a:pPr lvl="0"/>
+            <a:pPr lvl="0">
+              <a:defRPr/>
+            </a:pPr>
             <a:endParaRPr lang="en-US"/>
           </a:p>
         </p:txBody>
       </p:sp>
     </p:spTree>
-    <p:extLst>
-      <p:ext uri="{BB962C8B-B14F-4D97-AF65-F5344CB8AC3E}">
-        <p14:creationId xmlns:p14="http://schemas.microsoft.com/office/powerpoint/2010/main" val="2130537769"/>
-      </p:ext>
-    </p:extLst>
   </p:cSld>
   <p:clrMapOvr>
     <a:masterClrMapping/>
@@ -1634,7 +1624,7 @@
 </file>
 
 <file path=ppt/slideLayouts/slideLayout2.xml><?xml version="1.0" encoding="utf-8"?>
-<p:sldLayout xmlns:a="http://schemas.openxmlformats.org/drawingml/2006/main" xmlns:r="http://schemas.openxmlformats.org/officeDocument/2006/relationships" xmlns:p="http://schemas.openxmlformats.org/presentationml/2006/main" type="obj" preserve="1">
+<p:sldLayout xmlns:a="http://schemas.openxmlformats.org/drawingml/2006/main" xmlns:r="http://schemas.openxmlformats.org/officeDocument/2006/relationships" xmlns:p="http://schemas.openxmlformats.org/presentationml/2006/main" xmlns:m="http://schemas.openxmlformats.org/officeDocument/2006/math" xmlns:w="http://schemas.openxmlformats.org/wordprocessingml/2006/main" matchingName="" preserve="1" showMasterPhAnim="0" showMasterSp="1" type="obj" userDrawn="1">
   <p:cSld name="Titre et contenu">
     <p:spTree>
       <p:nvGrpSpPr>
@@ -1642,7 +1632,7 @@
         <p:cNvGrpSpPr/>
         <p:nvPr/>
       </p:nvGrpSpPr>
-      <p:grpSpPr>
+      <p:grpSpPr bwMode="auto">
         <a:xfrm>
           <a:off x="0" y="0"/>
           <a:ext cx="0" cy="0"/>
@@ -1652,13 +1642,7 @@
       </p:grpSpPr>
       <p:sp>
         <p:nvSpPr>
-          <p:cNvPr id="2" name="Titre 1">
-            <a:extLst>
-              <a:ext uri="{FF2B5EF4-FFF2-40B4-BE49-F238E27FC236}">
-                <a16:creationId xmlns:a16="http://schemas.microsoft.com/office/drawing/2014/main" id="{640A1034-C4DF-1A4F-BAA8-A9BD3474FA1B}"/>
-              </a:ext>
-            </a:extLst>
-          </p:cNvPr>
+          <p:cNvPr id="597403639" name="Titre 1"/>
           <p:cNvSpPr>
             <a:spLocks noGrp="1"/>
           </p:cNvSpPr>
@@ -1666,27 +1650,25 @@
             <p:ph type="title"/>
           </p:nvPr>
         </p:nvSpPr>
-        <p:spPr/>
+        <p:spPr bwMode="auto"/>
         <p:txBody>
           <a:bodyPr/>
           <a:lstStyle/>
           <a:p>
+            <a:pPr>
+              <a:defRPr/>
+            </a:pPr>
             <a:r>
               <a:rPr lang="fr-FR"/>
               <a:t>Modifiez le style du titre</a:t>
             </a:r>
+            <a:endParaRPr/>
           </a:p>
         </p:txBody>
       </p:sp>
       <p:sp>
         <p:nvSpPr>
-          <p:cNvPr id="3" name="Espace réservé du contenu 2">
-            <a:extLst>
-              <a:ext uri="{FF2B5EF4-FFF2-40B4-BE49-F238E27FC236}">
-                <a16:creationId xmlns:a16="http://schemas.microsoft.com/office/drawing/2014/main" id="{D6ECFEFC-BFBA-494B-ABB6-9ABCCF8BBEB2}"/>
-              </a:ext>
-            </a:extLst>
-          </p:cNvPr>
+          <p:cNvPr id="654446091" name="Espace réservé du contenu 2"/>
           <p:cNvSpPr>
             <a:spLocks noGrp="1"/>
           </p:cNvSpPr>
@@ -1694,31 +1676,53 @@
             <p:ph idx="1"/>
           </p:nvPr>
         </p:nvSpPr>
-        <p:spPr/>
+        <p:spPr bwMode="auto"/>
         <p:txBody>
           <a:bodyPr/>
           <a:lstStyle/>
           <a:p>
+            <a:pPr>
+              <a:defRPr/>
+            </a:pPr>
             <a:r>
               <a:rPr lang="fr-FR"/>
-              <a:t>Modifier les styles du texte du masque
-Deuxième niveau
-Troisième niveau
-Quatrième niveau
-Cinquième niveau</a:t>
+              <a:t>Modifier les styles du texte du masque</a:t>
             </a:r>
+            <a:br>
+              <a:rPr lang="fr-FR"/>
+            </a:br>
+            <a:r>
+              <a:rPr lang="fr-FR"/>
+              <a:t>Deuxième niveau</a:t>
+            </a:r>
+            <a:br>
+              <a:rPr lang="fr-FR"/>
+            </a:br>
+            <a:r>
+              <a:rPr lang="fr-FR"/>
+              <a:t>Troisième niveau</a:t>
+            </a:r>
+            <a:br>
+              <a:rPr lang="fr-FR"/>
+            </a:br>
+            <a:r>
+              <a:rPr lang="fr-FR"/>
+              <a:t>Quatrième niveau</a:t>
+            </a:r>
+            <a:br>
+              <a:rPr lang="fr-FR"/>
+            </a:br>
+            <a:r>
+              <a:rPr lang="fr-FR"/>
+              <a:t>Cinquième niveau</a:t>
+            </a:r>
+            <a:endParaRPr/>
           </a:p>
         </p:txBody>
       </p:sp>
       <p:sp>
         <p:nvSpPr>
-          <p:cNvPr id="4" name="Espace réservé de la date 3">
-            <a:extLst>
-              <a:ext uri="{FF2B5EF4-FFF2-40B4-BE49-F238E27FC236}">
-                <a16:creationId xmlns:a16="http://schemas.microsoft.com/office/drawing/2014/main" id="{1FBD78D6-7A21-AA4A-A296-B473F7FCF5CA}"/>
-              </a:ext>
-            </a:extLst>
-          </p:cNvPr>
+          <p:cNvPr id="462183644" name="Espace réservé de la date 3"/>
           <p:cNvSpPr>
             <a:spLocks noGrp="1"/>
           </p:cNvSpPr>
@@ -1726,13 +1730,16 @@
             <p:ph type="dt" sz="half" idx="10"/>
           </p:nvPr>
         </p:nvSpPr>
-        <p:spPr/>
+        <p:spPr bwMode="auto"/>
         <p:txBody>
           <a:bodyPr/>
           <a:lstStyle/>
           <a:p>
+            <a:pPr>
+              <a:defRPr/>
+            </a:pPr>
             <a:fld id="{F585D4FA-9869-8449-9681-FA4BEB67A84F}" type="datetimeFigureOut">
-              <a:rPr lang="fr-FR" smtClean="0"/>
+              <a:rPr lang="fr-FR"/>
               <a:t>15/05/2026</a:t>
             </a:fld>
             <a:endParaRPr lang="fr-FR"/>
@@ -1741,13 +1748,7 @@
       </p:sp>
       <p:sp>
         <p:nvSpPr>
-          <p:cNvPr id="5" name="Espace réservé du pied de page 4">
-            <a:extLst>
-              <a:ext uri="{FF2B5EF4-FFF2-40B4-BE49-F238E27FC236}">
-                <a16:creationId xmlns:a16="http://schemas.microsoft.com/office/drawing/2014/main" id="{0C8F1DEE-F8BF-DD4A-A6FF-B5F2783C8F89}"/>
-              </a:ext>
-            </a:extLst>
-          </p:cNvPr>
+          <p:cNvPr id="120810660" name="Espace réservé du pied de page 4"/>
           <p:cNvSpPr>
             <a:spLocks noGrp="1"/>
           </p:cNvSpPr>
@@ -1755,24 +1756,21 @@
             <p:ph type="ftr" sz="quarter" idx="11"/>
           </p:nvPr>
         </p:nvSpPr>
-        <p:spPr/>
+        <p:spPr bwMode="auto"/>
         <p:txBody>
           <a:bodyPr/>
           <a:lstStyle/>
           <a:p>
+            <a:pPr>
+              <a:defRPr/>
+            </a:pPr>
             <a:endParaRPr lang="fr-FR"/>
           </a:p>
         </p:txBody>
       </p:sp>
       <p:sp>
         <p:nvSpPr>
-          <p:cNvPr id="6" name="Espace réservé du numéro de diapositive 5">
-            <a:extLst>
-              <a:ext uri="{FF2B5EF4-FFF2-40B4-BE49-F238E27FC236}">
-                <a16:creationId xmlns:a16="http://schemas.microsoft.com/office/drawing/2014/main" id="{81FBB157-51D4-774D-A7D6-C69A8E58DC00}"/>
-              </a:ext>
-            </a:extLst>
-          </p:cNvPr>
+          <p:cNvPr id="1144649270" name="Espace réservé du numéro de diapositive 5"/>
           <p:cNvSpPr>
             <a:spLocks noGrp="1"/>
           </p:cNvSpPr>
@@ -1780,13 +1778,16 @@
             <p:ph type="sldNum" sz="quarter" idx="12"/>
           </p:nvPr>
         </p:nvSpPr>
-        <p:spPr/>
+        <p:spPr bwMode="auto"/>
         <p:txBody>
           <a:bodyPr/>
           <a:lstStyle/>
           <a:p>
+            <a:pPr>
+              <a:defRPr/>
+            </a:pPr>
             <a:fld id="{A53C86B5-489E-E049-BD62-B07127F1532D}" type="slidenum">
-              <a:rPr lang="fr-FR" smtClean="0"/>
+              <a:rPr lang="fr-FR"/>
               <a:t>‹#›</a:t>
             </a:fld>
             <a:endParaRPr lang="fr-FR"/>
@@ -1794,11 +1795,6 @@
         </p:txBody>
       </p:sp>
     </p:spTree>
-    <p:extLst>
-      <p:ext uri="{BB962C8B-B14F-4D97-AF65-F5344CB8AC3E}">
-        <p14:creationId xmlns:p14="http://schemas.microsoft.com/office/powerpoint/2010/main" val="265140286"/>
-      </p:ext>
-    </p:extLst>
   </p:cSld>
   <p:clrMapOvr>
     <a:masterClrMapping/>
@@ -1807,7 +1803,7 @@
 </file>
 
 <file path=ppt/slideLayouts/slideLayout3.xml><?xml version="1.0" encoding="utf-8"?>
-<p:sldLayout xmlns:a="http://schemas.openxmlformats.org/drawingml/2006/main" xmlns:r="http://schemas.openxmlformats.org/officeDocument/2006/relationships" xmlns:p="http://schemas.openxmlformats.org/presentationml/2006/main" type="secHead" preserve="1">
+<p:sldLayout xmlns:a="http://schemas.openxmlformats.org/drawingml/2006/main" xmlns:r="http://schemas.openxmlformats.org/officeDocument/2006/relationships" xmlns:p="http://schemas.openxmlformats.org/presentationml/2006/main" xmlns:m="http://schemas.openxmlformats.org/officeDocument/2006/math" xmlns:w="http://schemas.openxmlformats.org/wordprocessingml/2006/main" matchingName="" preserve="1" showMasterPhAnim="0" showMasterSp="1" type="secHead" userDrawn="1">
   <p:cSld name="Titre de section">
     <p:spTree>
       <p:nvGrpSpPr>
@@ -1815,7 +1811,7 @@
         <p:cNvGrpSpPr/>
         <p:nvPr/>
       </p:nvGrpSpPr>
-      <p:grpSpPr>
+      <p:grpSpPr bwMode="auto">
         <a:xfrm>
           <a:off x="0" y="0"/>
           <a:ext cx="0" cy="0"/>
@@ -1825,13 +1821,7 @@
       </p:grpSpPr>
       <p:sp>
         <p:nvSpPr>
-          <p:cNvPr id="2" name="Titre 1">
-            <a:extLst>
-              <a:ext uri="{FF2B5EF4-FFF2-40B4-BE49-F238E27FC236}">
-                <a16:creationId xmlns:a16="http://schemas.microsoft.com/office/drawing/2014/main" id="{146EA618-4CEA-0C40-ABA2-3DF124C049BC}"/>
-              </a:ext>
-            </a:extLst>
-          </p:cNvPr>
+          <p:cNvPr id="1410783471" name="Titre 1"/>
           <p:cNvSpPr>
             <a:spLocks noGrp="1"/>
           </p:cNvSpPr>
@@ -1839,7 +1829,7 @@
             <p:ph type="title"/>
           </p:nvPr>
         </p:nvSpPr>
-        <p:spPr>
+        <p:spPr bwMode="auto">
           <a:xfrm>
             <a:off x="831850" y="1709738"/>
             <a:ext cx="10515600" cy="2852737"/>
@@ -1853,22 +1843,20 @@
             </a:lvl1pPr>
           </a:lstStyle>
           <a:p>
+            <a:pPr>
+              <a:defRPr/>
+            </a:pPr>
             <a:r>
               <a:rPr lang="fr-FR"/>
               <a:t>Modifiez le style du titre</a:t>
             </a:r>
+            <a:endParaRPr/>
           </a:p>
         </p:txBody>
       </p:sp>
       <p:sp>
         <p:nvSpPr>
-          <p:cNvPr id="3" name="Espace réservé du texte 2">
-            <a:extLst>
-              <a:ext uri="{FF2B5EF4-FFF2-40B4-BE49-F238E27FC236}">
-                <a16:creationId xmlns:a16="http://schemas.microsoft.com/office/drawing/2014/main" id="{1BF41D1B-1D70-CD4E-900D-7A86D4C8A2BB}"/>
-              </a:ext>
-            </a:extLst>
-          </p:cNvPr>
+          <p:cNvPr id="2147276554" name="Espace réservé du texte 2"/>
           <p:cNvSpPr>
             <a:spLocks noGrp="1"/>
           </p:cNvSpPr>
@@ -1876,7 +1864,7 @@
             <p:ph type="body" idx="1"/>
           </p:nvPr>
         </p:nvSpPr>
-        <p:spPr>
+        <p:spPr bwMode="auto">
           <a:xfrm>
             <a:off x="831850" y="4589463"/>
             <a:ext cx="10515600" cy="1500187"/>
@@ -1977,26 +1965,48 @@
             </a:lvl9pPr>
           </a:lstStyle>
           <a:p>
+            <a:pPr>
+              <a:defRPr/>
+            </a:pPr>
             <a:r>
               <a:rPr lang="fr-FR"/>
-              <a:t>Modifier les styles du texte du masque
-Deuxième niveau
-Troisième niveau
-Quatrième niveau
-Cinquième niveau</a:t>
+              <a:t>Modifier les styles du texte du masque</a:t>
             </a:r>
+            <a:br>
+              <a:rPr lang="fr-FR"/>
+            </a:br>
+            <a:r>
+              <a:rPr lang="fr-FR"/>
+              <a:t>Deuxième niveau</a:t>
+            </a:r>
+            <a:br>
+              <a:rPr lang="fr-FR"/>
+            </a:br>
+            <a:r>
+              <a:rPr lang="fr-FR"/>
+              <a:t>Troisième niveau</a:t>
+            </a:r>
+            <a:br>
+              <a:rPr lang="fr-FR"/>
+            </a:br>
+            <a:r>
+              <a:rPr lang="fr-FR"/>
+              <a:t>Quatrième niveau</a:t>
+            </a:r>
+            <a:br>
+              <a:rPr lang="fr-FR"/>
+            </a:br>
+            <a:r>
+              <a:rPr lang="fr-FR"/>
+              <a:t>Cinquième niveau</a:t>
+            </a:r>
+            <a:endParaRPr/>
           </a:p>
         </p:txBody>
       </p:sp>
       <p:sp>
         <p:nvSpPr>
-          <p:cNvPr id="4" name="Espace réservé de la date 3">
-            <a:extLst>
-              <a:ext uri="{FF2B5EF4-FFF2-40B4-BE49-F238E27FC236}">
-                <a16:creationId xmlns:a16="http://schemas.microsoft.com/office/drawing/2014/main" id="{A95A35F9-64A8-0D45-923A-D06218D1C386}"/>
-              </a:ext>
-            </a:extLst>
-          </p:cNvPr>
+          <p:cNvPr id="1523536872" name="Espace réservé de la date 3"/>
           <p:cNvSpPr>
             <a:spLocks noGrp="1"/>
           </p:cNvSpPr>
@@ -2004,13 +2014,16 @@
             <p:ph type="dt" sz="half" idx="10"/>
           </p:nvPr>
         </p:nvSpPr>
-        <p:spPr/>
+        <p:spPr bwMode="auto"/>
         <p:txBody>
           <a:bodyPr/>
           <a:lstStyle/>
           <a:p>
+            <a:pPr>
+              <a:defRPr/>
+            </a:pPr>
             <a:fld id="{F585D4FA-9869-8449-9681-FA4BEB67A84F}" type="datetimeFigureOut">
-              <a:rPr lang="fr-FR" smtClean="0"/>
+              <a:rPr lang="fr-FR"/>
               <a:t>15/05/2026</a:t>
             </a:fld>
             <a:endParaRPr lang="fr-FR"/>
@@ -2019,13 +2032,7 @@
       </p:sp>
       <p:sp>
         <p:nvSpPr>
-          <p:cNvPr id="5" name="Espace réservé du pied de page 4">
-            <a:extLst>
-              <a:ext uri="{FF2B5EF4-FFF2-40B4-BE49-F238E27FC236}">
-                <a16:creationId xmlns:a16="http://schemas.microsoft.com/office/drawing/2014/main" id="{50C291DF-5E4E-2E44-ABBE-6ABD1B7ECA8F}"/>
-              </a:ext>
-            </a:extLst>
-          </p:cNvPr>
+          <p:cNvPr id="1917987070" name="Espace réservé du pied de page 4"/>
           <p:cNvSpPr>
             <a:spLocks noGrp="1"/>
           </p:cNvSpPr>
@@ -2033,24 +2040,21 @@
             <p:ph type="ftr" sz="quarter" idx="11"/>
           </p:nvPr>
         </p:nvSpPr>
-        <p:spPr/>
+        <p:spPr bwMode="auto"/>
         <p:txBody>
           <a:bodyPr/>
           <a:lstStyle/>
           <a:p>
+            <a:pPr>
+              <a:defRPr/>
+            </a:pPr>
             <a:endParaRPr lang="fr-FR"/>
           </a:p>
         </p:txBody>
       </p:sp>
       <p:sp>
         <p:nvSpPr>
-          <p:cNvPr id="6" name="Espace réservé du numéro de diapositive 5">
-            <a:extLst>
-              <a:ext uri="{FF2B5EF4-FFF2-40B4-BE49-F238E27FC236}">
-                <a16:creationId xmlns:a16="http://schemas.microsoft.com/office/drawing/2014/main" id="{BC7FBCD6-0110-184D-A822-A59CD2012A9F}"/>
-              </a:ext>
-            </a:extLst>
-          </p:cNvPr>
+          <p:cNvPr id="1928381723" name="Espace réservé du numéro de diapositive 5"/>
           <p:cNvSpPr>
             <a:spLocks noGrp="1"/>
           </p:cNvSpPr>
@@ -2058,13 +2062,16 @@
             <p:ph type="sldNum" sz="quarter" idx="12"/>
           </p:nvPr>
         </p:nvSpPr>
-        <p:spPr/>
+        <p:spPr bwMode="auto"/>
         <p:txBody>
           <a:bodyPr/>
           <a:lstStyle/>
           <a:p>
+            <a:pPr>
+              <a:defRPr/>
+            </a:pPr>
             <a:fld id="{A53C86B5-489E-E049-BD62-B07127F1532D}" type="slidenum">
-              <a:rPr lang="fr-FR" smtClean="0"/>
+              <a:rPr lang="fr-FR"/>
               <a:t>‹#›</a:t>
             </a:fld>
             <a:endParaRPr lang="fr-FR"/>
@@ -2072,11 +2079,6 @@
         </p:txBody>
       </p:sp>
     </p:spTree>
-    <p:extLst>
-      <p:ext uri="{BB962C8B-B14F-4D97-AF65-F5344CB8AC3E}">
-        <p14:creationId xmlns:p14="http://schemas.microsoft.com/office/powerpoint/2010/main" val="2427862686"/>
-      </p:ext>
-    </p:extLst>
   </p:cSld>
   <p:clrMapOvr>
     <a:masterClrMapping/>
@@ -2085,7 +2087,7 @@
 </file>
 
 <file path=ppt/slideLayouts/slideLayout4.xml><?xml version="1.0" encoding="utf-8"?>
-<p:sldLayout xmlns:a="http://schemas.openxmlformats.org/drawingml/2006/main" xmlns:r="http://schemas.openxmlformats.org/officeDocument/2006/relationships" xmlns:p="http://schemas.openxmlformats.org/presentationml/2006/main" type="twoObj" preserve="1">
+<p:sldLayout xmlns:a="http://schemas.openxmlformats.org/drawingml/2006/main" xmlns:r="http://schemas.openxmlformats.org/officeDocument/2006/relationships" xmlns:p="http://schemas.openxmlformats.org/presentationml/2006/main" xmlns:m="http://schemas.openxmlformats.org/officeDocument/2006/math" xmlns:w="http://schemas.openxmlformats.org/wordprocessingml/2006/main" matchingName="" preserve="1" showMasterPhAnim="0" showMasterSp="1" type="twoObj" userDrawn="1">
   <p:cSld name="Deux contenus">
     <p:spTree>
       <p:nvGrpSpPr>
@@ -2093,7 +2095,7 @@
         <p:cNvGrpSpPr/>
         <p:nvPr/>
       </p:nvGrpSpPr>
-      <p:grpSpPr>
+      <p:grpSpPr bwMode="auto">
         <a:xfrm>
           <a:off x="0" y="0"/>
           <a:ext cx="0" cy="0"/>
@@ -2103,13 +2105,7 @@
       </p:grpSpPr>
       <p:sp>
         <p:nvSpPr>
-          <p:cNvPr id="2" name="Titre 1">
-            <a:extLst>
-              <a:ext uri="{FF2B5EF4-FFF2-40B4-BE49-F238E27FC236}">
-                <a16:creationId xmlns:a16="http://schemas.microsoft.com/office/drawing/2014/main" id="{9550A05D-563A-B44E-A3AF-B8EA530C3758}"/>
-              </a:ext>
-            </a:extLst>
-          </p:cNvPr>
+          <p:cNvPr id="830697721" name="Titre 1"/>
           <p:cNvSpPr>
             <a:spLocks noGrp="1"/>
           </p:cNvSpPr>
@@ -2117,27 +2113,25 @@
             <p:ph type="title"/>
           </p:nvPr>
         </p:nvSpPr>
-        <p:spPr/>
+        <p:spPr bwMode="auto"/>
         <p:txBody>
           <a:bodyPr/>
           <a:lstStyle/>
           <a:p>
+            <a:pPr>
+              <a:defRPr/>
+            </a:pPr>
             <a:r>
               <a:rPr lang="fr-FR"/>
               <a:t>Modifiez le style du titre</a:t>
             </a:r>
+            <a:endParaRPr/>
           </a:p>
         </p:txBody>
       </p:sp>
       <p:sp>
         <p:nvSpPr>
-          <p:cNvPr id="3" name="Espace réservé du contenu 2">
-            <a:extLst>
-              <a:ext uri="{FF2B5EF4-FFF2-40B4-BE49-F238E27FC236}">
-                <a16:creationId xmlns:a16="http://schemas.microsoft.com/office/drawing/2014/main" id="{82488B39-34F2-F440-936E-F3961523E11F}"/>
-              </a:ext>
-            </a:extLst>
-          </p:cNvPr>
+          <p:cNvPr id="1954180103" name="Espace réservé du contenu 2"/>
           <p:cNvSpPr>
             <a:spLocks noGrp="1"/>
           </p:cNvSpPr>
@@ -2145,7 +2139,7 @@
             <p:ph sz="half" idx="1"/>
           </p:nvPr>
         </p:nvSpPr>
-        <p:spPr>
+        <p:spPr bwMode="auto">
           <a:xfrm>
             <a:off x="838200" y="1825625"/>
             <a:ext cx="5181600" cy="4351338"/>
@@ -2155,26 +2149,48 @@
           <a:bodyPr/>
           <a:lstStyle/>
           <a:p>
+            <a:pPr>
+              <a:defRPr/>
+            </a:pPr>
             <a:r>
               <a:rPr lang="fr-FR"/>
-              <a:t>Modifier les styles du texte du masque
-Deuxième niveau
-Troisième niveau
-Quatrième niveau
-Cinquième niveau</a:t>
+              <a:t>Modifier les styles du texte du masque</a:t>
             </a:r>
+            <a:br>
+              <a:rPr lang="fr-FR"/>
+            </a:br>
+            <a:r>
+              <a:rPr lang="fr-FR"/>
+              <a:t>Deuxième niveau</a:t>
+            </a:r>
+            <a:br>
+              <a:rPr lang="fr-FR"/>
+            </a:br>
+            <a:r>
+              <a:rPr lang="fr-FR"/>
+              <a:t>Troisième niveau</a:t>
+            </a:r>
+            <a:br>
+              <a:rPr lang="fr-FR"/>
+            </a:br>
+            <a:r>
+              <a:rPr lang="fr-FR"/>
+              <a:t>Quatrième niveau</a:t>
+            </a:r>
+            <a:br>
+              <a:rPr lang="fr-FR"/>
+            </a:br>
+            <a:r>
+              <a:rPr lang="fr-FR"/>
+              <a:t>Cinquième niveau</a:t>
+            </a:r>
+            <a:endParaRPr/>
           </a:p>
         </p:txBody>
       </p:sp>
       <p:sp>
         <p:nvSpPr>
-          <p:cNvPr id="4" name="Espace réservé du contenu 3">
-            <a:extLst>
-              <a:ext uri="{FF2B5EF4-FFF2-40B4-BE49-F238E27FC236}">
-                <a16:creationId xmlns:a16="http://schemas.microsoft.com/office/drawing/2014/main" id="{99E7FFBE-8E50-D04A-8092-BD8A8552C5F0}"/>
-              </a:ext>
-            </a:extLst>
-          </p:cNvPr>
+          <p:cNvPr id="881289567" name="Espace réservé du contenu 3"/>
           <p:cNvSpPr>
             <a:spLocks noGrp="1"/>
           </p:cNvSpPr>
@@ -2182,7 +2198,7 @@
             <p:ph sz="half" idx="2"/>
           </p:nvPr>
         </p:nvSpPr>
-        <p:spPr>
+        <p:spPr bwMode="auto">
           <a:xfrm>
             <a:off x="6172200" y="1825625"/>
             <a:ext cx="5181600" cy="4351338"/>
@@ -2192,26 +2208,48 @@
           <a:bodyPr/>
           <a:lstStyle/>
           <a:p>
+            <a:pPr>
+              <a:defRPr/>
+            </a:pPr>
             <a:r>
               <a:rPr lang="fr-FR"/>
-              <a:t>Modifier les styles du texte du masque
-Deuxième niveau
-Troisième niveau
-Quatrième niveau
-Cinquième niveau</a:t>
+              <a:t>Modifier les styles du texte du masque</a:t>
             </a:r>
+            <a:br>
+              <a:rPr lang="fr-FR"/>
+            </a:br>
+            <a:r>
+              <a:rPr lang="fr-FR"/>
+              <a:t>Deuxième niveau</a:t>
+            </a:r>
+            <a:br>
+              <a:rPr lang="fr-FR"/>
+            </a:br>
+            <a:r>
+              <a:rPr lang="fr-FR"/>
+              <a:t>Troisième niveau</a:t>
+            </a:r>
+            <a:br>
+              <a:rPr lang="fr-FR"/>
+            </a:br>
+            <a:r>
+              <a:rPr lang="fr-FR"/>
+              <a:t>Quatrième niveau</a:t>
+            </a:r>
+            <a:br>
+              <a:rPr lang="fr-FR"/>
+            </a:br>
+            <a:r>
+              <a:rPr lang="fr-FR"/>
+              <a:t>Cinquième niveau</a:t>
+            </a:r>
+            <a:endParaRPr/>
           </a:p>
         </p:txBody>
       </p:sp>
       <p:sp>
         <p:nvSpPr>
-          <p:cNvPr id="5" name="Espace réservé de la date 4">
-            <a:extLst>
-              <a:ext uri="{FF2B5EF4-FFF2-40B4-BE49-F238E27FC236}">
-                <a16:creationId xmlns:a16="http://schemas.microsoft.com/office/drawing/2014/main" id="{93B4936E-16AC-EA48-AE74-99A0271B1EB6}"/>
-              </a:ext>
-            </a:extLst>
-          </p:cNvPr>
+          <p:cNvPr id="714617692" name="Espace réservé de la date 4"/>
           <p:cNvSpPr>
             <a:spLocks noGrp="1"/>
           </p:cNvSpPr>
@@ -2219,13 +2257,16 @@
             <p:ph type="dt" sz="half" idx="10"/>
           </p:nvPr>
         </p:nvSpPr>
-        <p:spPr/>
+        <p:spPr bwMode="auto"/>
         <p:txBody>
           <a:bodyPr/>
           <a:lstStyle/>
           <a:p>
+            <a:pPr>
+              <a:defRPr/>
+            </a:pPr>
             <a:fld id="{F585D4FA-9869-8449-9681-FA4BEB67A84F}" type="datetimeFigureOut">
-              <a:rPr lang="fr-FR" smtClean="0"/>
+              <a:rPr lang="fr-FR"/>
               <a:t>15/05/2026</a:t>
             </a:fld>
             <a:endParaRPr lang="fr-FR"/>
@@ -2234,13 +2275,7 @@
       </p:sp>
       <p:sp>
         <p:nvSpPr>
-          <p:cNvPr id="6" name="Espace réservé du pied de page 5">
-            <a:extLst>
-              <a:ext uri="{FF2B5EF4-FFF2-40B4-BE49-F238E27FC236}">
-                <a16:creationId xmlns:a16="http://schemas.microsoft.com/office/drawing/2014/main" id="{D2254E54-1ADB-E14D-9E4B-16E078E80790}"/>
-              </a:ext>
-            </a:extLst>
-          </p:cNvPr>
+          <p:cNvPr id="688290588" name="Espace réservé du pied de page 5"/>
           <p:cNvSpPr>
             <a:spLocks noGrp="1"/>
           </p:cNvSpPr>
@@ -2248,24 +2283,21 @@
             <p:ph type="ftr" sz="quarter" idx="11"/>
           </p:nvPr>
         </p:nvSpPr>
-        <p:spPr/>
+        <p:spPr bwMode="auto"/>
         <p:txBody>
           <a:bodyPr/>
           <a:lstStyle/>
           <a:p>
+            <a:pPr>
+              <a:defRPr/>
+            </a:pPr>
             <a:endParaRPr lang="fr-FR"/>
           </a:p>
         </p:txBody>
       </p:sp>
       <p:sp>
         <p:nvSpPr>
-          <p:cNvPr id="7" name="Espace réservé du numéro de diapositive 6">
-            <a:extLst>
-              <a:ext uri="{FF2B5EF4-FFF2-40B4-BE49-F238E27FC236}">
-                <a16:creationId xmlns:a16="http://schemas.microsoft.com/office/drawing/2014/main" id="{3DDA211D-A518-744C-B282-BCD5FE330634}"/>
-              </a:ext>
-            </a:extLst>
-          </p:cNvPr>
+          <p:cNvPr id="921938841" name="Espace réservé du numéro de diapositive 6"/>
           <p:cNvSpPr>
             <a:spLocks noGrp="1"/>
           </p:cNvSpPr>
@@ -2273,13 +2305,16 @@
             <p:ph type="sldNum" sz="quarter" idx="12"/>
           </p:nvPr>
         </p:nvSpPr>
-        <p:spPr/>
+        <p:spPr bwMode="auto"/>
         <p:txBody>
           <a:bodyPr/>
           <a:lstStyle/>
           <a:p>
+            <a:pPr>
+              <a:defRPr/>
+            </a:pPr>
             <a:fld id="{A53C86B5-489E-E049-BD62-B07127F1532D}" type="slidenum">
-              <a:rPr lang="fr-FR" smtClean="0"/>
+              <a:rPr lang="fr-FR"/>
               <a:t>‹#›</a:t>
             </a:fld>
             <a:endParaRPr lang="fr-FR"/>
@@ -2287,11 +2322,6 @@
         </p:txBody>
       </p:sp>
     </p:spTree>
-    <p:extLst>
-      <p:ext uri="{BB962C8B-B14F-4D97-AF65-F5344CB8AC3E}">
-        <p14:creationId xmlns:p14="http://schemas.microsoft.com/office/powerpoint/2010/main" val="1079692550"/>
-      </p:ext>
-    </p:extLst>
   </p:cSld>
   <p:clrMapOvr>
     <a:masterClrMapping/>
@@ -2300,7 +2330,7 @@
 </file>
 
 <file path=ppt/slideLayouts/slideLayout5.xml><?xml version="1.0" encoding="utf-8"?>
-<p:sldLayout xmlns:a="http://schemas.openxmlformats.org/drawingml/2006/main" xmlns:r="http://schemas.openxmlformats.org/officeDocument/2006/relationships" xmlns:p="http://schemas.openxmlformats.org/presentationml/2006/main" type="twoTxTwoObj" preserve="1">
+<p:sldLayout xmlns:a="http://schemas.openxmlformats.org/drawingml/2006/main" xmlns:r="http://schemas.openxmlformats.org/officeDocument/2006/relationships" xmlns:p="http://schemas.openxmlformats.org/presentationml/2006/main" xmlns:m="http://schemas.openxmlformats.org/officeDocument/2006/math" xmlns:w="http://schemas.openxmlformats.org/wordprocessingml/2006/main" matchingName="" preserve="1" showMasterPhAnim="0" showMasterSp="1" type="twoTxTwoObj" userDrawn="1">
   <p:cSld name="Comparaison">
     <p:spTree>
       <p:nvGrpSpPr>
@@ -2308,7 +2338,7 @@
         <p:cNvGrpSpPr/>
         <p:nvPr/>
       </p:nvGrpSpPr>
-      <p:grpSpPr>
+      <p:grpSpPr bwMode="auto">
         <a:xfrm>
           <a:off x="0" y="0"/>
           <a:ext cx="0" cy="0"/>
@@ -2318,13 +2348,7 @@
       </p:grpSpPr>
       <p:sp>
         <p:nvSpPr>
-          <p:cNvPr id="2" name="Titre 1">
-            <a:extLst>
-              <a:ext uri="{FF2B5EF4-FFF2-40B4-BE49-F238E27FC236}">
-                <a16:creationId xmlns:a16="http://schemas.microsoft.com/office/drawing/2014/main" id="{C5463B95-F2DD-BA47-9B34-83839FD33826}"/>
-              </a:ext>
-            </a:extLst>
-          </p:cNvPr>
+          <p:cNvPr id="1640127700" name="Titre 1"/>
           <p:cNvSpPr>
             <a:spLocks noGrp="1"/>
           </p:cNvSpPr>
@@ -2332,7 +2356,7 @@
             <p:ph type="title"/>
           </p:nvPr>
         </p:nvSpPr>
-        <p:spPr>
+        <p:spPr bwMode="auto">
           <a:xfrm>
             <a:off x="839788" y="365125"/>
             <a:ext cx="10515600" cy="1325563"/>
@@ -2342,22 +2366,20 @@
           <a:bodyPr/>
           <a:lstStyle/>
           <a:p>
+            <a:pPr>
+              <a:defRPr/>
+            </a:pPr>
             <a:r>
               <a:rPr lang="fr-FR"/>
               <a:t>Modifiez le style du titre</a:t>
             </a:r>
+            <a:endParaRPr/>
           </a:p>
         </p:txBody>
       </p:sp>
       <p:sp>
         <p:nvSpPr>
-          <p:cNvPr id="3" name="Espace réservé du texte 2">
-            <a:extLst>
-              <a:ext uri="{FF2B5EF4-FFF2-40B4-BE49-F238E27FC236}">
-                <a16:creationId xmlns:a16="http://schemas.microsoft.com/office/drawing/2014/main" id="{036DD3FF-A3FB-364E-BD85-80BF0C40C65B}"/>
-              </a:ext>
-            </a:extLst>
-          </p:cNvPr>
+          <p:cNvPr id="1194998799" name="Espace réservé du texte 2"/>
           <p:cNvSpPr>
             <a:spLocks noGrp="1"/>
           </p:cNvSpPr>
@@ -2365,7 +2387,7 @@
             <p:ph type="body" idx="1"/>
           </p:nvPr>
         </p:nvSpPr>
-        <p:spPr>
+        <p:spPr bwMode="auto">
           <a:xfrm>
             <a:off x="839788" y="1681163"/>
             <a:ext cx="5157787" cy="823912"/>
@@ -2412,26 +2434,48 @@
             </a:lvl9pPr>
           </a:lstStyle>
           <a:p>
+            <a:pPr>
+              <a:defRPr/>
+            </a:pPr>
             <a:r>
               <a:rPr lang="fr-FR"/>
-              <a:t>Modifier les styles du texte du masque
-Deuxième niveau
-Troisième niveau
-Quatrième niveau
-Cinquième niveau</a:t>
+              <a:t>Modifier les styles du texte du masque</a:t>
             </a:r>
+            <a:br>
+              <a:rPr lang="fr-FR"/>
+            </a:br>
+            <a:r>
+              <a:rPr lang="fr-FR"/>
+              <a:t>Deuxième niveau</a:t>
+            </a:r>
+            <a:br>
+              <a:rPr lang="fr-FR"/>
+            </a:br>
+            <a:r>
+              <a:rPr lang="fr-FR"/>
+              <a:t>Troisième niveau</a:t>
+            </a:r>
+            <a:br>
+              <a:rPr lang="fr-FR"/>
+            </a:br>
+            <a:r>
+              <a:rPr lang="fr-FR"/>
+              <a:t>Quatrième niveau</a:t>
+            </a:r>
+            <a:br>
+              <a:rPr lang="fr-FR"/>
+            </a:br>
+            <a:r>
+              <a:rPr lang="fr-FR"/>
+              <a:t>Cinquième niveau</a:t>
+            </a:r>
+            <a:endParaRPr/>
           </a:p>
         </p:txBody>
       </p:sp>
       <p:sp>
         <p:nvSpPr>
-          <p:cNvPr id="4" name="Espace réservé du contenu 3">
-            <a:extLst>
-              <a:ext uri="{FF2B5EF4-FFF2-40B4-BE49-F238E27FC236}">
-                <a16:creationId xmlns:a16="http://schemas.microsoft.com/office/drawing/2014/main" id="{6B4B28EE-7246-5744-AD22-95CCB2FEF521}"/>
-              </a:ext>
-            </a:extLst>
-          </p:cNvPr>
+          <p:cNvPr id="157619313" name="Espace réservé du contenu 3"/>
           <p:cNvSpPr>
             <a:spLocks noGrp="1"/>
           </p:cNvSpPr>
@@ -2439,9 +2483,9 @@
             <p:ph sz="half" idx="2"/>
           </p:nvPr>
         </p:nvSpPr>
-        <p:spPr>
+        <p:spPr bwMode="auto">
           <a:xfrm>
-            <a:off x="839788" y="2505075"/>
+            <a:off x="839788" y="2505074"/>
             <a:ext cx="5157787" cy="3684588"/>
           </a:xfrm>
         </p:spPr>
@@ -2449,26 +2493,48 @@
           <a:bodyPr/>
           <a:lstStyle/>
           <a:p>
+            <a:pPr>
+              <a:defRPr/>
+            </a:pPr>
             <a:r>
               <a:rPr lang="fr-FR"/>
-              <a:t>Modifier les styles du texte du masque
-Deuxième niveau
-Troisième niveau
-Quatrième niveau
-Cinquième niveau</a:t>
+              <a:t>Modifier les styles du texte du masque</a:t>
             </a:r>
+            <a:br>
+              <a:rPr lang="fr-FR"/>
+            </a:br>
+            <a:r>
+              <a:rPr lang="fr-FR"/>
+              <a:t>Deuxième niveau</a:t>
+            </a:r>
+            <a:br>
+              <a:rPr lang="fr-FR"/>
+            </a:br>
+            <a:r>
+              <a:rPr lang="fr-FR"/>
+              <a:t>Troisième niveau</a:t>
+            </a:r>
+            <a:br>
+              <a:rPr lang="fr-FR"/>
+            </a:br>
+            <a:r>
+              <a:rPr lang="fr-FR"/>
+              <a:t>Quatrième niveau</a:t>
+            </a:r>
+            <a:br>
+              <a:rPr lang="fr-FR"/>
+            </a:br>
+            <a:r>
+              <a:rPr lang="fr-FR"/>
+              <a:t>Cinquième niveau</a:t>
+            </a:r>
+            <a:endParaRPr/>
           </a:p>
         </p:txBody>
       </p:sp>
       <p:sp>
         <p:nvSpPr>
-          <p:cNvPr id="5" name="Espace réservé du texte 4">
-            <a:extLst>
-              <a:ext uri="{FF2B5EF4-FFF2-40B4-BE49-F238E27FC236}">
-                <a16:creationId xmlns:a16="http://schemas.microsoft.com/office/drawing/2014/main" id="{96C8D692-F64D-EF41-9995-ECFF1234437E}"/>
-              </a:ext>
-            </a:extLst>
-          </p:cNvPr>
+          <p:cNvPr id="953236914" name="Espace réservé du texte 4"/>
           <p:cNvSpPr>
             <a:spLocks noGrp="1"/>
           </p:cNvSpPr>
@@ -2476,7 +2542,7 @@
             <p:ph type="body" sz="quarter" idx="3"/>
           </p:nvPr>
         </p:nvSpPr>
-        <p:spPr>
+        <p:spPr bwMode="auto">
           <a:xfrm>
             <a:off x="6172200" y="1681163"/>
             <a:ext cx="5183188" cy="823912"/>
@@ -2523,26 +2589,48 @@
             </a:lvl9pPr>
           </a:lstStyle>
           <a:p>
+            <a:pPr>
+              <a:defRPr/>
+            </a:pPr>
             <a:r>
               <a:rPr lang="fr-FR"/>
-              <a:t>Modifier les styles du texte du masque
-Deuxième niveau
-Troisième niveau
-Quatrième niveau
-Cinquième niveau</a:t>
+              <a:t>Modifier les styles du texte du masque</a:t>
             </a:r>
+            <a:br>
+              <a:rPr lang="fr-FR"/>
+            </a:br>
+            <a:r>
+              <a:rPr lang="fr-FR"/>
+              <a:t>Deuxième niveau</a:t>
+            </a:r>
+            <a:br>
+              <a:rPr lang="fr-FR"/>
+            </a:br>
+            <a:r>
+              <a:rPr lang="fr-FR"/>
+              <a:t>Troisième niveau</a:t>
+            </a:r>
+            <a:br>
+              <a:rPr lang="fr-FR"/>
+            </a:br>
+            <a:r>
+              <a:rPr lang="fr-FR"/>
+              <a:t>Quatrième niveau</a:t>
+            </a:r>
+            <a:br>
+              <a:rPr lang="fr-FR"/>
+            </a:br>
+            <a:r>
+              <a:rPr lang="fr-FR"/>
+              <a:t>Cinquième niveau</a:t>
+            </a:r>
+            <a:endParaRPr/>
           </a:p>
         </p:txBody>
       </p:sp>
       <p:sp>
         <p:nvSpPr>
-          <p:cNvPr id="6" name="Espace réservé du contenu 5">
-            <a:extLst>
-              <a:ext uri="{FF2B5EF4-FFF2-40B4-BE49-F238E27FC236}">
-                <a16:creationId xmlns:a16="http://schemas.microsoft.com/office/drawing/2014/main" id="{CE5502D0-640F-6D4D-969F-363B9BE7B3FF}"/>
-              </a:ext>
-            </a:extLst>
-          </p:cNvPr>
+          <p:cNvPr id="1808080963" name="Espace réservé du contenu 5"/>
           <p:cNvSpPr>
             <a:spLocks noGrp="1"/>
           </p:cNvSpPr>
@@ -2550,9 +2638,9 @@
             <p:ph sz="quarter" idx="4"/>
           </p:nvPr>
         </p:nvSpPr>
-        <p:spPr>
+        <p:spPr bwMode="auto">
           <a:xfrm>
-            <a:off x="6172200" y="2505075"/>
+            <a:off x="6172200" y="2505074"/>
             <a:ext cx="5183188" cy="3684588"/>
           </a:xfrm>
         </p:spPr>
@@ -2560,26 +2648,48 @@
           <a:bodyPr/>
           <a:lstStyle/>
           <a:p>
+            <a:pPr>
+              <a:defRPr/>
+            </a:pPr>
             <a:r>
               <a:rPr lang="fr-FR"/>
-              <a:t>Modifier les styles du texte du masque
-Deuxième niveau
-Troisième niveau
-Quatrième niveau
-Cinquième niveau</a:t>
+              <a:t>Modifier les styles du texte du masque</a:t>
             </a:r>
+            <a:br>
+              <a:rPr lang="fr-FR"/>
+            </a:br>
+            <a:r>
+              <a:rPr lang="fr-FR"/>
+              <a:t>Deuxième niveau</a:t>
+            </a:r>
+            <a:br>
+              <a:rPr lang="fr-FR"/>
+            </a:br>
+            <a:r>
+              <a:rPr lang="fr-FR"/>
+              <a:t>Troisième niveau</a:t>
+            </a:r>
+            <a:br>
+              <a:rPr lang="fr-FR"/>
+            </a:br>
+            <a:r>
+              <a:rPr lang="fr-FR"/>
+              <a:t>Quatrième niveau</a:t>
+            </a:r>
+            <a:br>
+              <a:rPr lang="fr-FR"/>
+            </a:br>
+            <a:r>
+              <a:rPr lang="fr-FR"/>
+              <a:t>Cinquième niveau</a:t>
+            </a:r>
+            <a:endParaRPr/>
           </a:p>
         </p:txBody>
       </p:sp>
       <p:sp>
         <p:nvSpPr>
-          <p:cNvPr id="7" name="Espace réservé de la date 6">
-            <a:extLst>
-              <a:ext uri="{FF2B5EF4-FFF2-40B4-BE49-F238E27FC236}">
-                <a16:creationId xmlns:a16="http://schemas.microsoft.com/office/drawing/2014/main" id="{C036029E-154A-EF48-9D0F-DCB15F7B1BE4}"/>
-              </a:ext>
-            </a:extLst>
-          </p:cNvPr>
+          <p:cNvPr id="1595083111" name="Espace réservé de la date 6"/>
           <p:cNvSpPr>
             <a:spLocks noGrp="1"/>
           </p:cNvSpPr>
@@ -2587,13 +2697,16 @@
             <p:ph type="dt" sz="half" idx="10"/>
           </p:nvPr>
         </p:nvSpPr>
-        <p:spPr/>
+        <p:spPr bwMode="auto"/>
         <p:txBody>
           <a:bodyPr/>
           <a:lstStyle/>
           <a:p>
+            <a:pPr>
+              <a:defRPr/>
+            </a:pPr>
             <a:fld id="{F585D4FA-9869-8449-9681-FA4BEB67A84F}" type="datetimeFigureOut">
-              <a:rPr lang="fr-FR" smtClean="0"/>
+              <a:rPr lang="fr-FR"/>
               <a:t>15/05/2026</a:t>
             </a:fld>
             <a:endParaRPr lang="fr-FR"/>
@@ -2602,13 +2715,7 @@
       </p:sp>
       <p:sp>
         <p:nvSpPr>
-          <p:cNvPr id="8" name="Espace réservé du pied de page 7">
-            <a:extLst>
-              <a:ext uri="{FF2B5EF4-FFF2-40B4-BE49-F238E27FC236}">
-                <a16:creationId xmlns:a16="http://schemas.microsoft.com/office/drawing/2014/main" id="{850EB21D-9553-0542-9E49-F57A20B15EED}"/>
-              </a:ext>
-            </a:extLst>
-          </p:cNvPr>
+          <p:cNvPr id="153929394" name="Espace réservé du pied de page 7"/>
           <p:cNvSpPr>
             <a:spLocks noGrp="1"/>
           </p:cNvSpPr>
@@ -2616,24 +2723,21 @@
             <p:ph type="ftr" sz="quarter" idx="11"/>
           </p:nvPr>
         </p:nvSpPr>
-        <p:spPr/>
+        <p:spPr bwMode="auto"/>
         <p:txBody>
           <a:bodyPr/>
           <a:lstStyle/>
           <a:p>
+            <a:pPr>
+              <a:defRPr/>
+            </a:pPr>
             <a:endParaRPr lang="fr-FR"/>
           </a:p>
         </p:txBody>
       </p:sp>
       <p:sp>
         <p:nvSpPr>
-          <p:cNvPr id="9" name="Espace réservé du numéro de diapositive 8">
-            <a:extLst>
-              <a:ext uri="{FF2B5EF4-FFF2-40B4-BE49-F238E27FC236}">
-                <a16:creationId xmlns:a16="http://schemas.microsoft.com/office/drawing/2014/main" id="{455CFEC0-9A56-8640-9B38-E69C7AE01B25}"/>
-              </a:ext>
-            </a:extLst>
-          </p:cNvPr>
+          <p:cNvPr id="978082998" name="Espace réservé du numéro de diapositive 8"/>
           <p:cNvSpPr>
             <a:spLocks noGrp="1"/>
           </p:cNvSpPr>
@@ -2641,13 +2745,16 @@
             <p:ph type="sldNum" sz="quarter" idx="12"/>
           </p:nvPr>
         </p:nvSpPr>
-        <p:spPr/>
+        <p:spPr bwMode="auto"/>
         <p:txBody>
           <a:bodyPr/>
           <a:lstStyle/>
           <a:p>
+            <a:pPr>
+              <a:defRPr/>
+            </a:pPr>
             <a:fld id="{A53C86B5-489E-E049-BD62-B07127F1532D}" type="slidenum">
-              <a:rPr lang="fr-FR" smtClean="0"/>
+              <a:rPr lang="fr-FR"/>
               <a:t>‹#›</a:t>
             </a:fld>
             <a:endParaRPr lang="fr-FR"/>
@@ -2655,11 +2762,6 @@
         </p:txBody>
       </p:sp>
     </p:spTree>
-    <p:extLst>
-      <p:ext uri="{BB962C8B-B14F-4D97-AF65-F5344CB8AC3E}">
-        <p14:creationId xmlns:p14="http://schemas.microsoft.com/office/powerpoint/2010/main" val="2411649152"/>
-      </p:ext>
-    </p:extLst>
   </p:cSld>
   <p:clrMapOvr>
     <a:masterClrMapping/>
@@ -2668,7 +2770,7 @@
 </file>
 
 <file path=ppt/slideLayouts/slideLayout6.xml><?xml version="1.0" encoding="utf-8"?>
-<p:sldLayout xmlns:a="http://schemas.openxmlformats.org/drawingml/2006/main" xmlns:r="http://schemas.openxmlformats.org/officeDocument/2006/relationships" xmlns:p="http://schemas.openxmlformats.org/presentationml/2006/main" type="titleOnly" preserve="1">
+<p:sldLayout xmlns:a="http://schemas.openxmlformats.org/drawingml/2006/main" xmlns:r="http://schemas.openxmlformats.org/officeDocument/2006/relationships" xmlns:p="http://schemas.openxmlformats.org/presentationml/2006/main" xmlns:m="http://schemas.openxmlformats.org/officeDocument/2006/math" xmlns:w="http://schemas.openxmlformats.org/wordprocessingml/2006/main" matchingName="" preserve="1" showMasterPhAnim="0" showMasterSp="1" type="titleOnly" userDrawn="1">
   <p:cSld name="Titre seul">
     <p:spTree>
       <p:nvGrpSpPr>
@@ -2676,7 +2778,7 @@
         <p:cNvGrpSpPr/>
         <p:nvPr/>
       </p:nvGrpSpPr>
-      <p:grpSpPr>
+      <p:grpSpPr bwMode="auto">
         <a:xfrm>
           <a:off x="0" y="0"/>
           <a:ext cx="0" cy="0"/>
@@ -2686,13 +2788,7 @@
       </p:grpSpPr>
       <p:sp>
         <p:nvSpPr>
-          <p:cNvPr id="2" name="Titre 1">
-            <a:extLst>
-              <a:ext uri="{FF2B5EF4-FFF2-40B4-BE49-F238E27FC236}">
-                <a16:creationId xmlns:a16="http://schemas.microsoft.com/office/drawing/2014/main" id="{9AD8F0B0-263B-7C4E-BCD3-A50BE8B980F1}"/>
-              </a:ext>
-            </a:extLst>
-          </p:cNvPr>
+          <p:cNvPr id="834779459" name="Titre 1"/>
           <p:cNvSpPr>
             <a:spLocks noGrp="1"/>
           </p:cNvSpPr>
@@ -2700,27 +2796,25 @@
             <p:ph type="title"/>
           </p:nvPr>
         </p:nvSpPr>
-        <p:spPr/>
+        <p:spPr bwMode="auto"/>
         <p:txBody>
           <a:bodyPr/>
           <a:lstStyle/>
           <a:p>
+            <a:pPr>
+              <a:defRPr/>
+            </a:pPr>
             <a:r>
               <a:rPr lang="fr-FR"/>
               <a:t>Modifiez le style du titre</a:t>
             </a:r>
+            <a:endParaRPr/>
           </a:p>
         </p:txBody>
       </p:sp>
       <p:sp>
         <p:nvSpPr>
-          <p:cNvPr id="3" name="Espace réservé de la date 2">
-            <a:extLst>
-              <a:ext uri="{FF2B5EF4-FFF2-40B4-BE49-F238E27FC236}">
-                <a16:creationId xmlns:a16="http://schemas.microsoft.com/office/drawing/2014/main" id="{BF252D6D-5A4D-414F-A626-9AD3299E55AF}"/>
-              </a:ext>
-            </a:extLst>
-          </p:cNvPr>
+          <p:cNvPr id="934854675" name="Espace réservé de la date 2"/>
           <p:cNvSpPr>
             <a:spLocks noGrp="1"/>
           </p:cNvSpPr>
@@ -2728,13 +2822,16 @@
             <p:ph type="dt" sz="half" idx="10"/>
           </p:nvPr>
         </p:nvSpPr>
-        <p:spPr/>
+        <p:spPr bwMode="auto"/>
         <p:txBody>
           <a:bodyPr/>
           <a:lstStyle/>
           <a:p>
+            <a:pPr>
+              <a:defRPr/>
+            </a:pPr>
             <a:fld id="{F585D4FA-9869-8449-9681-FA4BEB67A84F}" type="datetimeFigureOut">
-              <a:rPr lang="fr-FR" smtClean="0"/>
+              <a:rPr lang="fr-FR"/>
               <a:t>15/05/2026</a:t>
             </a:fld>
             <a:endParaRPr lang="fr-FR"/>
@@ -2743,13 +2840,7 @@
       </p:sp>
       <p:sp>
         <p:nvSpPr>
-          <p:cNvPr id="4" name="Espace réservé du pied de page 3">
-            <a:extLst>
-              <a:ext uri="{FF2B5EF4-FFF2-40B4-BE49-F238E27FC236}">
-                <a16:creationId xmlns:a16="http://schemas.microsoft.com/office/drawing/2014/main" id="{C4A2C93F-0DF2-1E4C-A333-5F1B9CC6C17F}"/>
-              </a:ext>
-            </a:extLst>
-          </p:cNvPr>
+          <p:cNvPr id="1070069183" name="Espace réservé du pied de page 3"/>
           <p:cNvSpPr>
             <a:spLocks noGrp="1"/>
           </p:cNvSpPr>
@@ -2757,24 +2848,21 @@
             <p:ph type="ftr" sz="quarter" idx="11"/>
           </p:nvPr>
         </p:nvSpPr>
-        <p:spPr/>
+        <p:spPr bwMode="auto"/>
         <p:txBody>
           <a:bodyPr/>
           <a:lstStyle/>
           <a:p>
+            <a:pPr>
+              <a:defRPr/>
+            </a:pPr>
             <a:endParaRPr lang="fr-FR"/>
           </a:p>
         </p:txBody>
       </p:sp>
       <p:sp>
         <p:nvSpPr>
-          <p:cNvPr id="5" name="Espace réservé du numéro de diapositive 4">
-            <a:extLst>
-              <a:ext uri="{FF2B5EF4-FFF2-40B4-BE49-F238E27FC236}">
-                <a16:creationId xmlns:a16="http://schemas.microsoft.com/office/drawing/2014/main" id="{2E1C9C25-5B64-2A45-8D50-307EC31E8329}"/>
-              </a:ext>
-            </a:extLst>
-          </p:cNvPr>
+          <p:cNvPr id="1331287945" name="Espace réservé du numéro de diapositive 4"/>
           <p:cNvSpPr>
             <a:spLocks noGrp="1"/>
           </p:cNvSpPr>
@@ -2782,13 +2870,16 @@
             <p:ph type="sldNum" sz="quarter" idx="12"/>
           </p:nvPr>
         </p:nvSpPr>
-        <p:spPr/>
+        <p:spPr bwMode="auto"/>
         <p:txBody>
           <a:bodyPr/>
           <a:lstStyle/>
           <a:p>
+            <a:pPr>
+              <a:defRPr/>
+            </a:pPr>
             <a:fld id="{A53C86B5-489E-E049-BD62-B07127F1532D}" type="slidenum">
-              <a:rPr lang="fr-FR" smtClean="0"/>
+              <a:rPr lang="fr-FR"/>
               <a:t>‹#›</a:t>
             </a:fld>
             <a:endParaRPr lang="fr-FR"/>
@@ -2796,11 +2887,6 @@
         </p:txBody>
       </p:sp>
     </p:spTree>
-    <p:extLst>
-      <p:ext uri="{BB962C8B-B14F-4D97-AF65-F5344CB8AC3E}">
-        <p14:creationId xmlns:p14="http://schemas.microsoft.com/office/powerpoint/2010/main" val="857631016"/>
-      </p:ext>
-    </p:extLst>
   </p:cSld>
   <p:clrMapOvr>
     <a:masterClrMapping/>
@@ -2809,7 +2895,7 @@
 </file>
 
 <file path=ppt/slideLayouts/slideLayout7.xml><?xml version="1.0" encoding="utf-8"?>
-<p:sldLayout xmlns:a="http://schemas.openxmlformats.org/drawingml/2006/main" xmlns:r="http://schemas.openxmlformats.org/officeDocument/2006/relationships" xmlns:p="http://schemas.openxmlformats.org/presentationml/2006/main" type="blank" preserve="1">
+<p:sldLayout xmlns:a="http://schemas.openxmlformats.org/drawingml/2006/main" xmlns:r="http://schemas.openxmlformats.org/officeDocument/2006/relationships" xmlns:p="http://schemas.openxmlformats.org/presentationml/2006/main" xmlns:m="http://schemas.openxmlformats.org/officeDocument/2006/math" xmlns:w="http://schemas.openxmlformats.org/wordprocessingml/2006/main" matchingName="" preserve="1" showMasterPhAnim="0" showMasterSp="1" type="blank" userDrawn="1">
   <p:cSld name="Vide">
     <p:spTree>
       <p:nvGrpSpPr>
@@ -2817,7 +2903,7 @@
         <p:cNvGrpSpPr/>
         <p:nvPr/>
       </p:nvGrpSpPr>
-      <p:grpSpPr>
+      <p:grpSpPr bwMode="auto">
         <a:xfrm>
           <a:off x="0" y="0"/>
           <a:ext cx="0" cy="0"/>
@@ -2827,13 +2913,7 @@
       </p:grpSpPr>
       <p:sp>
         <p:nvSpPr>
-          <p:cNvPr id="2" name="Espace réservé de la date 1">
-            <a:extLst>
-              <a:ext uri="{FF2B5EF4-FFF2-40B4-BE49-F238E27FC236}">
-                <a16:creationId xmlns:a16="http://schemas.microsoft.com/office/drawing/2014/main" id="{65F6575F-DE71-7D42-ADA2-B1B2CF16E40E}"/>
-              </a:ext>
-            </a:extLst>
-          </p:cNvPr>
+          <p:cNvPr id="1128035099" name="Espace réservé de la date 1"/>
           <p:cNvSpPr>
             <a:spLocks noGrp="1"/>
           </p:cNvSpPr>
@@ -2841,13 +2921,16 @@
             <p:ph type="dt" sz="half" idx="10"/>
           </p:nvPr>
         </p:nvSpPr>
-        <p:spPr/>
+        <p:spPr bwMode="auto"/>
         <p:txBody>
           <a:bodyPr/>
           <a:lstStyle/>
           <a:p>
+            <a:pPr>
+              <a:defRPr/>
+            </a:pPr>
             <a:fld id="{F585D4FA-9869-8449-9681-FA4BEB67A84F}" type="datetimeFigureOut">
-              <a:rPr lang="fr-FR" smtClean="0"/>
+              <a:rPr lang="fr-FR"/>
               <a:t>15/05/2026</a:t>
             </a:fld>
             <a:endParaRPr lang="fr-FR"/>
@@ -2856,13 +2939,7 @@
       </p:sp>
       <p:sp>
         <p:nvSpPr>
-          <p:cNvPr id="3" name="Espace réservé du pied de page 2">
-            <a:extLst>
-              <a:ext uri="{FF2B5EF4-FFF2-40B4-BE49-F238E27FC236}">
-                <a16:creationId xmlns:a16="http://schemas.microsoft.com/office/drawing/2014/main" id="{A304A0EC-090A-F846-A805-6CB5D98A6899}"/>
-              </a:ext>
-            </a:extLst>
-          </p:cNvPr>
+          <p:cNvPr id="628481910" name="Espace réservé du pied de page 2"/>
           <p:cNvSpPr>
             <a:spLocks noGrp="1"/>
           </p:cNvSpPr>
@@ -2870,24 +2947,21 @@
             <p:ph type="ftr" sz="quarter" idx="11"/>
           </p:nvPr>
         </p:nvSpPr>
-        <p:spPr/>
+        <p:spPr bwMode="auto"/>
         <p:txBody>
           <a:bodyPr/>
           <a:lstStyle/>
           <a:p>
+            <a:pPr>
+              <a:defRPr/>
+            </a:pPr>
             <a:endParaRPr lang="fr-FR"/>
           </a:p>
         </p:txBody>
       </p:sp>
       <p:sp>
         <p:nvSpPr>
-          <p:cNvPr id="4" name="Espace réservé du numéro de diapositive 3">
-            <a:extLst>
-              <a:ext uri="{FF2B5EF4-FFF2-40B4-BE49-F238E27FC236}">
-                <a16:creationId xmlns:a16="http://schemas.microsoft.com/office/drawing/2014/main" id="{B34B94CB-A19F-B249-BD9E-772FBB740C26}"/>
-              </a:ext>
-            </a:extLst>
-          </p:cNvPr>
+          <p:cNvPr id="335264198" name="Espace réservé du numéro de diapositive 3"/>
           <p:cNvSpPr>
             <a:spLocks noGrp="1"/>
           </p:cNvSpPr>
@@ -2895,13 +2969,16 @@
             <p:ph type="sldNum" sz="quarter" idx="12"/>
           </p:nvPr>
         </p:nvSpPr>
-        <p:spPr/>
+        <p:spPr bwMode="auto"/>
         <p:txBody>
           <a:bodyPr/>
           <a:lstStyle/>
           <a:p>
+            <a:pPr>
+              <a:defRPr/>
+            </a:pPr>
             <a:fld id="{A53C86B5-489E-E049-BD62-B07127F1532D}" type="slidenum">
-              <a:rPr lang="fr-FR" smtClean="0"/>
+              <a:rPr lang="fr-FR"/>
               <a:t>‹#›</a:t>
             </a:fld>
             <a:endParaRPr lang="fr-FR"/>
@@ -2909,11 +2986,6 @@
         </p:txBody>
       </p:sp>
     </p:spTree>
-    <p:extLst>
-      <p:ext uri="{BB962C8B-B14F-4D97-AF65-F5344CB8AC3E}">
-        <p14:creationId xmlns:p14="http://schemas.microsoft.com/office/powerpoint/2010/main" val="3992782319"/>
-      </p:ext>
-    </p:extLst>
   </p:cSld>
   <p:clrMapOvr>
     <a:masterClrMapping/>
@@ -2922,7 +2994,7 @@
 </file>
 
 <file path=ppt/slideLayouts/slideLayout8.xml><?xml version="1.0" encoding="utf-8"?>
-<p:sldLayout xmlns:a="http://schemas.openxmlformats.org/drawingml/2006/main" xmlns:r="http://schemas.openxmlformats.org/officeDocument/2006/relationships" xmlns:p="http://schemas.openxmlformats.org/presentationml/2006/main" type="objTx" preserve="1">
+<p:sldLayout xmlns:a="http://schemas.openxmlformats.org/drawingml/2006/main" xmlns:r="http://schemas.openxmlformats.org/officeDocument/2006/relationships" xmlns:p="http://schemas.openxmlformats.org/presentationml/2006/main" xmlns:m="http://schemas.openxmlformats.org/officeDocument/2006/math" xmlns:w="http://schemas.openxmlformats.org/wordprocessingml/2006/main" matchingName="" preserve="1" showMasterPhAnim="0" showMasterSp="1" type="objTx" userDrawn="1">
   <p:cSld name="Contenu avec légende">
     <p:spTree>
       <p:nvGrpSpPr>
@@ -2930,7 +3002,7 @@
         <p:cNvGrpSpPr/>
         <p:nvPr/>
       </p:nvGrpSpPr>
-      <p:grpSpPr>
+      <p:grpSpPr bwMode="auto">
         <a:xfrm>
           <a:off x="0" y="0"/>
           <a:ext cx="0" cy="0"/>
@@ -2940,13 +3012,7 @@
       </p:grpSpPr>
       <p:sp>
         <p:nvSpPr>
-          <p:cNvPr id="2" name="Titre 1">
-            <a:extLst>
-              <a:ext uri="{FF2B5EF4-FFF2-40B4-BE49-F238E27FC236}">
-                <a16:creationId xmlns:a16="http://schemas.microsoft.com/office/drawing/2014/main" id="{53734658-8D96-764B-A431-43E26C6153A5}"/>
-              </a:ext>
-            </a:extLst>
-          </p:cNvPr>
+          <p:cNvPr id="960759486" name="Titre 1"/>
           <p:cNvSpPr>
             <a:spLocks noGrp="1"/>
           </p:cNvSpPr>
@@ -2954,7 +3020,7 @@
             <p:ph type="title"/>
           </p:nvPr>
         </p:nvSpPr>
-        <p:spPr>
+        <p:spPr bwMode="auto">
           <a:xfrm>
             <a:off x="839788" y="457200"/>
             <a:ext cx="3932237" cy="1600200"/>
@@ -2968,22 +3034,20 @@
             </a:lvl1pPr>
           </a:lstStyle>
           <a:p>
+            <a:pPr>
+              <a:defRPr/>
+            </a:pPr>
             <a:r>
               <a:rPr lang="fr-FR"/>
               <a:t>Modifiez le style du titre</a:t>
             </a:r>
+            <a:endParaRPr/>
           </a:p>
         </p:txBody>
       </p:sp>
       <p:sp>
         <p:nvSpPr>
-          <p:cNvPr id="3" name="Espace réservé du contenu 2">
-            <a:extLst>
-              <a:ext uri="{FF2B5EF4-FFF2-40B4-BE49-F238E27FC236}">
-                <a16:creationId xmlns:a16="http://schemas.microsoft.com/office/drawing/2014/main" id="{C1FBD03E-0358-0440-8486-9D8A3C0A7633}"/>
-              </a:ext>
-            </a:extLst>
-          </p:cNvPr>
+          <p:cNvPr id="1320474032" name="Espace réservé du contenu 2"/>
           <p:cNvSpPr>
             <a:spLocks noGrp="1"/>
           </p:cNvSpPr>
@@ -2991,7 +3055,7 @@
             <p:ph idx="1"/>
           </p:nvPr>
         </p:nvSpPr>
-        <p:spPr>
+        <p:spPr bwMode="auto">
           <a:xfrm>
             <a:off x="5183188" y="987425"/>
             <a:ext cx="6172200" cy="4873625"/>
@@ -3029,26 +3093,48 @@
             </a:lvl9pPr>
           </a:lstStyle>
           <a:p>
+            <a:pPr>
+              <a:defRPr/>
+            </a:pPr>
             <a:r>
               <a:rPr lang="fr-FR"/>
-              <a:t>Modifier les styles du texte du masque
-Deuxième niveau
-Troisième niveau
-Quatrième niveau
-Cinquième niveau</a:t>
+              <a:t>Modifier les styles du texte du masque</a:t>
             </a:r>
+            <a:br>
+              <a:rPr lang="fr-FR"/>
+            </a:br>
+            <a:r>
+              <a:rPr lang="fr-FR"/>
+              <a:t>Deuxième niveau</a:t>
+            </a:r>
+            <a:br>
+              <a:rPr lang="fr-FR"/>
+            </a:br>
+            <a:r>
+              <a:rPr lang="fr-FR"/>
+              <a:t>Troisième niveau</a:t>
+            </a:r>
+            <a:br>
+              <a:rPr lang="fr-FR"/>
+            </a:br>
+            <a:r>
+              <a:rPr lang="fr-FR"/>
+              <a:t>Quatrième niveau</a:t>
+            </a:r>
+            <a:br>
+              <a:rPr lang="fr-FR"/>
+            </a:br>
+            <a:r>
+              <a:rPr lang="fr-FR"/>
+              <a:t>Cinquième niveau</a:t>
+            </a:r>
+            <a:endParaRPr/>
           </a:p>
         </p:txBody>
       </p:sp>
       <p:sp>
         <p:nvSpPr>
-          <p:cNvPr id="4" name="Espace réservé du texte 3">
-            <a:extLst>
-              <a:ext uri="{FF2B5EF4-FFF2-40B4-BE49-F238E27FC236}">
-                <a16:creationId xmlns:a16="http://schemas.microsoft.com/office/drawing/2014/main" id="{107BA6A2-36EB-954C-93BB-FF2795C51B12}"/>
-              </a:ext>
-            </a:extLst>
-          </p:cNvPr>
+          <p:cNvPr id="566631420" name="Espace réservé du texte 3"/>
           <p:cNvSpPr>
             <a:spLocks noGrp="1"/>
           </p:cNvSpPr>
@@ -3056,7 +3142,7 @@
             <p:ph type="body" sz="half" idx="2"/>
           </p:nvPr>
         </p:nvSpPr>
-        <p:spPr>
+        <p:spPr bwMode="auto">
           <a:xfrm>
             <a:off x="839788" y="2057400"/>
             <a:ext cx="3932237" cy="3811588"/>
@@ -3103,26 +3189,48 @@
             </a:lvl9pPr>
           </a:lstStyle>
           <a:p>
+            <a:pPr>
+              <a:defRPr/>
+            </a:pPr>
             <a:r>
               <a:rPr lang="fr-FR"/>
-              <a:t>Modifier les styles du texte du masque
-Deuxième niveau
-Troisième niveau
-Quatrième niveau
-Cinquième niveau</a:t>
+              <a:t>Modifier les styles du texte du masque</a:t>
             </a:r>
+            <a:br>
+              <a:rPr lang="fr-FR"/>
+            </a:br>
+            <a:r>
+              <a:rPr lang="fr-FR"/>
+              <a:t>Deuxième niveau</a:t>
+            </a:r>
+            <a:br>
+              <a:rPr lang="fr-FR"/>
+            </a:br>
+            <a:r>
+              <a:rPr lang="fr-FR"/>
+              <a:t>Troisième niveau</a:t>
+            </a:r>
+            <a:br>
+              <a:rPr lang="fr-FR"/>
+            </a:br>
+            <a:r>
+              <a:rPr lang="fr-FR"/>
+              <a:t>Quatrième niveau</a:t>
+            </a:r>
+            <a:br>
+              <a:rPr lang="fr-FR"/>
+            </a:br>
+            <a:r>
+              <a:rPr lang="fr-FR"/>
+              <a:t>Cinquième niveau</a:t>
+            </a:r>
+            <a:endParaRPr/>
           </a:p>
         </p:txBody>
       </p:sp>
       <p:sp>
         <p:nvSpPr>
-          <p:cNvPr id="5" name="Espace réservé de la date 4">
-            <a:extLst>
-              <a:ext uri="{FF2B5EF4-FFF2-40B4-BE49-F238E27FC236}">
-                <a16:creationId xmlns:a16="http://schemas.microsoft.com/office/drawing/2014/main" id="{2ADF8269-C4B1-5B48-AFEF-06DE4F121456}"/>
-              </a:ext>
-            </a:extLst>
-          </p:cNvPr>
+          <p:cNvPr id="91969833" name="Espace réservé de la date 4"/>
           <p:cNvSpPr>
             <a:spLocks noGrp="1"/>
           </p:cNvSpPr>
@@ -3130,13 +3238,16 @@
             <p:ph type="dt" sz="half" idx="10"/>
           </p:nvPr>
         </p:nvSpPr>
-        <p:spPr/>
+        <p:spPr bwMode="auto"/>
         <p:txBody>
           <a:bodyPr/>
           <a:lstStyle/>
           <a:p>
+            <a:pPr>
+              <a:defRPr/>
+            </a:pPr>
             <a:fld id="{F585D4FA-9869-8449-9681-FA4BEB67A84F}" type="datetimeFigureOut">
-              <a:rPr lang="fr-FR" smtClean="0"/>
+              <a:rPr lang="fr-FR"/>
               <a:t>15/05/2026</a:t>
             </a:fld>
             <a:endParaRPr lang="fr-FR"/>
@@ -3145,13 +3256,7 @@
       </p:sp>
       <p:sp>
         <p:nvSpPr>
-          <p:cNvPr id="6" name="Espace réservé du pied de page 5">
-            <a:extLst>
-              <a:ext uri="{FF2B5EF4-FFF2-40B4-BE49-F238E27FC236}">
-                <a16:creationId xmlns:a16="http://schemas.microsoft.com/office/drawing/2014/main" id="{BB6441F5-DE61-E04D-B6F5-7F7A14159077}"/>
-              </a:ext>
-            </a:extLst>
-          </p:cNvPr>
+          <p:cNvPr id="628522514" name="Espace réservé du pied de page 5"/>
           <p:cNvSpPr>
             <a:spLocks noGrp="1"/>
           </p:cNvSpPr>
@@ -3159,24 +3264,21 @@
             <p:ph type="ftr" sz="quarter" idx="11"/>
           </p:nvPr>
         </p:nvSpPr>
-        <p:spPr/>
+        <p:spPr bwMode="auto"/>
         <p:txBody>
           <a:bodyPr/>
           <a:lstStyle/>
           <a:p>
+            <a:pPr>
+              <a:defRPr/>
+            </a:pPr>
             <a:endParaRPr lang="fr-FR"/>
           </a:p>
         </p:txBody>
       </p:sp>
       <p:sp>
         <p:nvSpPr>
-          <p:cNvPr id="7" name="Espace réservé du numéro de diapositive 6">
-            <a:extLst>
-              <a:ext uri="{FF2B5EF4-FFF2-40B4-BE49-F238E27FC236}">
-                <a16:creationId xmlns:a16="http://schemas.microsoft.com/office/drawing/2014/main" id="{802851EF-6BFD-8B4D-A5D2-6123D723D6F0}"/>
-              </a:ext>
-            </a:extLst>
-          </p:cNvPr>
+          <p:cNvPr id="1277075415" name="Espace réservé du numéro de diapositive 6"/>
           <p:cNvSpPr>
             <a:spLocks noGrp="1"/>
           </p:cNvSpPr>
@@ -3184,13 +3286,16 @@
             <p:ph type="sldNum" sz="quarter" idx="12"/>
           </p:nvPr>
         </p:nvSpPr>
-        <p:spPr/>
+        <p:spPr bwMode="auto"/>
         <p:txBody>
           <a:bodyPr/>
           <a:lstStyle/>
           <a:p>
+            <a:pPr>
+              <a:defRPr/>
+            </a:pPr>
             <a:fld id="{A53C86B5-489E-E049-BD62-B07127F1532D}" type="slidenum">
-              <a:rPr lang="fr-FR" smtClean="0"/>
+              <a:rPr lang="fr-FR"/>
               <a:t>‹#›</a:t>
             </a:fld>
             <a:endParaRPr lang="fr-FR"/>
@@ -3198,11 +3303,6 @@
         </p:txBody>
       </p:sp>
     </p:spTree>
-    <p:extLst>
-      <p:ext uri="{BB962C8B-B14F-4D97-AF65-F5344CB8AC3E}">
-        <p14:creationId xmlns:p14="http://schemas.microsoft.com/office/powerpoint/2010/main" val="2918342440"/>
-      </p:ext>
-    </p:extLst>
   </p:cSld>
   <p:clrMapOvr>
     <a:masterClrMapping/>
@@ -3211,7 +3311,7 @@
 </file>
 
 <file path=ppt/slideLayouts/slideLayout9.xml><?xml version="1.0" encoding="utf-8"?>
-<p:sldLayout xmlns:a="http://schemas.openxmlformats.org/drawingml/2006/main" xmlns:r="http://schemas.openxmlformats.org/officeDocument/2006/relationships" xmlns:p="http://schemas.openxmlformats.org/presentationml/2006/main" type="picTx" preserve="1">
+<p:sldLayout xmlns:a="http://schemas.openxmlformats.org/drawingml/2006/main" xmlns:r="http://schemas.openxmlformats.org/officeDocument/2006/relationships" xmlns:p="http://schemas.openxmlformats.org/presentationml/2006/main" xmlns:m="http://schemas.openxmlformats.org/officeDocument/2006/math" xmlns:w="http://schemas.openxmlformats.org/wordprocessingml/2006/main" matchingName="" preserve="1" showMasterPhAnim="0" showMasterSp="1" type="picTx" userDrawn="1">
   <p:cSld name="Image avec légende">
     <p:spTree>
       <p:nvGrpSpPr>
@@ -3219,7 +3319,7 @@
         <p:cNvGrpSpPr/>
         <p:nvPr/>
       </p:nvGrpSpPr>
-      <p:grpSpPr>
+      <p:grpSpPr bwMode="auto">
         <a:xfrm>
           <a:off x="0" y="0"/>
           <a:ext cx="0" cy="0"/>
@@ -3229,13 +3329,7 @@
       </p:grpSpPr>
       <p:sp>
         <p:nvSpPr>
-          <p:cNvPr id="2" name="Titre 1">
-            <a:extLst>
-              <a:ext uri="{FF2B5EF4-FFF2-40B4-BE49-F238E27FC236}">
-                <a16:creationId xmlns:a16="http://schemas.microsoft.com/office/drawing/2014/main" id="{1D0AAD1F-8DE6-314E-8B4D-6006F09E0C86}"/>
-              </a:ext>
-            </a:extLst>
-          </p:cNvPr>
+          <p:cNvPr id="2056800448" name="Titre 1"/>
           <p:cNvSpPr>
             <a:spLocks noGrp="1"/>
           </p:cNvSpPr>
@@ -3243,7 +3337,7 @@
             <p:ph type="title"/>
           </p:nvPr>
         </p:nvSpPr>
-        <p:spPr>
+        <p:spPr bwMode="auto">
           <a:xfrm>
             <a:off x="839788" y="457200"/>
             <a:ext cx="3932237" cy="1600200"/>
@@ -3257,22 +3351,20 @@
             </a:lvl1pPr>
           </a:lstStyle>
           <a:p>
+            <a:pPr>
+              <a:defRPr/>
+            </a:pPr>
             <a:r>
               <a:rPr lang="fr-FR"/>
               <a:t>Modifiez le style du titre</a:t>
             </a:r>
+            <a:endParaRPr/>
           </a:p>
         </p:txBody>
       </p:sp>
       <p:sp>
         <p:nvSpPr>
-          <p:cNvPr id="3" name="Espace réservé pour une image  2">
-            <a:extLst>
-              <a:ext uri="{FF2B5EF4-FFF2-40B4-BE49-F238E27FC236}">
-                <a16:creationId xmlns:a16="http://schemas.microsoft.com/office/drawing/2014/main" id="{CFCE9E7A-3012-2748-BD37-10D13E002F0F}"/>
-              </a:ext>
-            </a:extLst>
-          </p:cNvPr>
+          <p:cNvPr id="1793872072" name="Espace réservé pour une image  2"/>
           <p:cNvSpPr>
             <a:spLocks noGrp="1"/>
           </p:cNvSpPr>
@@ -3280,7 +3372,7 @@
             <p:ph type="pic" idx="1"/>
           </p:nvPr>
         </p:nvSpPr>
-        <p:spPr>
+        <p:spPr bwMode="auto">
           <a:xfrm>
             <a:off x="5183188" y="987425"/>
             <a:ext cx="6172200" cy="4873625"/>
@@ -3327,19 +3419,16 @@
             </a:lvl9pPr>
           </a:lstStyle>
           <a:p>
+            <a:pPr>
+              <a:defRPr/>
+            </a:pPr>
             <a:endParaRPr lang="fr-FR"/>
           </a:p>
         </p:txBody>
       </p:sp>
       <p:sp>
         <p:nvSpPr>
-          <p:cNvPr id="4" name="Espace réservé du texte 3">
-            <a:extLst>
-              <a:ext uri="{FF2B5EF4-FFF2-40B4-BE49-F238E27FC236}">
-                <a16:creationId xmlns:a16="http://schemas.microsoft.com/office/drawing/2014/main" id="{66858230-4230-9646-8A14-C46AB4269A58}"/>
-              </a:ext>
-            </a:extLst>
-          </p:cNvPr>
+          <p:cNvPr id="1821638081" name="Espace réservé du texte 3"/>
           <p:cNvSpPr>
             <a:spLocks noGrp="1"/>
           </p:cNvSpPr>
@@ -3347,7 +3436,7 @@
             <p:ph type="body" sz="half" idx="2"/>
           </p:nvPr>
         </p:nvSpPr>
-        <p:spPr>
+        <p:spPr bwMode="auto">
           <a:xfrm>
             <a:off x="839788" y="2057400"/>
             <a:ext cx="3932237" cy="3811588"/>
@@ -3394,26 +3483,48 @@
             </a:lvl9pPr>
           </a:lstStyle>
           <a:p>
+            <a:pPr>
+              <a:defRPr/>
+            </a:pPr>
             <a:r>
               <a:rPr lang="fr-FR"/>
-              <a:t>Modifier les styles du texte du masque
-Deuxième niveau
-Troisième niveau
-Quatrième niveau
-Cinquième niveau</a:t>
+              <a:t>Modifier les styles du texte du masque</a:t>
             </a:r>
+            <a:br>
+              <a:rPr lang="fr-FR"/>
+            </a:br>
+            <a:r>
+              <a:rPr lang="fr-FR"/>
+              <a:t>Deuxième niveau</a:t>
+            </a:r>
+            <a:br>
+              <a:rPr lang="fr-FR"/>
+            </a:br>
+            <a:r>
+              <a:rPr lang="fr-FR"/>
+              <a:t>Troisième niveau</a:t>
+            </a:r>
+            <a:br>
+              <a:rPr lang="fr-FR"/>
+            </a:br>
+            <a:r>
+              <a:rPr lang="fr-FR"/>
+              <a:t>Quatrième niveau</a:t>
+            </a:r>
+            <a:br>
+              <a:rPr lang="fr-FR"/>
+            </a:br>
+            <a:r>
+              <a:rPr lang="fr-FR"/>
+              <a:t>Cinquième niveau</a:t>
+            </a:r>
+            <a:endParaRPr/>
           </a:p>
         </p:txBody>
       </p:sp>
       <p:sp>
         <p:nvSpPr>
-          <p:cNvPr id="5" name="Espace réservé de la date 4">
-            <a:extLst>
-              <a:ext uri="{FF2B5EF4-FFF2-40B4-BE49-F238E27FC236}">
-                <a16:creationId xmlns:a16="http://schemas.microsoft.com/office/drawing/2014/main" id="{20960547-AE67-1944-8276-72B35A3C9D36}"/>
-              </a:ext>
-            </a:extLst>
-          </p:cNvPr>
+          <p:cNvPr id="1242578055" name="Espace réservé de la date 4"/>
           <p:cNvSpPr>
             <a:spLocks noGrp="1"/>
           </p:cNvSpPr>
@@ -3421,13 +3532,16 @@
             <p:ph type="dt" sz="half" idx="10"/>
           </p:nvPr>
         </p:nvSpPr>
-        <p:spPr/>
+        <p:spPr bwMode="auto"/>
         <p:txBody>
           <a:bodyPr/>
           <a:lstStyle/>
           <a:p>
+            <a:pPr>
+              <a:defRPr/>
+            </a:pPr>
             <a:fld id="{F585D4FA-9869-8449-9681-FA4BEB67A84F}" type="datetimeFigureOut">
-              <a:rPr lang="fr-FR" smtClean="0"/>
+              <a:rPr lang="fr-FR"/>
               <a:t>15/05/2026</a:t>
             </a:fld>
             <a:endParaRPr lang="fr-FR"/>
@@ -3436,13 +3550,7 @@
       </p:sp>
       <p:sp>
         <p:nvSpPr>
-          <p:cNvPr id="6" name="Espace réservé du pied de page 5">
-            <a:extLst>
-              <a:ext uri="{FF2B5EF4-FFF2-40B4-BE49-F238E27FC236}">
-                <a16:creationId xmlns:a16="http://schemas.microsoft.com/office/drawing/2014/main" id="{9D7765DE-6AFE-304C-89B9-F15B92FF1FFE}"/>
-              </a:ext>
-            </a:extLst>
-          </p:cNvPr>
+          <p:cNvPr id="619675107" name="Espace réservé du pied de page 5"/>
           <p:cNvSpPr>
             <a:spLocks noGrp="1"/>
           </p:cNvSpPr>
@@ -3450,24 +3558,21 @@
             <p:ph type="ftr" sz="quarter" idx="11"/>
           </p:nvPr>
         </p:nvSpPr>
-        <p:spPr/>
+        <p:spPr bwMode="auto"/>
         <p:txBody>
           <a:bodyPr/>
           <a:lstStyle/>
           <a:p>
+            <a:pPr>
+              <a:defRPr/>
+            </a:pPr>
             <a:endParaRPr lang="fr-FR"/>
           </a:p>
         </p:txBody>
       </p:sp>
       <p:sp>
         <p:nvSpPr>
-          <p:cNvPr id="7" name="Espace réservé du numéro de diapositive 6">
-            <a:extLst>
-              <a:ext uri="{FF2B5EF4-FFF2-40B4-BE49-F238E27FC236}">
-                <a16:creationId xmlns:a16="http://schemas.microsoft.com/office/drawing/2014/main" id="{949E7C1A-91CC-5344-974E-55473E806244}"/>
-              </a:ext>
-            </a:extLst>
-          </p:cNvPr>
+          <p:cNvPr id="643829049" name="Espace réservé du numéro de diapositive 6"/>
           <p:cNvSpPr>
             <a:spLocks noGrp="1"/>
           </p:cNvSpPr>
@@ -3475,13 +3580,16 @@
             <p:ph type="sldNum" sz="quarter" idx="12"/>
           </p:nvPr>
         </p:nvSpPr>
-        <p:spPr/>
+        <p:spPr bwMode="auto"/>
         <p:txBody>
           <a:bodyPr/>
           <a:lstStyle/>
           <a:p>
+            <a:pPr>
+              <a:defRPr/>
+            </a:pPr>
             <a:fld id="{A53C86B5-489E-E049-BD62-B07127F1532D}" type="slidenum">
-              <a:rPr lang="fr-FR" smtClean="0"/>
+              <a:rPr lang="fr-FR"/>
               <a:t>‹#›</a:t>
             </a:fld>
             <a:endParaRPr lang="fr-FR"/>
@@ -3489,11 +3597,6 @@
         </p:txBody>
       </p:sp>
     </p:spTree>
-    <p:extLst>
-      <p:ext uri="{BB962C8B-B14F-4D97-AF65-F5344CB8AC3E}">
-        <p14:creationId xmlns:p14="http://schemas.microsoft.com/office/powerpoint/2010/main" val="2803669556"/>
-      </p:ext>
-    </p:extLst>
   </p:cSld>
   <p:clrMapOvr>
     <a:masterClrMapping/>
@@ -3502,8 +3605,8 @@
 </file>
 
 <file path=ppt/slideMasters/slideMaster1.xml><?xml version="1.0" encoding="utf-8"?>
-<p:sldMaster xmlns:a="http://schemas.openxmlformats.org/drawingml/2006/main" xmlns:r="http://schemas.openxmlformats.org/officeDocument/2006/relationships" xmlns:p="http://schemas.openxmlformats.org/presentationml/2006/main">
-  <p:cSld>
+<p:sldMaster xmlns:a="http://schemas.openxmlformats.org/drawingml/2006/main" xmlns:r="http://schemas.openxmlformats.org/officeDocument/2006/relationships" xmlns:p="http://schemas.openxmlformats.org/presentationml/2006/main" xmlns:m="http://schemas.openxmlformats.org/officeDocument/2006/math" xmlns:w="http://schemas.openxmlformats.org/wordprocessingml/2006/main" preserve="0">
+  <p:cSld name="">
     <p:bg>
       <p:bgRef idx="1001">
         <a:schemeClr val="bg1"/>
@@ -3515,7 +3618,7 @@
         <p:cNvGrpSpPr/>
         <p:nvPr/>
       </p:nvGrpSpPr>
-      <p:grpSpPr>
+      <p:grpSpPr bwMode="auto">
         <a:xfrm>
           <a:off x="0" y="0"/>
           <a:ext cx="0" cy="0"/>
@@ -3525,13 +3628,7 @@
       </p:grpSpPr>
       <p:sp>
         <p:nvSpPr>
-          <p:cNvPr id="2" name="Espace réservé du titre 1">
-            <a:extLst>
-              <a:ext uri="{FF2B5EF4-FFF2-40B4-BE49-F238E27FC236}">
-                <a16:creationId xmlns:a16="http://schemas.microsoft.com/office/drawing/2014/main" id="{972D2EA3-4778-9B4F-BF4A-64869ADA4665}"/>
-              </a:ext>
-            </a:extLst>
-          </p:cNvPr>
+          <p:cNvPr id="261043223" name="Espace réservé du titre 1"/>
           <p:cNvSpPr>
             <a:spLocks noGrp="1"/>
           </p:cNvSpPr>
@@ -3539,7 +3636,7 @@
             <p:ph type="title"/>
           </p:nvPr>
         </p:nvSpPr>
-        <p:spPr>
+        <p:spPr bwMode="auto">
           <a:xfrm>
             <a:off x="838200" y="365125"/>
             <a:ext cx="10515600" cy="1325563"/>
@@ -3554,22 +3651,20 @@
           </a:bodyPr>
           <a:lstStyle/>
           <a:p>
+            <a:pPr>
+              <a:defRPr/>
+            </a:pPr>
             <a:r>
               <a:rPr lang="fr-FR"/>
               <a:t>Modifiez le style du titre</a:t>
             </a:r>
+            <a:endParaRPr/>
           </a:p>
         </p:txBody>
       </p:sp>
       <p:sp>
         <p:nvSpPr>
-          <p:cNvPr id="3" name="Espace réservé du texte 2">
-            <a:extLst>
-              <a:ext uri="{FF2B5EF4-FFF2-40B4-BE49-F238E27FC236}">
-                <a16:creationId xmlns:a16="http://schemas.microsoft.com/office/drawing/2014/main" id="{430A9850-9DB0-944D-A769-40744A558AF7}"/>
-              </a:ext>
-            </a:extLst>
-          </p:cNvPr>
+          <p:cNvPr id="789316647" name="Espace réservé du texte 2"/>
           <p:cNvSpPr>
             <a:spLocks noGrp="1"/>
           </p:cNvSpPr>
@@ -3577,7 +3672,7 @@
             <p:ph type="body" idx="1"/>
           </p:nvPr>
         </p:nvSpPr>
-        <p:spPr>
+        <p:spPr bwMode="auto">
           <a:xfrm>
             <a:off x="838200" y="1825625"/>
             <a:ext cx="10515600" cy="4351338"/>
@@ -3592,26 +3687,48 @@
           </a:bodyPr>
           <a:lstStyle/>
           <a:p>
+            <a:pPr>
+              <a:defRPr/>
+            </a:pPr>
             <a:r>
               <a:rPr lang="fr-FR"/>
-              <a:t>Modifier les styles du texte du masque
-Deuxième niveau
-Troisième niveau
-Quatrième niveau
-Cinquième niveau</a:t>
+              <a:t>Modifier les styles du texte du masque</a:t>
             </a:r>
+            <a:br>
+              <a:rPr lang="fr-FR"/>
+            </a:br>
+            <a:r>
+              <a:rPr lang="fr-FR"/>
+              <a:t>Deuxième niveau</a:t>
+            </a:r>
+            <a:br>
+              <a:rPr lang="fr-FR"/>
+            </a:br>
+            <a:r>
+              <a:rPr lang="fr-FR"/>
+              <a:t>Troisième niveau</a:t>
+            </a:r>
+            <a:br>
+              <a:rPr lang="fr-FR"/>
+            </a:br>
+            <a:r>
+              <a:rPr lang="fr-FR"/>
+              <a:t>Quatrième niveau</a:t>
+            </a:r>
+            <a:br>
+              <a:rPr lang="fr-FR"/>
+            </a:br>
+            <a:r>
+              <a:rPr lang="fr-FR"/>
+              <a:t>Cinquième niveau</a:t>
+            </a:r>
+            <a:endParaRPr/>
           </a:p>
         </p:txBody>
       </p:sp>
       <p:sp>
         <p:nvSpPr>
-          <p:cNvPr id="4" name="Espace réservé de la date 3">
-            <a:extLst>
-              <a:ext uri="{FF2B5EF4-FFF2-40B4-BE49-F238E27FC236}">
-                <a16:creationId xmlns:a16="http://schemas.microsoft.com/office/drawing/2014/main" id="{265D1239-3474-C240-A1A3-7F24D098E868}"/>
-              </a:ext>
-            </a:extLst>
-          </p:cNvPr>
+          <p:cNvPr id="1806441996" name="Espace réservé de la date 3"/>
           <p:cNvSpPr>
             <a:spLocks noGrp="1"/>
           </p:cNvSpPr>
@@ -3619,7 +3736,7 @@
             <p:ph type="dt" sz="half" idx="2"/>
           </p:nvPr>
         </p:nvSpPr>
-        <p:spPr>
+        <p:spPr bwMode="auto">
           <a:xfrm>
             <a:off x="838200" y="6356350"/>
             <a:ext cx="2743200" cy="365125"/>
@@ -3642,8 +3759,11 @@
             </a:lvl1pPr>
           </a:lstStyle>
           <a:p>
+            <a:pPr>
+              <a:defRPr/>
+            </a:pPr>
             <a:fld id="{F585D4FA-9869-8449-9681-FA4BEB67A84F}" type="datetimeFigureOut">
-              <a:rPr lang="fr-FR" smtClean="0"/>
+              <a:rPr lang="fr-FR"/>
               <a:t>15/05/2026</a:t>
             </a:fld>
             <a:endParaRPr lang="fr-FR"/>
@@ -3652,13 +3772,7 @@
       </p:sp>
       <p:sp>
         <p:nvSpPr>
-          <p:cNvPr id="5" name="Espace réservé du pied de page 4">
-            <a:extLst>
-              <a:ext uri="{FF2B5EF4-FFF2-40B4-BE49-F238E27FC236}">
-                <a16:creationId xmlns:a16="http://schemas.microsoft.com/office/drawing/2014/main" id="{41F1C500-CA3F-9349-9F8B-928A30C22E85}"/>
-              </a:ext>
-            </a:extLst>
-          </p:cNvPr>
+          <p:cNvPr id="449697740" name="Espace réservé du pied de page 4"/>
           <p:cNvSpPr>
             <a:spLocks noGrp="1"/>
           </p:cNvSpPr>
@@ -3666,7 +3780,7 @@
             <p:ph type="ftr" sz="quarter" idx="3"/>
           </p:nvPr>
         </p:nvSpPr>
-        <p:spPr>
+        <p:spPr bwMode="auto">
           <a:xfrm>
             <a:off x="4038600" y="6356350"/>
             <a:ext cx="4114800" cy="365125"/>
@@ -3689,19 +3803,16 @@
             </a:lvl1pPr>
           </a:lstStyle>
           <a:p>
+            <a:pPr>
+              <a:defRPr/>
+            </a:pPr>
             <a:endParaRPr lang="fr-FR"/>
           </a:p>
         </p:txBody>
       </p:sp>
       <p:sp>
         <p:nvSpPr>
-          <p:cNvPr id="6" name="Espace réservé du numéro de diapositive 5">
-            <a:extLst>
-              <a:ext uri="{FF2B5EF4-FFF2-40B4-BE49-F238E27FC236}">
-                <a16:creationId xmlns:a16="http://schemas.microsoft.com/office/drawing/2014/main" id="{139415CB-1BC6-2443-9FCA-44EB7E8CAF47}"/>
-              </a:ext>
-            </a:extLst>
-          </p:cNvPr>
+          <p:cNvPr id="1980887104" name="Espace réservé du numéro de diapositive 5"/>
           <p:cNvSpPr>
             <a:spLocks noGrp="1"/>
           </p:cNvSpPr>
@@ -3709,7 +3820,7 @@
             <p:ph type="sldNum" sz="quarter" idx="4"/>
           </p:nvPr>
         </p:nvSpPr>
-        <p:spPr>
+        <p:spPr bwMode="auto">
           <a:xfrm>
             <a:off x="8610600" y="6356350"/>
             <a:ext cx="2743200" cy="365125"/>
@@ -3732,8 +3843,11 @@
             </a:lvl1pPr>
           </a:lstStyle>
           <a:p>
+            <a:pPr>
+              <a:defRPr/>
+            </a:pPr>
             <a:fld id="{A53C86B5-489E-E049-BD62-B07127F1532D}" type="slidenum">
-              <a:rPr lang="fr-FR" smtClean="0"/>
+              <a:rPr lang="fr-FR"/>
               <a:t>‹#›</a:t>
             </a:fld>
             <a:endParaRPr lang="fr-FR"/>
@@ -3741,11 +3855,6 @@
         </p:txBody>
       </p:sp>
     </p:spTree>
-    <p:extLst>
-      <p:ext uri="{BB962C8B-B14F-4D97-AF65-F5344CB8AC3E}">
-        <p14:creationId xmlns:p14="http://schemas.microsoft.com/office/powerpoint/2010/main" val="1732118705"/>
-      </p:ext>
-    </p:extLst>
   </p:cSld>
   <p:clrMap bg1="lt1" tx1="dk1" bg2="lt2" tx2="dk2" accent1="accent1" accent2="accent2" accent3="accent3" accent4="accent4" accent5="accent5" accent6="accent6" hlink="hlink" folHlink="folHlink"/>
   <p:sldLayoutIdLst>
@@ -3765,15 +3874,15 @@
   </p:sldLayoutIdLst>
   <p:txStyles>
     <p:titleStyle>
-      <a:lvl1pPr algn="l" defTabSz="914400" rtl="0" eaLnBrk="1" latinLnBrk="0" hangingPunct="1">
+      <a:lvl1pPr algn="l" defTabSz="914400" rtl="0">
         <a:lnSpc>
           <a:spcPct val="90000"/>
         </a:lnSpc>
         <a:spcBef>
-          <a:spcPct val="0"/>
+          <a:spcPts val="0"/>
         </a:spcBef>
         <a:buNone/>
-        <a:defRPr sz="4400" kern="1200">
+        <a:defRPr sz="4400">
           <a:solidFill>
             <a:schemeClr val="tx1"/>
           </a:solidFill>
@@ -3784,16 +3893,16 @@
       </a:lvl1pPr>
     </p:titleStyle>
     <p:bodyStyle>
-      <a:lvl1pPr marL="228600" indent="-228600" algn="l" defTabSz="914400" rtl="0" eaLnBrk="1" latinLnBrk="0" hangingPunct="1">
+      <a:lvl1pPr marL="228600" indent="-228600" algn="l" defTabSz="914400" rtl="0">
         <a:lnSpc>
           <a:spcPct val="90000"/>
         </a:lnSpc>
         <a:spcBef>
           <a:spcPts val="1000"/>
         </a:spcBef>
-        <a:buFont typeface="Arial" panose="020B0604020202020204" pitchFamily="34" charset="0"/>
+        <a:buFont typeface="Arial"/>
         <a:buChar char="•"/>
-        <a:defRPr sz="2800" kern="1200">
+        <a:defRPr sz="2800">
           <a:solidFill>
             <a:schemeClr val="tx1"/>
           </a:solidFill>
@@ -3802,16 +3911,16 @@
           <a:cs typeface="+mn-cs"/>
         </a:defRPr>
       </a:lvl1pPr>
-      <a:lvl2pPr marL="685800" indent="-228600" algn="l" defTabSz="914400" rtl="0" eaLnBrk="1" latinLnBrk="0" hangingPunct="1">
+      <a:lvl2pPr marL="685800" indent="-228600" algn="l" defTabSz="914400" rtl="0">
         <a:lnSpc>
           <a:spcPct val="90000"/>
         </a:lnSpc>
         <a:spcBef>
           <a:spcPts val="500"/>
         </a:spcBef>
-        <a:buFont typeface="Arial" panose="020B0604020202020204" pitchFamily="34" charset="0"/>
+        <a:buFont typeface="Arial"/>
         <a:buChar char="•"/>
-        <a:defRPr sz="2400" kern="1200">
+        <a:defRPr sz="2400">
           <a:solidFill>
             <a:schemeClr val="tx1"/>
           </a:solidFill>
@@ -3820,16 +3929,16 @@
           <a:cs typeface="+mn-cs"/>
         </a:defRPr>
       </a:lvl2pPr>
-      <a:lvl3pPr marL="1143000" indent="-228600" algn="l" defTabSz="914400" rtl="0" eaLnBrk="1" latinLnBrk="0" hangingPunct="1">
+      <a:lvl3pPr marL="1143000" indent="-228600" algn="l" defTabSz="914400" rtl="0">
         <a:lnSpc>
           <a:spcPct val="90000"/>
         </a:lnSpc>
         <a:spcBef>
           <a:spcPts val="500"/>
         </a:spcBef>
-        <a:buFont typeface="Arial" panose="020B0604020202020204" pitchFamily="34" charset="0"/>
+        <a:buFont typeface="Arial"/>
         <a:buChar char="•"/>
-        <a:defRPr sz="2000" kern="1200">
+        <a:defRPr sz="2000">
           <a:solidFill>
             <a:schemeClr val="tx1"/>
           </a:solidFill>
@@ -3838,16 +3947,16 @@
           <a:cs typeface="+mn-cs"/>
         </a:defRPr>
       </a:lvl3pPr>
-      <a:lvl4pPr marL="1600200" indent="-228600" algn="l" defTabSz="914400" rtl="0" eaLnBrk="1" latinLnBrk="0" hangingPunct="1">
+      <a:lvl4pPr marL="1600200" indent="-228600" algn="l" defTabSz="914400" rtl="0">
         <a:lnSpc>
           <a:spcPct val="90000"/>
         </a:lnSpc>
         <a:spcBef>
           <a:spcPts val="500"/>
         </a:spcBef>
-        <a:buFont typeface="Arial" panose="020B0604020202020204" pitchFamily="34" charset="0"/>
+        <a:buFont typeface="Arial"/>
         <a:buChar char="•"/>
-        <a:defRPr sz="1800" kern="1200">
+        <a:defRPr sz="1800">
           <a:solidFill>
             <a:schemeClr val="tx1"/>
           </a:solidFill>
@@ -3856,16 +3965,16 @@
           <a:cs typeface="+mn-cs"/>
         </a:defRPr>
       </a:lvl4pPr>
-      <a:lvl5pPr marL="2057400" indent="-228600" algn="l" defTabSz="914400" rtl="0" eaLnBrk="1" latinLnBrk="0" hangingPunct="1">
+      <a:lvl5pPr marL="2057400" indent="-228600" algn="l" defTabSz="914400" rtl="0">
         <a:lnSpc>
           <a:spcPct val="90000"/>
         </a:lnSpc>
         <a:spcBef>
           <a:spcPts val="500"/>
         </a:spcBef>
-        <a:buFont typeface="Arial" panose="020B0604020202020204" pitchFamily="34" charset="0"/>
+        <a:buFont typeface="Arial"/>
         <a:buChar char="•"/>
-        <a:defRPr sz="1800" kern="1200">
+        <a:defRPr sz="1800">
           <a:solidFill>
             <a:schemeClr val="tx1"/>
           </a:solidFill>
@@ -3874,16 +3983,16 @@
           <a:cs typeface="+mn-cs"/>
         </a:defRPr>
       </a:lvl5pPr>
-      <a:lvl6pPr marL="2514600" indent="-228600" algn="l" defTabSz="914400" rtl="0" eaLnBrk="1" latinLnBrk="0" hangingPunct="1">
+      <a:lvl6pPr marL="2514600" indent="-228600" algn="l" defTabSz="914400" rtl="0">
         <a:lnSpc>
           <a:spcPct val="90000"/>
         </a:lnSpc>
         <a:spcBef>
           <a:spcPts val="500"/>
         </a:spcBef>
-        <a:buFont typeface="Arial" panose="020B0604020202020204" pitchFamily="34" charset="0"/>
+        <a:buFont typeface="Arial"/>
         <a:buChar char="•"/>
-        <a:defRPr sz="1800" kern="1200">
+        <a:defRPr sz="1800">
           <a:solidFill>
             <a:schemeClr val="tx1"/>
           </a:solidFill>
@@ -3892,16 +4001,16 @@
           <a:cs typeface="+mn-cs"/>
         </a:defRPr>
       </a:lvl6pPr>
-      <a:lvl7pPr marL="2971800" indent="-228600" algn="l" defTabSz="914400" rtl="0" eaLnBrk="1" latinLnBrk="0" hangingPunct="1">
+      <a:lvl7pPr marL="2971800" indent="-228600" algn="l" defTabSz="914400" rtl="0">
         <a:lnSpc>
           <a:spcPct val="90000"/>
         </a:lnSpc>
         <a:spcBef>
           <a:spcPts val="500"/>
         </a:spcBef>
-        <a:buFont typeface="Arial" panose="020B0604020202020204" pitchFamily="34" charset="0"/>
+        <a:buFont typeface="Arial"/>
         <a:buChar char="•"/>
-        <a:defRPr sz="1800" kern="1200">
+        <a:defRPr sz="1800">
           <a:solidFill>
             <a:schemeClr val="tx1"/>
           </a:solidFill>
@@ -3910,16 +4019,16 @@
           <a:cs typeface="+mn-cs"/>
         </a:defRPr>
       </a:lvl7pPr>
-      <a:lvl8pPr marL="3429000" indent="-228600" algn="l" defTabSz="914400" rtl="0" eaLnBrk="1" latinLnBrk="0" hangingPunct="1">
+      <a:lvl8pPr marL="3429000" indent="-228600" algn="l" defTabSz="914400" rtl="0">
         <a:lnSpc>
           <a:spcPct val="90000"/>
         </a:lnSpc>
         <a:spcBef>
           <a:spcPts val="500"/>
         </a:spcBef>
-        <a:buFont typeface="Arial" panose="020B0604020202020204" pitchFamily="34" charset="0"/>
+        <a:buFont typeface="Arial"/>
         <a:buChar char="•"/>
-        <a:defRPr sz="1800" kern="1200">
+        <a:defRPr sz="1800">
           <a:solidFill>
             <a:schemeClr val="tx1"/>
           </a:solidFill>
@@ -3928,16 +4037,16 @@
           <a:cs typeface="+mn-cs"/>
         </a:defRPr>
       </a:lvl8pPr>
-      <a:lvl9pPr marL="3886200" indent="-228600" algn="l" defTabSz="914400" rtl="0" eaLnBrk="1" latinLnBrk="0" hangingPunct="1">
+      <a:lvl9pPr marL="3886200" indent="-228600" algn="l" defTabSz="914400" rtl="0">
         <a:lnSpc>
           <a:spcPct val="90000"/>
         </a:lnSpc>
         <a:spcBef>
           <a:spcPts val="500"/>
         </a:spcBef>
-        <a:buFont typeface="Arial" panose="020B0604020202020204" pitchFamily="34" charset="0"/>
+        <a:buFont typeface="Arial"/>
         <a:buChar char="•"/>
-        <a:defRPr sz="1800" kern="1200">
+        <a:defRPr sz="1800">
           <a:solidFill>
             <a:schemeClr val="tx1"/>
           </a:solidFill>
@@ -3951,8 +4060,8 @@
       <a:defPPr>
         <a:defRPr lang="fr-FR"/>
       </a:defPPr>
-      <a:lvl1pPr marL="0" algn="l" defTabSz="914400" rtl="0" eaLnBrk="1" latinLnBrk="0" hangingPunct="1">
-        <a:defRPr sz="1800" kern="1200">
+      <a:lvl1pPr marL="0" algn="l" defTabSz="914400" rtl="0">
+        <a:defRPr sz="1800">
           <a:solidFill>
             <a:schemeClr val="tx1"/>
           </a:solidFill>
@@ -3961,8 +4070,8 @@
           <a:cs typeface="+mn-cs"/>
         </a:defRPr>
       </a:lvl1pPr>
-      <a:lvl2pPr marL="457200" algn="l" defTabSz="914400" rtl="0" eaLnBrk="1" latinLnBrk="0" hangingPunct="1">
-        <a:defRPr sz="1800" kern="1200">
+      <a:lvl2pPr marL="457200" algn="l" defTabSz="914400" rtl="0">
+        <a:defRPr sz="1800">
           <a:solidFill>
             <a:schemeClr val="tx1"/>
           </a:solidFill>
@@ -3971,8 +4080,8 @@
           <a:cs typeface="+mn-cs"/>
         </a:defRPr>
       </a:lvl2pPr>
-      <a:lvl3pPr marL="914400" algn="l" defTabSz="914400" rtl="0" eaLnBrk="1" latinLnBrk="0" hangingPunct="1">
-        <a:defRPr sz="1800" kern="1200">
+      <a:lvl3pPr marL="914400" algn="l" defTabSz="914400" rtl="0">
+        <a:defRPr sz="1800">
           <a:solidFill>
             <a:schemeClr val="tx1"/>
           </a:solidFill>
@@ -3981,8 +4090,8 @@
           <a:cs typeface="+mn-cs"/>
         </a:defRPr>
       </a:lvl3pPr>
-      <a:lvl4pPr marL="1371600" algn="l" defTabSz="914400" rtl="0" eaLnBrk="1" latinLnBrk="0" hangingPunct="1">
-        <a:defRPr sz="1800" kern="1200">
+      <a:lvl4pPr marL="1371600" algn="l" defTabSz="914400" rtl="0">
+        <a:defRPr sz="1800">
           <a:solidFill>
             <a:schemeClr val="tx1"/>
           </a:solidFill>
@@ -3991,8 +4100,8 @@
           <a:cs typeface="+mn-cs"/>
         </a:defRPr>
       </a:lvl4pPr>
-      <a:lvl5pPr marL="1828800" algn="l" defTabSz="914400" rtl="0" eaLnBrk="1" latinLnBrk="0" hangingPunct="1">
-        <a:defRPr sz="1800" kern="1200">
+      <a:lvl5pPr marL="1828800" algn="l" defTabSz="914400" rtl="0">
+        <a:defRPr sz="1800">
           <a:solidFill>
             <a:schemeClr val="tx1"/>
           </a:solidFill>
@@ -4001,8 +4110,8 @@
           <a:cs typeface="+mn-cs"/>
         </a:defRPr>
       </a:lvl5pPr>
-      <a:lvl6pPr marL="2286000" algn="l" defTabSz="914400" rtl="0" eaLnBrk="1" latinLnBrk="0" hangingPunct="1">
-        <a:defRPr sz="1800" kern="1200">
+      <a:lvl6pPr marL="2286000" algn="l" defTabSz="914400" rtl="0">
+        <a:defRPr sz="1800">
           <a:solidFill>
             <a:schemeClr val="tx1"/>
           </a:solidFill>
@@ -4011,8 +4120,8 @@
           <a:cs typeface="+mn-cs"/>
         </a:defRPr>
       </a:lvl6pPr>
-      <a:lvl7pPr marL="2743200" algn="l" defTabSz="914400" rtl="0" eaLnBrk="1" latinLnBrk="0" hangingPunct="1">
-        <a:defRPr sz="1800" kern="1200">
+      <a:lvl7pPr marL="2743200" algn="l" defTabSz="914400" rtl="0">
+        <a:defRPr sz="1800">
           <a:solidFill>
             <a:schemeClr val="tx1"/>
           </a:solidFill>
@@ -4021,8 +4130,8 @@
           <a:cs typeface="+mn-cs"/>
         </a:defRPr>
       </a:lvl7pPr>
-      <a:lvl8pPr marL="3200400" algn="l" defTabSz="914400" rtl="0" eaLnBrk="1" latinLnBrk="0" hangingPunct="1">
-        <a:defRPr sz="1800" kern="1200">
+      <a:lvl8pPr marL="3200400" algn="l" defTabSz="914400" rtl="0">
+        <a:defRPr sz="1800">
           <a:solidFill>
             <a:schemeClr val="tx1"/>
           </a:solidFill>
@@ -4031,8 +4140,8 @@
           <a:cs typeface="+mn-cs"/>
         </a:defRPr>
       </a:lvl8pPr>
-      <a:lvl9pPr marL="3657600" algn="l" defTabSz="914400" rtl="0" eaLnBrk="1" latinLnBrk="0" hangingPunct="1">
-        <a:defRPr sz="1800" kern="1200">
+      <a:lvl9pPr marL="3657600" algn="l" defTabSz="914400" rtl="0">
+        <a:defRPr sz="1800">
           <a:solidFill>
             <a:schemeClr val="tx1"/>
           </a:solidFill>
@@ -4047,15 +4156,15 @@
 </file>
 
 <file path=ppt/slides/slide1.xml><?xml version="1.0" encoding="utf-8"?>
-<p:sld xmlns:a="http://schemas.openxmlformats.org/drawingml/2006/main" xmlns:r="http://schemas.openxmlformats.org/officeDocument/2006/relationships" xmlns:p="http://schemas.openxmlformats.org/presentationml/2006/main">
-  <p:cSld>
+<p:sld xmlns:a="http://schemas.openxmlformats.org/drawingml/2006/main" xmlns:r="http://schemas.openxmlformats.org/officeDocument/2006/relationships" xmlns:p="http://schemas.openxmlformats.org/presentationml/2006/main" xmlns:m="http://schemas.openxmlformats.org/officeDocument/2006/math" xmlns:w="http://schemas.openxmlformats.org/wordprocessingml/2006/main" xmlns:mc="http://schemas.openxmlformats.org/markup-compatibility/2006" showMasterPhAnim="0" showMasterSp="1" show="1">
+  <p:cSld name="">
     <p:spTree>
       <p:nvGrpSpPr>
         <p:cNvPr id="1" name=""/>
         <p:cNvGrpSpPr/>
         <p:nvPr/>
       </p:nvGrpSpPr>
-      <p:grpSpPr>
+      <p:grpSpPr bwMode="auto">
         <a:xfrm>
           <a:off x="0" y="0"/>
           <a:ext cx="0" cy="0"/>
@@ -4065,25 +4174,23 @@
       </p:grpSpPr>
       <p:pic>
         <p:nvPicPr>
-          <p:cNvPr id="81" name="Picture 80">
-            <a:extLst>
-              <a:ext uri="{FF2B5EF4-FFF2-40B4-BE49-F238E27FC236}">
-                <a16:creationId xmlns:a16="http://schemas.microsoft.com/office/drawing/2014/main" id="{93B70A73-7348-7641-6BAC-C8F64A08F135}"/>
-              </a:ext>
-            </a:extLst>
-          </p:cNvPr>
+          <p:cNvPr id="2044297490" name="Picture 80"/>
           <p:cNvPicPr>
             <a:picLocks noChangeAspect="1"/>
           </p:cNvPicPr>
           <p:nvPr/>
         </p:nvPicPr>
-        <p:blipFill>
-          <a:blip r:embed="rId3"/>
-          <a:stretch>
-            <a:fillRect/>
-          </a:stretch>
+        <p:blipFill rotWithShape="1">
+          <a:blip r:embed="rId3">
+            <a:extLst>
+              <a:ext uri="{96DAC541-7B7A-43D3-8B79-37D633B846F1}">
+                <asvg:svgBlip xmlns:asvg="http://schemas.microsoft.com/office/drawing/2016/SVG/main" r:embed="rId4"/>
+              </a:ext>
+            </a:extLst>
+          </a:blip>
+          <a:stretch/>
         </p:blipFill>
-        <p:spPr>
+        <p:spPr bwMode="auto">
           <a:xfrm>
             <a:off x="3992815" y="5647773"/>
             <a:ext cx="1144633" cy="931227"/>
@@ -4095,17 +4202,11 @@
       </p:pic>
       <p:grpSp>
         <p:nvGrpSpPr>
-          <p:cNvPr id="82" name="Group 81">
-            <a:extLst>
-              <a:ext uri="{FF2B5EF4-FFF2-40B4-BE49-F238E27FC236}">
-                <a16:creationId xmlns:a16="http://schemas.microsoft.com/office/drawing/2014/main" id="{3B883797-3AF1-8866-9052-265A8C26990F}"/>
-              </a:ext>
-            </a:extLst>
-          </p:cNvPr>
+          <p:cNvPr id="63643848" name="Group 81"/>
           <p:cNvGrpSpPr/>
           <p:nvPr/>
         </p:nvGrpSpPr>
-        <p:grpSpPr>
+        <p:grpSpPr bwMode="auto">
           <a:xfrm>
             <a:off x="10221589" y="6290273"/>
             <a:ext cx="1694896" cy="285485"/>
@@ -4115,23 +4216,19 @@
         </p:grpSpPr>
         <p:sp>
           <p:nvSpPr>
-            <p:cNvPr id="83" name="Triangle 82">
-              <a:extLst>
-                <a:ext uri="{FF2B5EF4-FFF2-40B4-BE49-F238E27FC236}">
-                  <a16:creationId xmlns:a16="http://schemas.microsoft.com/office/drawing/2014/main" id="{2C864691-5657-2234-00C9-5DD030B0EFC6}"/>
-                </a:ext>
-              </a:extLst>
-            </p:cNvPr>
+            <p:cNvPr id="83" name="Triangle 82"/>
             <p:cNvSpPr/>
             <p:nvPr/>
           </p:nvSpPr>
-          <p:spPr>
+          <p:spPr bwMode="auto">
             <a:xfrm rot="5400000">
               <a:off x="7503823" y="574425"/>
               <a:ext cx="460797" cy="397239"/>
             </a:xfrm>
             <a:prstGeom prst="triangle">
-              <a:avLst/>
+              <a:avLst>
+                <a:gd name="adj" fmla="val 50000"/>
+              </a:avLst>
             </a:prstGeom>
             <a:solidFill>
               <a:schemeClr val="tx1">
@@ -4163,30 +4260,28 @@
             <a:bodyPr rtlCol="0" anchor="ctr"/>
             <a:lstStyle/>
             <a:p>
-              <a:pPr algn="ctr"/>
-              <a:endParaRPr lang="en-MA" dirty="0"/>
+              <a:pPr algn="ctr">
+                <a:defRPr/>
+              </a:pPr>
+              <a:endParaRPr/>
             </a:p>
           </p:txBody>
         </p:sp>
         <p:sp>
           <p:nvSpPr>
-            <p:cNvPr id="84" name="Triangle 83">
-              <a:extLst>
-                <a:ext uri="{FF2B5EF4-FFF2-40B4-BE49-F238E27FC236}">
-                  <a16:creationId xmlns:a16="http://schemas.microsoft.com/office/drawing/2014/main" id="{DA5BB854-B52D-C708-8114-D41265E190B8}"/>
-                </a:ext>
-              </a:extLst>
-            </p:cNvPr>
+            <p:cNvPr id="84" name="Triangle 83"/>
             <p:cNvSpPr/>
             <p:nvPr/>
           </p:nvSpPr>
-          <p:spPr>
+          <p:spPr bwMode="auto">
             <a:xfrm rot="5400000">
               <a:off x="7893567" y="574425"/>
               <a:ext cx="460797" cy="397239"/>
             </a:xfrm>
             <a:prstGeom prst="triangle">
-              <a:avLst/>
+              <a:avLst>
+                <a:gd name="adj" fmla="val 50000"/>
+              </a:avLst>
             </a:prstGeom>
             <a:solidFill>
               <a:srgbClr val="FFC000"/>
@@ -4215,30 +4310,28 @@
             <a:bodyPr rtlCol="0" anchor="ctr"/>
             <a:lstStyle/>
             <a:p>
-              <a:pPr algn="ctr"/>
-              <a:endParaRPr lang="en-MA" dirty="0"/>
+              <a:pPr algn="ctr">
+                <a:defRPr/>
+              </a:pPr>
+              <a:endParaRPr/>
             </a:p>
           </p:txBody>
         </p:sp>
         <p:sp>
           <p:nvSpPr>
-            <p:cNvPr id="85" name="Triangle 84">
-              <a:extLst>
-                <a:ext uri="{FF2B5EF4-FFF2-40B4-BE49-F238E27FC236}">
-                  <a16:creationId xmlns:a16="http://schemas.microsoft.com/office/drawing/2014/main" id="{9D212D47-8640-394F-2DD7-7C440B896B0F}"/>
-                </a:ext>
-              </a:extLst>
-            </p:cNvPr>
+            <p:cNvPr id="85" name="Triangle 84"/>
             <p:cNvSpPr/>
             <p:nvPr/>
           </p:nvSpPr>
-          <p:spPr>
+          <p:spPr bwMode="auto">
             <a:xfrm rot="5400000">
               <a:off x="8673056" y="574425"/>
               <a:ext cx="460797" cy="397239"/>
             </a:xfrm>
             <a:prstGeom prst="triangle">
-              <a:avLst/>
+              <a:avLst>
+                <a:gd name="adj" fmla="val 50000"/>
+              </a:avLst>
             </a:prstGeom>
             <a:solidFill>
               <a:srgbClr val="00B050"/>
@@ -4267,30 +4360,28 @@
             <a:bodyPr rtlCol="0" anchor="ctr"/>
             <a:lstStyle/>
             <a:p>
-              <a:pPr algn="ctr"/>
-              <a:endParaRPr lang="en-MA" dirty="0"/>
+              <a:pPr algn="ctr">
+                <a:defRPr/>
+              </a:pPr>
+              <a:endParaRPr/>
             </a:p>
           </p:txBody>
         </p:sp>
         <p:sp>
           <p:nvSpPr>
-            <p:cNvPr id="86" name="Triangle 85">
-              <a:extLst>
-                <a:ext uri="{FF2B5EF4-FFF2-40B4-BE49-F238E27FC236}">
-                  <a16:creationId xmlns:a16="http://schemas.microsoft.com/office/drawing/2014/main" id="{B37A3D93-0656-1C04-D9B5-B8FF4248EB1B}"/>
-                </a:ext>
-              </a:extLst>
-            </p:cNvPr>
+            <p:cNvPr id="86" name="Triangle 85"/>
             <p:cNvSpPr/>
             <p:nvPr/>
           </p:nvSpPr>
-          <p:spPr>
+          <p:spPr bwMode="auto">
             <a:xfrm rot="5400000">
               <a:off x="9842290" y="574425"/>
               <a:ext cx="460797" cy="397239"/>
             </a:xfrm>
             <a:prstGeom prst="triangle">
-              <a:avLst/>
+              <a:avLst>
+                <a:gd name="adj" fmla="val 50000"/>
+              </a:avLst>
             </a:prstGeom>
             <a:solidFill>
               <a:schemeClr val="accent1"/>
@@ -4319,25 +4410,21 @@
             <a:bodyPr rtlCol="0" anchor="ctr"/>
             <a:lstStyle/>
             <a:p>
-              <a:pPr algn="ctr"/>
-              <a:endParaRPr lang="en-MA" dirty="0"/>
+              <a:pPr algn="ctr">
+                <a:defRPr/>
+              </a:pPr>
+              <a:endParaRPr/>
             </a:p>
           </p:txBody>
         </p:sp>
       </p:grpSp>
       <p:sp>
         <p:nvSpPr>
-          <p:cNvPr id="31" name="TextBox 30">
-            <a:extLst>
-              <a:ext uri="{FF2B5EF4-FFF2-40B4-BE49-F238E27FC236}">
-                <a16:creationId xmlns:a16="http://schemas.microsoft.com/office/drawing/2014/main" id="{221E47F3-6A08-99BA-F827-F24BB5F4A464}"/>
-              </a:ext>
-            </a:extLst>
-          </p:cNvPr>
+          <p:cNvPr id="292791481" name="TextBox 30"/>
           <p:cNvSpPr txBox="1"/>
           <p:nvPr/>
         </p:nvSpPr>
-        <p:spPr>
+        <p:spPr bwMode="auto">
           <a:xfrm>
             <a:off x="178490" y="342009"/>
             <a:ext cx="5502887" cy="523220"/>
@@ -4353,66 +4440,60 @@
           </a:bodyPr>
           <a:lstStyle/>
           <a:p>
+            <a:pPr>
+              <a:defRPr/>
+            </a:pPr>
             <a:r>
-              <a:rPr lang="fr-FR" sz="2800" b="1" dirty="0">
+              <a:rPr lang="fr-FR" sz="2800" b="1">
                 <a:solidFill>
                   <a:schemeClr val="accent4"/>
                 </a:solidFill>
                 <a:latin typeface="Arial"/>
                 <a:ea typeface="GulimChe"/>
                 <a:cs typeface="Arial"/>
-                <a:sym typeface="Wingdings" pitchFamily="2" charset="2"/>
               </a:rPr>
               <a:t>{{</a:t>
             </a:r>
             <a:r>
-              <a:rPr lang="fr-FR" sz="2800" b="1" dirty="0" err="1">
+              <a:rPr lang="fr-FR" sz="2800" b="1">
                 <a:solidFill>
                   <a:schemeClr val="accent4"/>
                 </a:solidFill>
                 <a:latin typeface="Arial"/>
                 <a:ea typeface="GulimChe"/>
                 <a:cs typeface="Arial"/>
-                <a:sym typeface="Wingdings" pitchFamily="2" charset="2"/>
               </a:rPr>
               <a:t>title</a:t>
             </a:r>
             <a:r>
-              <a:rPr lang="fr-FR" sz="2800" b="1" dirty="0">
+              <a:rPr lang="fr-FR" sz="2800" b="1">
                 <a:solidFill>
                   <a:schemeClr val="accent4"/>
                 </a:solidFill>
                 <a:latin typeface="Arial"/>
                 <a:ea typeface="GulimChe"/>
                 <a:cs typeface="Arial"/>
-                <a:sym typeface="Wingdings" pitchFamily="2" charset="2"/>
               </a:rPr>
               <a:t>}}</a:t>
             </a:r>
-            <a:endParaRPr lang="fr-FR" sz="2800" b="1" dirty="0">
+            <a:endParaRPr lang="fr-FR" sz="2800" b="1">
               <a:solidFill>
                 <a:schemeClr val="accent4"/>
               </a:solidFill>
-              <a:latin typeface="Arial" panose="020B0604020202020204" pitchFamily="34" charset="0"/>
+              <a:latin typeface="Arial"/>
               <a:ea typeface="GulimChe"/>
-              <a:cs typeface="Arial" panose="020B0604020202020204" pitchFamily="34" charset="0"/>
+              <a:cs typeface="Arial"/>
             </a:endParaRPr>
           </a:p>
         </p:txBody>
       </p:sp>
       <p:sp>
         <p:nvSpPr>
-          <p:cNvPr id="39" name="Rectangle 38">
-            <a:extLst>
-              <a:ext uri="{FF2B5EF4-FFF2-40B4-BE49-F238E27FC236}">
-                <a16:creationId xmlns:a16="http://schemas.microsoft.com/office/drawing/2014/main" id="{310AE8F4-2D3D-3C71-D543-04FB888168EB}"/>
-              </a:ext>
-            </a:extLst>
-          </p:cNvPr>
+          <p:cNvPr id="414795372" name="Rectangle 38"/>
           <p:cNvSpPr/>
           <p:nvPr/>
         </p:nvSpPr>
-        <p:spPr>
+        <p:spPr bwMode="auto">
           <a:xfrm>
             <a:off x="282000" y="1296116"/>
             <a:ext cx="1031358" cy="359640"/>
@@ -4447,24 +4528,20 @@
           <a:bodyPr rtlCol="0" anchor="ctr"/>
           <a:lstStyle/>
           <a:p>
-            <a:pPr algn="ctr"/>
-            <a:endParaRPr lang="en-MA"/>
+            <a:pPr algn="ctr">
+              <a:defRPr/>
+            </a:pPr>
+            <a:endParaRPr/>
           </a:p>
         </p:txBody>
       </p:sp>
       <p:cxnSp>
         <p:nvCxnSpPr>
-          <p:cNvPr id="40" name="Straight Connector 39">
-            <a:extLst>
-              <a:ext uri="{FF2B5EF4-FFF2-40B4-BE49-F238E27FC236}">
-                <a16:creationId xmlns:a16="http://schemas.microsoft.com/office/drawing/2014/main" id="{0D45AA43-9349-681D-775E-E078B273CAE5}"/>
-              </a:ext>
-            </a:extLst>
-          </p:cNvPr>
+          <p:cNvPr id="206553175" name="Straight Connector 39"/>
           <p:cNvCxnSpPr/>
           <p:nvPr/>
         </p:nvCxnSpPr>
-        <p:spPr>
+        <p:spPr bwMode="auto">
           <a:xfrm>
             <a:off x="282000" y="295842"/>
             <a:ext cx="3785190" cy="0"/>
@@ -4490,27 +4567,25 @@
       </p:cxnSp>
       <p:pic>
         <p:nvPicPr>
-          <p:cNvPr id="13" name="Picture 12">
-            <a:extLst>
-              <a:ext uri="{FF2B5EF4-FFF2-40B4-BE49-F238E27FC236}">
-                <a16:creationId xmlns:a16="http://schemas.microsoft.com/office/drawing/2014/main" id="{616737AF-946C-EE1D-2ACB-EBBC31E1EED4}"/>
-              </a:ext>
-            </a:extLst>
-          </p:cNvPr>
+          <p:cNvPr id="225397823" name="Picture 12"/>
           <p:cNvPicPr>
             <a:picLocks noChangeAspect="1"/>
           </p:cNvPicPr>
           <p:nvPr/>
         </p:nvPicPr>
-        <p:blipFill>
-          <a:blip r:embed="rId4"/>
-          <a:stretch>
-            <a:fillRect/>
-          </a:stretch>
+        <p:blipFill rotWithShape="1">
+          <a:blip r:embed="rId5">
+            <a:extLst>
+              <a:ext uri="{96DAC541-7B7A-43D3-8B79-37D633B846F1}">
+                <asvg:svgBlip xmlns:asvg="http://schemas.microsoft.com/office/drawing/2016/SVG/main" r:embed="rId6"/>
+              </a:ext>
+            </a:extLst>
+          </a:blip>
+          <a:stretch/>
         </p:blipFill>
-        <p:spPr>
+        <p:spPr bwMode="auto">
           <a:xfrm>
-            <a:off x="5743814" y="129990"/>
+            <a:off x="5743813" y="129990"/>
             <a:ext cx="1024464" cy="1682564"/>
           </a:xfrm>
           <a:prstGeom prst="rect">
@@ -4520,20 +4595,11 @@
       </p:pic>
       <p:grpSp>
         <p:nvGrpSpPr>
-          <p:cNvPr id="2" name="组合 40">
-            <a:extLst>
-              <a:ext uri="{FF2B5EF4-FFF2-40B4-BE49-F238E27FC236}">
-                <a16:creationId xmlns:a16="http://schemas.microsoft.com/office/drawing/2014/main" id="{A51F1B91-F33B-E81D-BAF1-3CB26ECDE37F}"/>
-              </a:ext>
-              <a:ext uri="{C183D7F6-B498-43B3-948B-1728B52AA6E4}">
-                <adec:decorative xmlns:adec="http://schemas.microsoft.com/office/drawing/2017/decorative" val="0"/>
-              </a:ext>
-            </a:extLst>
-          </p:cNvPr>
+          <p:cNvPr id="655707873" name="组合 40"/>
           <p:cNvGrpSpPr/>
           <p:nvPr/>
         </p:nvGrpSpPr>
-        <p:grpSpPr>
+        <p:grpSpPr bwMode="auto">
           <a:xfrm>
             <a:off x="6009378" y="342009"/>
             <a:ext cx="5900622" cy="6156767"/>
@@ -4546,16 +4612,8 @@
         </p:grpSpPr>
         <p:sp>
           <p:nvSpPr>
-            <p:cNvPr id="3" name="Freeform 5">
-              <a:extLst>
-                <a:ext uri="{FF2B5EF4-FFF2-40B4-BE49-F238E27FC236}">
-                  <a16:creationId xmlns:a16="http://schemas.microsoft.com/office/drawing/2014/main" id="{5781DE2E-9952-49F1-11C6-4D1C3317F6AA}"/>
-                </a:ext>
-              </a:extLst>
-            </p:cNvPr>
-            <p:cNvSpPr>
-              <a:spLocks/>
-            </p:cNvSpPr>
+            <p:cNvPr id="3" name="Freeform 5"/>
+            <p:cNvSpPr/>
             <p:nvPr/>
           </p:nvSpPr>
           <p:spPr bwMode="auto">
@@ -4570,7 +4628,7 @@
               <a:cxnLst/>
               <a:rect l="0" t="0" r="r" b="b"/>
               <a:pathLst>
-                <a:path w="56643" h="51603">
+                <a:path w="56643" h="51603" fill="norm" stroke="1" extrusionOk="0">
                   <a:moveTo>
                     <a:pt x="6624" y="20126"/>
                   </a:moveTo>
@@ -5131,7 +5189,10 @@
             <a:bodyPr/>
             <a:lstStyle/>
             <a:p>
-              <a:endParaRPr lang="zh-CN" altLang="en-US" sz="1200" kern="0" dirty="0">
+              <a:pPr>
+                <a:defRPr/>
+              </a:pPr>
+              <a:endParaRPr lang="zh-CN" sz="1200">
                 <a:solidFill>
                   <a:sysClr val="windowText" lastClr="000000"/>
                 </a:solidFill>
@@ -5141,16 +5202,8 @@
         </p:sp>
         <p:sp>
           <p:nvSpPr>
-            <p:cNvPr id="4" name="Freeform 5">
-              <a:extLst>
-                <a:ext uri="{FF2B5EF4-FFF2-40B4-BE49-F238E27FC236}">
-                  <a16:creationId xmlns:a16="http://schemas.microsoft.com/office/drawing/2014/main" id="{C02CC026-1CB0-B215-DDAC-BD5996C1B9EC}"/>
-                </a:ext>
-              </a:extLst>
-            </p:cNvPr>
-            <p:cNvSpPr>
-              <a:spLocks/>
-            </p:cNvSpPr>
+            <p:cNvPr id="4" name="Freeform 5"/>
+            <p:cNvSpPr/>
             <p:nvPr/>
           </p:nvSpPr>
           <p:spPr bwMode="auto">
@@ -5165,7 +5218,7 @@
               <a:cxnLst/>
               <a:rect l="0" t="0" r="r" b="b"/>
               <a:pathLst>
-                <a:path w="65348" h="75851">
+                <a:path w="65348" h="75851" fill="norm" stroke="1" extrusionOk="0">
                   <a:moveTo>
                     <a:pt x="45625" y="25236"/>
                   </a:moveTo>
@@ -5520,7 +5573,10 @@
             <a:bodyPr/>
             <a:lstStyle/>
             <a:p>
-              <a:endParaRPr lang="zh-CN" altLang="en-US" sz="1200" kern="0">
+              <a:pPr>
+                <a:defRPr/>
+              </a:pPr>
+              <a:endParaRPr lang="zh-CN" sz="1200">
                 <a:solidFill>
                   <a:sysClr val="windowText" lastClr="000000"/>
                 </a:solidFill>
@@ -5530,16 +5586,8 @@
         </p:sp>
         <p:sp>
           <p:nvSpPr>
-            <p:cNvPr id="5" name="Freeform 5">
-              <a:extLst>
-                <a:ext uri="{FF2B5EF4-FFF2-40B4-BE49-F238E27FC236}">
-                  <a16:creationId xmlns:a16="http://schemas.microsoft.com/office/drawing/2014/main" id="{34E88C2D-A4A7-7634-A130-6C63F3B64A24}"/>
-                </a:ext>
-              </a:extLst>
-            </p:cNvPr>
-            <p:cNvSpPr>
-              <a:spLocks/>
-            </p:cNvSpPr>
+            <p:cNvPr id="5" name="Freeform 5"/>
+            <p:cNvSpPr/>
             <p:nvPr/>
           </p:nvSpPr>
           <p:spPr bwMode="auto">
@@ -5776,7 +5824,7 @@
               </a:cxnLst>
               <a:rect l="T108" t="T109" r="T110" b="T111"/>
               <a:pathLst>
-                <a:path w="26316" h="28484">
+                <a:path w="26316" h="28484" fill="norm" stroke="1" extrusionOk="0">
                   <a:moveTo>
                     <a:pt x="0" y="1024"/>
                   </a:moveTo>
@@ -6045,7 +6093,10 @@
             <a:bodyPr/>
             <a:lstStyle/>
             <a:p>
-              <a:endParaRPr lang="zh-CN" altLang="en-US" sz="1200" kern="0">
+              <a:pPr>
+                <a:defRPr/>
+              </a:pPr>
+              <a:endParaRPr lang="zh-CN" sz="1200">
                 <a:solidFill>
                   <a:sysClr val="windowText" lastClr="000000"/>
                 </a:solidFill>
@@ -6055,16 +6106,8 @@
         </p:sp>
         <p:sp>
           <p:nvSpPr>
-            <p:cNvPr id="6" name="Freeform 5">
-              <a:extLst>
-                <a:ext uri="{FF2B5EF4-FFF2-40B4-BE49-F238E27FC236}">
-                  <a16:creationId xmlns:a16="http://schemas.microsoft.com/office/drawing/2014/main" id="{B583A2AF-ED74-5B3B-7453-1ECDEFD971F4}"/>
-                </a:ext>
-              </a:extLst>
-            </p:cNvPr>
-            <p:cNvSpPr>
-              <a:spLocks/>
-            </p:cNvSpPr>
+            <p:cNvPr id="6" name="Freeform 5"/>
+            <p:cNvSpPr/>
             <p:nvPr/>
           </p:nvSpPr>
           <p:spPr bwMode="auto">
@@ -6181,7 +6224,7 @@
               </a:cxnLst>
               <a:rect l="T0" t="T1" r="T2" b="T3"/>
               <a:pathLst>
-                <a:path w="25331" h="28833">
+                <a:path w="25331" h="28833" fill="norm" stroke="1" extrusionOk="0">
                   <a:moveTo>
                     <a:pt x="564" y="17699"/>
                   </a:moveTo>
@@ -6416,7 +6459,10 @@
             <a:bodyPr/>
             <a:lstStyle/>
             <a:p>
-              <a:endParaRPr lang="zh-CN" altLang="en-US" sz="1200" kern="0">
+              <a:pPr>
+                <a:defRPr/>
+              </a:pPr>
+              <a:endParaRPr lang="zh-CN" sz="1200">
                 <a:solidFill>
                   <a:sysClr val="windowText" lastClr="000000"/>
                 </a:solidFill>
@@ -6426,16 +6472,8 @@
         </p:sp>
         <p:sp>
           <p:nvSpPr>
-            <p:cNvPr id="8" name="Freeform 5">
-              <a:extLst>
-                <a:ext uri="{FF2B5EF4-FFF2-40B4-BE49-F238E27FC236}">
-                  <a16:creationId xmlns:a16="http://schemas.microsoft.com/office/drawing/2014/main" id="{2D56F473-E669-EBA7-E525-51DBBF1960D8}"/>
-                </a:ext>
-              </a:extLst>
-            </p:cNvPr>
-            <p:cNvSpPr>
-              <a:spLocks/>
-            </p:cNvSpPr>
+            <p:cNvPr id="8" name="Freeform 5"/>
+            <p:cNvSpPr/>
             <p:nvPr/>
           </p:nvSpPr>
           <p:spPr bwMode="auto">
@@ -6636,7 +6674,7 @@
               </a:cxnLst>
               <a:rect l="T0" t="T1" r="T2" b="T3"/>
               <a:pathLst>
-                <a:path w="33913" h="71320">
+                <a:path w="33913" h="71320" fill="norm" stroke="1" extrusionOk="0">
                   <a:moveTo>
                     <a:pt x="8757" y="397"/>
                   </a:moveTo>
@@ -7076,7 +7114,10 @@
             <a:bodyPr/>
             <a:lstStyle/>
             <a:p>
-              <a:endParaRPr lang="zh-CN" altLang="en-US" sz="1200" kern="0" dirty="0">
+              <a:pPr>
+                <a:defRPr/>
+              </a:pPr>
+              <a:endParaRPr lang="zh-CN" sz="1200">
                 <a:solidFill>
                   <a:sysClr val="windowText" lastClr="000000"/>
                 </a:solidFill>
@@ -7086,16 +7127,8 @@
         </p:sp>
         <p:sp>
           <p:nvSpPr>
-            <p:cNvPr id="10" name="Freeform 5">
-              <a:extLst>
-                <a:ext uri="{FF2B5EF4-FFF2-40B4-BE49-F238E27FC236}">
-                  <a16:creationId xmlns:a16="http://schemas.microsoft.com/office/drawing/2014/main" id="{D2C801AC-857A-D7D9-ACF9-F04C4669BD58}"/>
-                </a:ext>
-              </a:extLst>
-            </p:cNvPr>
-            <p:cNvSpPr>
-              <a:spLocks/>
-            </p:cNvSpPr>
+            <p:cNvPr id="10" name="Freeform 5"/>
+            <p:cNvSpPr/>
             <p:nvPr/>
           </p:nvSpPr>
           <p:spPr bwMode="auto">
@@ -7440,7 +7473,7 @@
               </a:cxnLst>
               <a:rect l="T162" t="T163" r="T164" b="T165"/>
               <a:pathLst>
-                <a:path w="21543" h="14764">
+                <a:path w="21543" h="14764" fill="norm" stroke="1" extrusionOk="0">
                   <a:moveTo>
                     <a:pt x="1661" y="4419"/>
                   </a:moveTo>
@@ -7643,7 +7676,10 @@
             <a:bodyPr/>
             <a:lstStyle/>
             <a:p>
-              <a:endParaRPr lang="zh-CN" altLang="en-US" sz="1200" kern="0">
+              <a:pPr>
+                <a:defRPr/>
+              </a:pPr>
+              <a:endParaRPr lang="zh-CN" sz="1200">
                 <a:solidFill>
                   <a:sysClr val="windowText" lastClr="000000"/>
                 </a:solidFill>
@@ -7653,21 +7689,13 @@
         </p:sp>
         <p:sp>
           <p:nvSpPr>
-            <p:cNvPr id="11" name="Freeform 5">
-              <a:extLst>
-                <a:ext uri="{FF2B5EF4-FFF2-40B4-BE49-F238E27FC236}">
-                  <a16:creationId xmlns:a16="http://schemas.microsoft.com/office/drawing/2014/main" id="{7B04AAF5-A6BE-73F6-712F-654FA97F4E95}"/>
-                </a:ext>
-              </a:extLst>
-            </p:cNvPr>
-            <p:cNvSpPr>
-              <a:spLocks/>
-            </p:cNvSpPr>
+            <p:cNvPr id="11" name="Freeform 5"/>
+            <p:cNvSpPr/>
             <p:nvPr/>
           </p:nvSpPr>
           <p:spPr bwMode="auto">
             <a:xfrm>
-              <a:off x="2921001" y="2308225"/>
+              <a:off x="2921000" y="2308225"/>
               <a:ext cx="896938" cy="747712"/>
             </a:xfrm>
             <a:custGeom>
@@ -7818,7 +7846,7 @@
               </a:cxnLst>
               <a:rect l="T0" t="T1" r="T2" b="T3"/>
               <a:pathLst>
-                <a:path w="34942" h="20511">
+                <a:path w="34942" h="20511" fill="norm" stroke="1" extrusionOk="0">
                   <a:moveTo>
                     <a:pt x="33325" y="4080"/>
                   </a:moveTo>
@@ -8133,7 +8161,10 @@
             <a:bodyPr/>
             <a:lstStyle/>
             <a:p>
-              <a:endParaRPr lang="zh-CN" altLang="en-US" sz="1200" kern="0">
+              <a:pPr>
+                <a:defRPr/>
+              </a:pPr>
+              <a:endParaRPr lang="zh-CN" sz="1200">
                 <a:solidFill>
                   <a:sysClr val="windowText" lastClr="000000"/>
                 </a:solidFill>
@@ -8143,16 +8174,8 @@
         </p:sp>
         <p:sp>
           <p:nvSpPr>
-            <p:cNvPr id="12" name="Freeform 5" descr="casablanca">
-              <a:extLst>
-                <a:ext uri="{FF2B5EF4-FFF2-40B4-BE49-F238E27FC236}">
-                  <a16:creationId xmlns:a16="http://schemas.microsoft.com/office/drawing/2014/main" id="{14CDA4F8-EA4C-CA18-74E5-ABA5327758DB}"/>
-                </a:ext>
-              </a:extLst>
-            </p:cNvPr>
-            <p:cNvSpPr>
-              <a:spLocks/>
-            </p:cNvSpPr>
+            <p:cNvPr id="12" name="Freeform 5" descr="casablanca"/>
+            <p:cNvSpPr/>
             <p:nvPr/>
           </p:nvSpPr>
           <p:spPr bwMode="auto">
@@ -8499,7 +8522,7 @@
               </a:cxnLst>
               <a:rect l="0" t="0" r="r" b="b"/>
               <a:pathLst>
-                <a:path w="16129" h="18509">
+                <a:path w="16129" h="18509" fill="norm" stroke="1" extrusionOk="0">
                   <a:moveTo>
                     <a:pt x="15464" y="6140"/>
                   </a:moveTo>
@@ -8707,7 +8730,10 @@
             <a:bodyPr/>
             <a:lstStyle/>
             <a:p>
-              <a:endParaRPr lang="zh-CN" altLang="en-US" sz="1200" kern="0">
+              <a:pPr>
+                <a:defRPr/>
+              </a:pPr>
+              <a:endParaRPr lang="zh-CN" sz="1200">
                 <a:solidFill>
                   <a:sysClr val="windowText" lastClr="000000"/>
                 </a:solidFill>
@@ -8717,16 +8743,8 @@
         </p:sp>
         <p:sp>
           <p:nvSpPr>
-            <p:cNvPr id="21" name="Freeform 5">
-              <a:extLst>
-                <a:ext uri="{FF2B5EF4-FFF2-40B4-BE49-F238E27FC236}">
-                  <a16:creationId xmlns:a16="http://schemas.microsoft.com/office/drawing/2014/main" id="{87420B48-A574-0DD2-1C99-E65D066D6720}"/>
-                </a:ext>
-              </a:extLst>
-            </p:cNvPr>
-            <p:cNvSpPr>
-              <a:spLocks/>
-            </p:cNvSpPr>
+            <p:cNvPr id="21" name="Freeform 5"/>
+            <p:cNvSpPr/>
             <p:nvPr/>
           </p:nvSpPr>
           <p:spPr bwMode="auto">
@@ -8975,7 +8993,7 @@
               </a:cxnLst>
               <a:rect l="T114" t="T115" r="T116" b="T117"/>
               <a:pathLst>
-                <a:path w="13991" h="18411">
+                <a:path w="13991" h="18411" fill="norm" stroke="1" extrusionOk="0">
                   <a:moveTo>
                     <a:pt x="0" y="6653"/>
                   </a:moveTo>
@@ -9130,7 +9148,10 @@
             <a:bodyPr/>
             <a:lstStyle/>
             <a:p>
-              <a:endParaRPr lang="zh-CN" altLang="en-US" sz="1200" kern="0">
+              <a:pPr>
+                <a:defRPr/>
+              </a:pPr>
+              <a:endParaRPr lang="zh-CN" sz="1200">
                 <a:solidFill>
                   <a:sysClr val="windowText" lastClr="000000"/>
                 </a:solidFill>
@@ -9140,16 +9161,8 @@
         </p:sp>
         <p:sp>
           <p:nvSpPr>
-            <p:cNvPr id="23" name="Freeform 5" descr="casablanca">
-              <a:extLst>
-                <a:ext uri="{FF2B5EF4-FFF2-40B4-BE49-F238E27FC236}">
-                  <a16:creationId xmlns:a16="http://schemas.microsoft.com/office/drawing/2014/main" id="{FBEF8F17-B161-82CA-1A0B-6702FE42EB92}"/>
-                </a:ext>
-              </a:extLst>
-            </p:cNvPr>
-            <p:cNvSpPr>
-              <a:spLocks/>
-            </p:cNvSpPr>
+            <p:cNvPr id="23" name="Freeform 5" descr="casablanca"/>
+            <p:cNvSpPr/>
             <p:nvPr/>
           </p:nvSpPr>
           <p:spPr bwMode="auto">
@@ -9536,7 +9549,7 @@
               </a:cxnLst>
               <a:rect l="T183" t="T184" r="T185" b="T186"/>
               <a:pathLst>
-                <a:path w="21893" h="23403">
+                <a:path w="21893" h="23403" fill="norm" stroke="1" extrusionOk="0">
                   <a:moveTo>
                     <a:pt x="10071" y="0"/>
                   </a:moveTo>
@@ -9764,7 +9777,10 @@
             <a:bodyPr/>
             <a:lstStyle/>
             <a:p>
-              <a:endParaRPr lang="zh-CN" altLang="en-US" sz="1200" kern="0">
+              <a:pPr>
+                <a:defRPr/>
+              </a:pPr>
+              <a:endParaRPr lang="zh-CN" sz="1200">
                 <a:solidFill>
                   <a:sysClr val="windowText" lastClr="000000"/>
                 </a:solidFill>
@@ -9774,16 +9790,8 @@
         </p:sp>
         <p:sp>
           <p:nvSpPr>
-            <p:cNvPr id="24" name="Freeform 5">
-              <a:extLst>
-                <a:ext uri="{FF2B5EF4-FFF2-40B4-BE49-F238E27FC236}">
-                  <a16:creationId xmlns:a16="http://schemas.microsoft.com/office/drawing/2014/main" id="{5E5958D0-24AE-3E0E-EB4D-0FA6C2005042}"/>
-                </a:ext>
-              </a:extLst>
-            </p:cNvPr>
-            <p:cNvSpPr>
-              <a:spLocks/>
-            </p:cNvSpPr>
+            <p:cNvPr id="24" name="Freeform 5"/>
+            <p:cNvSpPr/>
             <p:nvPr/>
           </p:nvSpPr>
           <p:spPr bwMode="auto">
@@ -9960,7 +9968,7 @@
               </a:cxnLst>
               <a:rect l="T0" t="T1" r="T2" b="T3"/>
               <a:pathLst>
-                <a:path w="31228" h="64117">
+                <a:path w="31228" h="64117" fill="norm" stroke="1" extrusionOk="0">
                   <a:moveTo>
                     <a:pt x="17263" y="6679"/>
                   </a:moveTo>
@@ -10345,7 +10353,10 @@
             <a:bodyPr/>
             <a:lstStyle/>
             <a:p>
-              <a:endParaRPr lang="zh-CN" altLang="en-US" sz="1200" kern="0">
+              <a:pPr>
+                <a:defRPr/>
+              </a:pPr>
+              <a:endParaRPr lang="zh-CN" sz="1200">
                 <a:solidFill>
                   <a:sysClr val="windowText" lastClr="000000"/>
                 </a:solidFill>
@@ -10355,21 +10366,13 @@
         </p:sp>
         <p:sp>
           <p:nvSpPr>
-            <p:cNvPr id="25" name="Freeform 5" descr="Tangier, Tetouane, Al Hoceima">
-              <a:extLst>
-                <a:ext uri="{FF2B5EF4-FFF2-40B4-BE49-F238E27FC236}">
-                  <a16:creationId xmlns:a16="http://schemas.microsoft.com/office/drawing/2014/main" id="{8EF48A44-EB22-C677-CFFD-EBDCDECC70DB}"/>
-                </a:ext>
-              </a:extLst>
-            </p:cNvPr>
-            <p:cNvSpPr>
-              <a:spLocks/>
-            </p:cNvSpPr>
+            <p:cNvPr id="25" name="Freeform 5" descr="Tangier, Tetouane, Al Hoceima"/>
+            <p:cNvSpPr/>
             <p:nvPr/>
           </p:nvSpPr>
           <p:spPr bwMode="auto">
             <a:xfrm>
-              <a:off x="4024313" y="1173163"/>
+              <a:off x="4024312" y="1173163"/>
               <a:ext cx="511175" cy="423862"/>
             </a:xfrm>
             <a:custGeom>
@@ -10523,7 +10526,7 @@
               </a:cxnLst>
               <a:rect l="T69" t="T70" r="T71" b="T72"/>
               <a:pathLst>
-                <a:path w="14206" h="19931">
+                <a:path w="14206" h="19931" fill="norm" stroke="1" extrusionOk="0">
                   <a:moveTo>
                     <a:pt x="1717" y="2485"/>
                   </a:moveTo>
@@ -10625,7 +10628,10 @@
             <a:bodyPr/>
             <a:lstStyle/>
             <a:p>
-              <a:endParaRPr lang="zh-CN" altLang="en-US" sz="1200" kern="0">
+              <a:pPr>
+                <a:defRPr/>
+              </a:pPr>
+              <a:endParaRPr lang="zh-CN" sz="1200">
                 <a:solidFill>
                   <a:sysClr val="windowText" lastClr="000000"/>
                 </a:solidFill>
@@ -10635,16 +10641,8 @@
         </p:sp>
         <p:sp>
           <p:nvSpPr>
-            <p:cNvPr id="26" name="Freeform 5">
-              <a:extLst>
-                <a:ext uri="{FF2B5EF4-FFF2-40B4-BE49-F238E27FC236}">
-                  <a16:creationId xmlns:a16="http://schemas.microsoft.com/office/drawing/2014/main" id="{9D957275-4724-633C-59D6-F5BC8A585E82}"/>
-                </a:ext>
-              </a:extLst>
-            </p:cNvPr>
-            <p:cNvSpPr>
-              <a:spLocks/>
-            </p:cNvSpPr>
+            <p:cNvPr id="26" name="Freeform 5"/>
+            <p:cNvSpPr/>
             <p:nvPr/>
           </p:nvSpPr>
           <p:spPr bwMode="auto">
@@ -10839,7 +10837,7 @@
               </a:cxnLst>
               <a:rect l="T87" t="T88" r="T89" b="T90"/>
               <a:pathLst>
-                <a:path w="12752" h="15320">
+                <a:path w="12752" h="15320" fill="norm" stroke="1" extrusionOk="0">
                   <a:moveTo>
                     <a:pt x="0" y="13717"/>
                   </a:moveTo>
@@ -10959,7 +10957,10 @@
             <a:bodyPr/>
             <a:lstStyle/>
             <a:p>
-              <a:endParaRPr lang="zh-CN" altLang="en-US" sz="1200" kern="0">
+              <a:pPr>
+                <a:defRPr/>
+              </a:pPr>
+              <a:endParaRPr lang="zh-CN" sz="1200">
                 <a:solidFill>
                   <a:sysClr val="windowText" lastClr="000000"/>
                 </a:solidFill>
@@ -10969,16 +10970,8 @@
         </p:sp>
         <p:sp>
           <p:nvSpPr>
-            <p:cNvPr id="27" name="Freeform 5" descr="Rabat">
-              <a:extLst>
-                <a:ext uri="{FF2B5EF4-FFF2-40B4-BE49-F238E27FC236}">
-                  <a16:creationId xmlns:a16="http://schemas.microsoft.com/office/drawing/2014/main" id="{CEF0AAED-EDA4-1CA8-1FA8-CE71E14EEE76}"/>
-                </a:ext>
-              </a:extLst>
-            </p:cNvPr>
-            <p:cNvSpPr>
-              <a:spLocks/>
-            </p:cNvSpPr>
+            <p:cNvPr id="27" name="Freeform 5" descr="Rabat"/>
+            <p:cNvSpPr/>
             <p:nvPr/>
           </p:nvSpPr>
           <p:spPr bwMode="auto">
@@ -11055,7 +11048,7 @@
               </a:cxnLst>
               <a:rect l="0" t="0" r="r" b="b"/>
               <a:pathLst>
-                <a:path w="10000" h="10000">
+                <a:path w="10000" h="10000" fill="norm" stroke="1" extrusionOk="0">
                   <a:moveTo>
                     <a:pt x="0" y="5163"/>
                   </a:moveTo>
@@ -11120,7 +11113,10 @@
             <a:bodyPr/>
             <a:lstStyle/>
             <a:p>
-              <a:endParaRPr lang="zh-CN" altLang="en-US" sz="1200" kern="0">
+              <a:pPr>
+                <a:defRPr/>
+              </a:pPr>
+              <a:endParaRPr lang="zh-CN" sz="1200">
                 <a:solidFill>
                   <a:sysClr val="windowText" lastClr="000000"/>
                 </a:solidFill>
@@ -11130,16 +11126,8 @@
         </p:sp>
         <p:sp>
           <p:nvSpPr>
-            <p:cNvPr id="28" name="Freeform 5">
-              <a:extLst>
-                <a:ext uri="{FF2B5EF4-FFF2-40B4-BE49-F238E27FC236}">
-                  <a16:creationId xmlns:a16="http://schemas.microsoft.com/office/drawing/2014/main" id="{386E9BEE-89CE-33A0-F1F4-062C5EFF3505}"/>
-                </a:ext>
-              </a:extLst>
-            </p:cNvPr>
-            <p:cNvSpPr>
-              <a:spLocks/>
-            </p:cNvSpPr>
+            <p:cNvPr id="28" name="Freeform 5"/>
+            <p:cNvSpPr/>
             <p:nvPr/>
           </p:nvSpPr>
           <p:spPr bwMode="auto">
@@ -11486,7 +11474,7 @@
               </a:cxnLst>
               <a:rect l="0" t="0" r="r" b="b"/>
               <a:pathLst>
-                <a:path w="38305" h="63284">
+                <a:path w="38305" h="63284" fill="norm" stroke="1" extrusionOk="0">
                   <a:moveTo>
                     <a:pt x="8036" y="29990"/>
                   </a:moveTo>
@@ -11690,7 +11678,10 @@
             <a:bodyPr/>
             <a:lstStyle/>
             <a:p>
-              <a:endParaRPr lang="zh-CN" altLang="en-US" sz="1200" kern="0">
+              <a:pPr>
+                <a:defRPr/>
+              </a:pPr>
+              <a:endParaRPr lang="zh-CN" sz="1200">
                 <a:solidFill>
                   <a:sysClr val="windowText" lastClr="000000"/>
                 </a:solidFill>
@@ -11700,16 +11691,8 @@
         </p:sp>
         <p:sp>
           <p:nvSpPr>
-            <p:cNvPr id="29" name="Freeform 5">
-              <a:extLst>
-                <a:ext uri="{FF2B5EF4-FFF2-40B4-BE49-F238E27FC236}">
-                  <a16:creationId xmlns:a16="http://schemas.microsoft.com/office/drawing/2014/main" id="{22460F63-D8AC-116A-B027-EDDB5F878FB7}"/>
-                </a:ext>
-              </a:extLst>
-            </p:cNvPr>
-            <p:cNvSpPr>
-              <a:spLocks/>
-            </p:cNvSpPr>
+            <p:cNvPr id="29" name="Freeform 5"/>
+            <p:cNvSpPr/>
             <p:nvPr/>
           </p:nvSpPr>
           <p:spPr bwMode="auto">
@@ -12098,7 +12081,7 @@
               </a:cxnLst>
               <a:rect l="0" t="0" r="r" b="b"/>
               <a:pathLst>
-                <a:path w="15406" h="86888">
+                <a:path w="15406" h="86888" fill="norm" stroke="1" extrusionOk="0">
                   <a:moveTo>
                     <a:pt x="5072" y="11164"/>
                   </a:moveTo>
@@ -12369,7 +12352,10 @@
             <a:bodyPr/>
             <a:lstStyle/>
             <a:p>
-              <a:endParaRPr lang="zh-CN" altLang="en-US" sz="1200" kern="0" dirty="0">
+              <a:pPr>
+                <a:defRPr/>
+              </a:pPr>
+              <a:endParaRPr lang="zh-CN" sz="1200">
                 <a:solidFill>
                   <a:sysClr val="windowText" lastClr="000000"/>
                 </a:solidFill>
@@ -12380,13 +12366,7 @@
       </p:grpSp>
       <p:sp>
         <p:nvSpPr>
-          <p:cNvPr id="46" name="ZoneTexte 8">
-            <a:extLst>
-              <a:ext uri="{FF2B5EF4-FFF2-40B4-BE49-F238E27FC236}">
-                <a16:creationId xmlns:a16="http://schemas.microsoft.com/office/drawing/2014/main" id="{48469E85-673F-AB36-D3D0-4CB6C5DD2521}"/>
-              </a:ext>
-            </a:extLst>
-          </p:cNvPr>
+          <p:cNvPr id="371429157" name="ZoneTexte 8"/>
           <p:cNvSpPr txBox="1">
             <a:spLocks noChangeArrowheads="1"/>
           </p:cNvSpPr>
@@ -12414,72 +12394,70 @@
           </a:bodyPr>
           <a:lstStyle/>
           <a:p>
+            <a:pPr>
+              <a:defRPr/>
+            </a:pPr>
             <a:r>
-              <a:rPr lang="en-US" sz="1200" dirty="0"/>
+              <a:rPr lang="en-US" sz="1200"/>
               <a:t>De </a:t>
             </a:r>
             <a:r>
-              <a:rPr lang="en-US" sz="1200" dirty="0" err="1"/>
+              <a:rPr lang="en-US" sz="1200"/>
               <a:t>Aéroport</a:t>
             </a:r>
             <a:r>
-              <a:rPr lang="fr-FR" sz="1200" dirty="0">
+              <a:rPr lang="fr-FR" sz="1200">
                 <a:solidFill>
                   <a:schemeClr val="tx1">
                     <a:lumMod val="85000"/>
                     <a:lumOff val="15000"/>
                   </a:schemeClr>
                 </a:solidFill>
-                <a:latin typeface="Arial" panose="020B0604020202020204" pitchFamily="34" charset="0"/>
-                <a:ea typeface="GulimChe" pitchFamily="49" charset="-127"/>
-                <a:cs typeface="Arial" panose="020B0604020202020204" pitchFamily="34" charset="0"/>
+                <a:latin typeface="Arial"/>
+                <a:ea typeface="GulimChe"/>
+                <a:cs typeface="Arial"/>
               </a:rPr>
               <a:t> Ibn </a:t>
             </a:r>
             <a:r>
-              <a:rPr lang="fr-FR" sz="1200" dirty="0" err="1">
+              <a:rPr lang="fr-FR" sz="1200">
                 <a:solidFill>
                   <a:schemeClr val="tx1">
                     <a:lumMod val="85000"/>
                     <a:lumOff val="15000"/>
                   </a:schemeClr>
                 </a:solidFill>
-                <a:latin typeface="Arial" panose="020B0604020202020204" pitchFamily="34" charset="0"/>
-                <a:ea typeface="GulimChe" pitchFamily="49" charset="-127"/>
-                <a:cs typeface="Arial" panose="020B0604020202020204" pitchFamily="34" charset="0"/>
+                <a:latin typeface="Arial"/>
+                <a:ea typeface="GulimChe"/>
+                <a:cs typeface="Arial"/>
               </a:rPr>
               <a:t>Battuta</a:t>
             </a:r>
             <a:r>
-              <a:rPr lang="fr-FR" sz="1200" dirty="0">
+              <a:rPr lang="fr-FR" sz="1200">
                 <a:solidFill>
                   <a:schemeClr val="tx1">
                     <a:lumMod val="85000"/>
                     <a:lumOff val="15000"/>
                   </a:schemeClr>
                 </a:solidFill>
-                <a:latin typeface="Arial" panose="020B0604020202020204" pitchFamily="34" charset="0"/>
-                <a:ea typeface="GulimChe" pitchFamily="49" charset="-127"/>
-                <a:cs typeface="Arial" panose="020B0604020202020204" pitchFamily="34" charset="0"/>
+                <a:latin typeface="Arial"/>
+                <a:ea typeface="GulimChe"/>
+                <a:cs typeface="Arial"/>
               </a:rPr>
               <a:t> au centre ville Tanger.</a:t>
             </a:r>
+            <a:endParaRPr/>
           </a:p>
         </p:txBody>
       </p:sp>
       <p:sp>
         <p:nvSpPr>
-          <p:cNvPr id="49" name="TextBox 48">
-            <a:extLst>
-              <a:ext uri="{FF2B5EF4-FFF2-40B4-BE49-F238E27FC236}">
-                <a16:creationId xmlns:a16="http://schemas.microsoft.com/office/drawing/2014/main" id="{0DABF218-123C-B4A1-26CA-7C440ED9D8F1}"/>
-              </a:ext>
-            </a:extLst>
-          </p:cNvPr>
+          <p:cNvPr id="336178629" name="TextBox 48"/>
           <p:cNvSpPr txBox="1"/>
           <p:nvPr/>
         </p:nvSpPr>
-        <p:spPr>
+        <p:spPr bwMode="auto">
           <a:xfrm>
             <a:off x="277813" y="2224953"/>
             <a:ext cx="1227483" cy="369332"/>
@@ -12495,20 +12473,23 @@
           </a:bodyPr>
           <a:lstStyle/>
           <a:p>
+            <a:pPr>
+              <a:defRPr/>
+            </a:pPr>
             <a:r>
-              <a:rPr lang="fr-FR" b="1" dirty="0">
+              <a:rPr lang="fr-FR" b="1">
                 <a:solidFill>
                   <a:schemeClr val="bg2">
                     <a:lumMod val="90000"/>
                   </a:schemeClr>
                 </a:solidFill>
-                <a:latin typeface="Arial" panose="020B0604020202020204" pitchFamily="34" charset="0"/>
-                <a:ea typeface="GulimChe" pitchFamily="49" charset="-127"/>
-                <a:cs typeface="Arial" panose="020B0604020202020204" pitchFamily="34" charset="0"/>
+                <a:latin typeface="Arial"/>
+                <a:ea typeface="GulimChe"/>
+                <a:cs typeface="Arial"/>
               </a:rPr>
               <a:t>14 km</a:t>
             </a:r>
-            <a:endParaRPr lang="en-MA" b="1" dirty="0">
+            <a:endParaRPr b="1">
               <a:solidFill>
                 <a:schemeClr val="bg2">
                   <a:lumMod val="90000"/>
@@ -12520,13 +12501,7 @@
       </p:sp>
       <p:sp>
         <p:nvSpPr>
-          <p:cNvPr id="50" name="ZoneTexte 8">
-            <a:extLst>
-              <a:ext uri="{FF2B5EF4-FFF2-40B4-BE49-F238E27FC236}">
-                <a16:creationId xmlns:a16="http://schemas.microsoft.com/office/drawing/2014/main" id="{F606E735-B645-0C58-5976-BEB378D93694}"/>
-              </a:ext>
-            </a:extLst>
-          </p:cNvPr>
+          <p:cNvPr id="313584530" name="ZoneTexte 8"/>
           <p:cNvSpPr txBox="1">
             <a:spLocks noChangeArrowheads="1"/>
           </p:cNvSpPr>
@@ -12554,44 +12529,42 @@
           </a:bodyPr>
           <a:lstStyle/>
           <a:p>
+            <a:pPr>
+              <a:defRPr/>
+            </a:pPr>
             <a:r>
-              <a:rPr lang="en-US" sz="1200" dirty="0"/>
+              <a:rPr lang="en-US" sz="1200"/>
               <a:t>De </a:t>
             </a:r>
             <a:r>
-              <a:rPr lang="en-US" sz="1200" dirty="0" err="1"/>
+              <a:rPr lang="en-US" sz="1200"/>
               <a:t>Aéroport</a:t>
             </a:r>
             <a:r>
-              <a:rPr lang="fr-FR" sz="1200" dirty="0">
+              <a:rPr lang="fr-FR" sz="1200">
                 <a:solidFill>
                   <a:schemeClr val="tx1">
                     <a:lumMod val="85000"/>
                     <a:lumOff val="15000"/>
                   </a:schemeClr>
                 </a:solidFill>
-                <a:latin typeface="Arial" panose="020B0604020202020204" pitchFamily="34" charset="0"/>
-                <a:ea typeface="GulimChe" pitchFamily="49" charset="-127"/>
-                <a:cs typeface="Arial" panose="020B0604020202020204" pitchFamily="34" charset="0"/>
+                <a:latin typeface="Arial"/>
+                <a:ea typeface="GulimChe"/>
+                <a:cs typeface="Arial"/>
               </a:rPr>
               <a:t> Mohamed V au centre ville Casablanca.</a:t>
             </a:r>
+            <a:endParaRPr/>
           </a:p>
         </p:txBody>
       </p:sp>
       <p:sp>
         <p:nvSpPr>
-          <p:cNvPr id="52" name="TextBox 51">
-            <a:extLst>
-              <a:ext uri="{FF2B5EF4-FFF2-40B4-BE49-F238E27FC236}">
-                <a16:creationId xmlns:a16="http://schemas.microsoft.com/office/drawing/2014/main" id="{925095DB-7412-AF3A-2F1F-23CC2B57B85D}"/>
-              </a:ext>
-            </a:extLst>
-          </p:cNvPr>
+          <p:cNvPr id="1664067790" name="TextBox 51"/>
           <p:cNvSpPr txBox="1"/>
           <p:nvPr/>
         </p:nvSpPr>
-        <p:spPr>
+        <p:spPr bwMode="auto">
           <a:xfrm>
             <a:off x="277813" y="2961535"/>
             <a:ext cx="1227483" cy="369332"/>
@@ -12607,20 +12580,23 @@
           </a:bodyPr>
           <a:lstStyle/>
           <a:p>
+            <a:pPr>
+              <a:defRPr/>
+            </a:pPr>
             <a:r>
-              <a:rPr lang="fr-FR" b="1" dirty="0">
+              <a:rPr lang="fr-FR" b="1">
                 <a:solidFill>
                   <a:schemeClr val="bg2">
                     <a:lumMod val="90000"/>
                   </a:schemeClr>
                 </a:solidFill>
-                <a:latin typeface="Arial" panose="020B0604020202020204" pitchFamily="34" charset="0"/>
-                <a:ea typeface="GulimChe" pitchFamily="49" charset="-127"/>
-                <a:cs typeface="Arial" panose="020B0604020202020204" pitchFamily="34" charset="0"/>
+                <a:latin typeface="Arial"/>
+                <a:ea typeface="GulimChe"/>
+                <a:cs typeface="Arial"/>
               </a:rPr>
               <a:t>30 km</a:t>
             </a:r>
-            <a:endParaRPr lang="en-MA" b="1" dirty="0">
+            <a:endParaRPr b="1">
               <a:solidFill>
                 <a:schemeClr val="bg2">
                   <a:lumMod val="90000"/>
@@ -12632,13 +12608,7 @@
       </p:sp>
       <p:sp>
         <p:nvSpPr>
-          <p:cNvPr id="53" name="ZoneTexte 8">
-            <a:extLst>
-              <a:ext uri="{FF2B5EF4-FFF2-40B4-BE49-F238E27FC236}">
-                <a16:creationId xmlns:a16="http://schemas.microsoft.com/office/drawing/2014/main" id="{B4F4BCA2-8910-FD65-17F7-AAC05780DD01}"/>
-              </a:ext>
-            </a:extLst>
-          </p:cNvPr>
+          <p:cNvPr id="1410528387" name="ZoneTexte 8"/>
           <p:cNvSpPr txBox="1">
             <a:spLocks noChangeArrowheads="1"/>
           </p:cNvSpPr>
@@ -12666,72 +12636,70 @@
           </a:bodyPr>
           <a:lstStyle/>
           <a:p>
+            <a:pPr>
+              <a:defRPr/>
+            </a:pPr>
             <a:r>
-              <a:rPr lang="en-US" sz="1200" dirty="0"/>
+              <a:rPr lang="en-US" sz="1200"/>
               <a:t>De </a:t>
             </a:r>
             <a:r>
-              <a:rPr lang="en-US" sz="1200" dirty="0" err="1"/>
+              <a:rPr lang="en-US" sz="1200"/>
               <a:t>Aéroport</a:t>
             </a:r>
             <a:r>
-              <a:rPr lang="fr-FR" sz="1200" dirty="0">
+              <a:rPr lang="fr-FR" sz="1200">
                 <a:solidFill>
                   <a:schemeClr val="tx1">
                     <a:lumMod val="85000"/>
                     <a:lumOff val="15000"/>
                   </a:schemeClr>
                 </a:solidFill>
-                <a:latin typeface="Arial" panose="020B0604020202020204" pitchFamily="34" charset="0"/>
-                <a:ea typeface="GulimChe" pitchFamily="49" charset="-127"/>
-                <a:cs typeface="Arial" panose="020B0604020202020204" pitchFamily="34" charset="0"/>
+                <a:latin typeface="Arial"/>
+                <a:ea typeface="GulimChe"/>
+                <a:cs typeface="Arial"/>
               </a:rPr>
               <a:t> </a:t>
             </a:r>
             <a:r>
-              <a:rPr lang="fr-FR" sz="1200" dirty="0" err="1">
+              <a:rPr lang="fr-FR" sz="1200">
                 <a:solidFill>
                   <a:schemeClr val="tx1">
                     <a:lumMod val="85000"/>
                     <a:lumOff val="15000"/>
                   </a:schemeClr>
                 </a:solidFill>
-                <a:latin typeface="Arial" panose="020B0604020202020204" pitchFamily="34" charset="0"/>
-                <a:ea typeface="GulimChe" pitchFamily="49" charset="-127"/>
-                <a:cs typeface="Arial" panose="020B0604020202020204" pitchFamily="34" charset="0"/>
+                <a:latin typeface="Arial"/>
+                <a:ea typeface="GulimChe"/>
+                <a:cs typeface="Arial"/>
               </a:rPr>
               <a:t>Menara</a:t>
             </a:r>
             <a:r>
-              <a:rPr lang="fr-FR" sz="1200" dirty="0">
+              <a:rPr lang="fr-FR" sz="1200">
                 <a:solidFill>
                   <a:schemeClr val="tx1">
                     <a:lumMod val="85000"/>
                     <a:lumOff val="15000"/>
                   </a:schemeClr>
                 </a:solidFill>
-                <a:latin typeface="Arial" panose="020B0604020202020204" pitchFamily="34" charset="0"/>
-                <a:ea typeface="GulimChe" pitchFamily="49" charset="-127"/>
-                <a:cs typeface="Arial" panose="020B0604020202020204" pitchFamily="34" charset="0"/>
+                <a:latin typeface="Arial"/>
+                <a:ea typeface="GulimChe"/>
+                <a:cs typeface="Arial"/>
               </a:rPr>
               <a:t> au centre ville Marrakech.</a:t>
             </a:r>
+            <a:endParaRPr/>
           </a:p>
         </p:txBody>
       </p:sp>
       <p:sp>
         <p:nvSpPr>
-          <p:cNvPr id="55" name="TextBox 54">
-            <a:extLst>
-              <a:ext uri="{FF2B5EF4-FFF2-40B4-BE49-F238E27FC236}">
-                <a16:creationId xmlns:a16="http://schemas.microsoft.com/office/drawing/2014/main" id="{91910728-F962-44CA-ECCB-167A3247C887}"/>
-              </a:ext>
-            </a:extLst>
-          </p:cNvPr>
+          <p:cNvPr id="185972217" name="TextBox 54"/>
           <p:cNvSpPr txBox="1"/>
           <p:nvPr/>
         </p:nvSpPr>
-        <p:spPr>
+        <p:spPr bwMode="auto">
           <a:xfrm>
             <a:off x="277813" y="3759776"/>
             <a:ext cx="1227483" cy="369332"/>
@@ -12747,20 +12715,23 @@
           </a:bodyPr>
           <a:lstStyle/>
           <a:p>
+            <a:pPr>
+              <a:defRPr/>
+            </a:pPr>
             <a:r>
-              <a:rPr lang="fr-FR" b="1" dirty="0">
+              <a:rPr lang="fr-FR" b="1">
                 <a:solidFill>
                   <a:schemeClr val="bg2">
                     <a:lumMod val="90000"/>
                   </a:schemeClr>
                 </a:solidFill>
-                <a:latin typeface="Arial" panose="020B0604020202020204" pitchFamily="34" charset="0"/>
-                <a:ea typeface="GulimChe" pitchFamily="49" charset="-127"/>
-                <a:cs typeface="Arial" panose="020B0604020202020204" pitchFamily="34" charset="0"/>
+                <a:latin typeface="Arial"/>
+                <a:ea typeface="GulimChe"/>
+                <a:cs typeface="Arial"/>
               </a:rPr>
               <a:t>1 km</a:t>
             </a:r>
-            <a:endParaRPr lang="en-MA" b="1" dirty="0">
+            <a:endParaRPr b="1">
               <a:solidFill>
                 <a:schemeClr val="bg2">
                   <a:lumMod val="90000"/>
@@ -12772,13 +12743,7 @@
       </p:sp>
       <p:sp>
         <p:nvSpPr>
-          <p:cNvPr id="42" name="ZoneTexte 8">
-            <a:extLst>
-              <a:ext uri="{FF2B5EF4-FFF2-40B4-BE49-F238E27FC236}">
-                <a16:creationId xmlns:a16="http://schemas.microsoft.com/office/drawing/2014/main" id="{D890873D-94F4-BF4E-E166-1A1ADB837D9F}"/>
-              </a:ext>
-            </a:extLst>
-          </p:cNvPr>
+          <p:cNvPr id="151601101" name="ZoneTexte 8"/>
           <p:cNvSpPr txBox="1">
             <a:spLocks noChangeArrowheads="1"/>
           </p:cNvSpPr>
@@ -12806,110 +12771,107 @@
           </a:bodyPr>
           <a:lstStyle/>
           <a:p>
+            <a:pPr>
+              <a:defRPr/>
+            </a:pPr>
             <a:r>
-              <a:rPr lang="en-US" sz="1200" dirty="0">
-                <a:latin typeface="Arial" panose="020B0604020202020204" pitchFamily="34" charset="0"/>
-                <a:cs typeface="Arial" panose="020B0604020202020204" pitchFamily="34" charset="0"/>
+              <a:rPr lang="en-US" sz="1200">
+                <a:latin typeface="Arial"/>
+                <a:cs typeface="Arial"/>
               </a:rPr>
               <a:t>De </a:t>
             </a:r>
             <a:r>
-              <a:rPr lang="en-US" sz="1200" dirty="0" err="1">
-                <a:latin typeface="Arial" panose="020B0604020202020204" pitchFamily="34" charset="0"/>
-                <a:cs typeface="Arial" panose="020B0604020202020204" pitchFamily="34" charset="0"/>
+              <a:rPr lang="en-US" sz="1200">
+                <a:latin typeface="Arial"/>
+                <a:cs typeface="Arial"/>
               </a:rPr>
               <a:t>l’aéroport</a:t>
             </a:r>
             <a:r>
-              <a:rPr lang="en-US" sz="1200" dirty="0">
-                <a:latin typeface="Arial" panose="020B0604020202020204" pitchFamily="34" charset="0"/>
-                <a:cs typeface="Arial" panose="020B0604020202020204" pitchFamily="34" charset="0"/>
+              <a:rPr lang="en-US" sz="1200">
+                <a:latin typeface="Arial"/>
+                <a:cs typeface="Arial"/>
               </a:rPr>
               <a:t> de </a:t>
             </a:r>
             <a:r>
-              <a:rPr lang="en-US" sz="1200" dirty="0" err="1">
-                <a:latin typeface="Arial" panose="020B0604020202020204" pitchFamily="34" charset="0"/>
-                <a:cs typeface="Arial" panose="020B0604020202020204" pitchFamily="34" charset="0"/>
+              <a:rPr lang="en-US" sz="1200">
+                <a:latin typeface="Arial"/>
+                <a:cs typeface="Arial"/>
               </a:rPr>
               <a:t>Saïss</a:t>
             </a:r>
             <a:r>
-              <a:rPr lang="en-US" sz="1200" dirty="0">
-                <a:latin typeface="Arial" panose="020B0604020202020204" pitchFamily="34" charset="0"/>
-                <a:cs typeface="Arial" panose="020B0604020202020204" pitchFamily="34" charset="0"/>
+              <a:rPr lang="en-US" sz="1200">
+                <a:latin typeface="Arial"/>
+                <a:cs typeface="Arial"/>
               </a:rPr>
               <a:t> au </a:t>
             </a:r>
             <a:r>
-              <a:rPr lang="en-US" sz="1200" dirty="0" err="1">
-                <a:latin typeface="Arial" panose="020B0604020202020204" pitchFamily="34" charset="0"/>
-                <a:cs typeface="Arial" panose="020B0604020202020204" pitchFamily="34" charset="0"/>
+              <a:rPr lang="en-US" sz="1200">
+                <a:latin typeface="Arial"/>
+                <a:cs typeface="Arial"/>
               </a:rPr>
               <a:t>centre</a:t>
             </a:r>
             <a:r>
-              <a:rPr lang="en-US" sz="1200" dirty="0">
-                <a:latin typeface="Arial" panose="020B0604020202020204" pitchFamily="34" charset="0"/>
-                <a:cs typeface="Arial" panose="020B0604020202020204" pitchFamily="34" charset="0"/>
+              <a:rPr lang="en-US" sz="1200">
+                <a:latin typeface="Arial"/>
+                <a:cs typeface="Arial"/>
               </a:rPr>
               <a:t> </a:t>
             </a:r>
             <a:r>
-              <a:rPr lang="en-US" sz="1200" dirty="0" err="1">
-                <a:latin typeface="Arial" panose="020B0604020202020204" pitchFamily="34" charset="0"/>
-                <a:cs typeface="Arial" panose="020B0604020202020204" pitchFamily="34" charset="0"/>
+              <a:rPr lang="en-US" sz="1200">
+                <a:latin typeface="Arial"/>
+                <a:cs typeface="Arial"/>
               </a:rPr>
               <a:t>ville</a:t>
             </a:r>
             <a:r>
-              <a:rPr lang="en-US" sz="1200" dirty="0">
-                <a:latin typeface="Arial" panose="020B0604020202020204" pitchFamily="34" charset="0"/>
-                <a:cs typeface="Arial" panose="020B0604020202020204" pitchFamily="34" charset="0"/>
+              <a:rPr lang="en-US" sz="1200">
+                <a:latin typeface="Arial"/>
+                <a:cs typeface="Arial"/>
               </a:rPr>
               <a:t> </a:t>
             </a:r>
             <a:r>
-              <a:rPr lang="en-US" sz="1200" dirty="0" err="1">
-                <a:latin typeface="Arial" panose="020B0604020202020204" pitchFamily="34" charset="0"/>
-                <a:cs typeface="Arial" panose="020B0604020202020204" pitchFamily="34" charset="0"/>
+              <a:rPr lang="en-US" sz="1200">
+                <a:latin typeface="Arial"/>
+                <a:cs typeface="Arial"/>
               </a:rPr>
               <a:t>Fès</a:t>
             </a:r>
             <a:r>
-              <a:rPr lang="en-US" sz="1200" dirty="0">
-                <a:latin typeface="Arial" panose="020B0604020202020204" pitchFamily="34" charset="0"/>
-                <a:cs typeface="Arial" panose="020B0604020202020204" pitchFamily="34" charset="0"/>
+              <a:rPr lang="en-US" sz="1200">
+                <a:latin typeface="Arial"/>
+                <a:cs typeface="Arial"/>
               </a:rPr>
               <a:t>.</a:t>
             </a:r>
-            <a:endParaRPr lang="fr-FR" sz="1200" dirty="0">
+            <a:endParaRPr lang="fr-FR" sz="1200">
               <a:solidFill>
                 <a:schemeClr val="tx1">
                   <a:lumMod val="85000"/>
                   <a:lumOff val="15000"/>
                 </a:schemeClr>
               </a:solidFill>
-              <a:latin typeface="Arial" panose="020B0604020202020204" pitchFamily="34" charset="0"/>
-              <a:ea typeface="GulimChe" pitchFamily="49" charset="-127"/>
-              <a:cs typeface="Arial" panose="020B0604020202020204" pitchFamily="34" charset="0"/>
+              <a:latin typeface="Arial"/>
+              <a:ea typeface="GulimChe"/>
+              <a:cs typeface="Arial"/>
             </a:endParaRPr>
           </a:p>
         </p:txBody>
       </p:sp>
       <p:sp>
         <p:nvSpPr>
-          <p:cNvPr id="44" name="TextBox 43">
-            <a:extLst>
-              <a:ext uri="{FF2B5EF4-FFF2-40B4-BE49-F238E27FC236}">
-                <a16:creationId xmlns:a16="http://schemas.microsoft.com/office/drawing/2014/main" id="{E1E2A2C3-FBBD-F149-8BEC-9AB41C8F05FC}"/>
-              </a:ext>
-            </a:extLst>
-          </p:cNvPr>
+          <p:cNvPr id="1619898792" name="TextBox 43"/>
           <p:cNvSpPr txBox="1"/>
           <p:nvPr/>
         </p:nvSpPr>
-        <p:spPr>
+        <p:spPr bwMode="auto">
           <a:xfrm>
             <a:off x="277813" y="4472157"/>
             <a:ext cx="1227483" cy="369332"/>
@@ -12925,20 +12887,23 @@
           </a:bodyPr>
           <a:lstStyle/>
           <a:p>
+            <a:pPr>
+              <a:defRPr/>
+            </a:pPr>
             <a:r>
-              <a:rPr lang="fr-FR" b="1" dirty="0">
+              <a:rPr lang="fr-FR" b="1">
                 <a:solidFill>
                   <a:schemeClr val="bg2">
                     <a:lumMod val="90000"/>
                   </a:schemeClr>
                 </a:solidFill>
-                <a:latin typeface="Arial" panose="020B0604020202020204" pitchFamily="34" charset="0"/>
-                <a:ea typeface="GulimChe" pitchFamily="49" charset="-127"/>
-                <a:cs typeface="Arial" panose="020B0604020202020204" pitchFamily="34" charset="0"/>
+                <a:latin typeface="Arial"/>
+                <a:ea typeface="GulimChe"/>
+                <a:cs typeface="Arial"/>
               </a:rPr>
               <a:t>15 km</a:t>
             </a:r>
-            <a:endParaRPr lang="en-MA" b="1" dirty="0">
+            <a:endParaRPr b="1">
               <a:solidFill>
                 <a:schemeClr val="bg2">
                   <a:lumMod val="90000"/>
@@ -12950,13 +12915,7 @@
       </p:sp>
       <p:sp>
         <p:nvSpPr>
-          <p:cNvPr id="45" name="ZoneTexte 8">
-            <a:extLst>
-              <a:ext uri="{FF2B5EF4-FFF2-40B4-BE49-F238E27FC236}">
-                <a16:creationId xmlns:a16="http://schemas.microsoft.com/office/drawing/2014/main" id="{F785EE8C-8822-1AF2-0D6F-4CB2A185C587}"/>
-              </a:ext>
-            </a:extLst>
-          </p:cNvPr>
+          <p:cNvPr id="154393986" name="ZoneTexte 8"/>
           <p:cNvSpPr txBox="1">
             <a:spLocks noChangeArrowheads="1"/>
           </p:cNvSpPr>
@@ -12964,7 +12923,7 @@
         </p:nvSpPr>
         <p:spPr bwMode="auto">
           <a:xfrm>
-            <a:off x="277813" y="5494459"/>
+            <a:off x="277813" y="5494458"/>
             <a:ext cx="4381349" cy="276999"/>
           </a:xfrm>
           <a:prstGeom prst="rect">
@@ -12984,96 +12943,93 @@
           </a:bodyPr>
           <a:lstStyle/>
           <a:p>
+            <a:pPr>
+              <a:defRPr/>
+            </a:pPr>
             <a:r>
-              <a:rPr lang="en-US" sz="1200" dirty="0">
-                <a:latin typeface="Arial" panose="020B0604020202020204" pitchFamily="34" charset="0"/>
-                <a:cs typeface="Arial" panose="020B0604020202020204" pitchFamily="34" charset="0"/>
+              <a:rPr lang="en-US" sz="1200">
+                <a:latin typeface="Arial"/>
+                <a:cs typeface="Arial"/>
               </a:rPr>
               <a:t>De </a:t>
             </a:r>
             <a:r>
-              <a:rPr lang="en-US" sz="1200" dirty="0" err="1">
-                <a:latin typeface="Arial" panose="020B0604020202020204" pitchFamily="34" charset="0"/>
-                <a:cs typeface="Arial" panose="020B0604020202020204" pitchFamily="34" charset="0"/>
+              <a:rPr lang="en-US" sz="1200">
+                <a:latin typeface="Arial"/>
+                <a:cs typeface="Arial"/>
               </a:rPr>
               <a:t>l’aéroport</a:t>
             </a:r>
             <a:r>
-              <a:rPr lang="en-US" sz="1200" dirty="0">
-                <a:latin typeface="Arial" panose="020B0604020202020204" pitchFamily="34" charset="0"/>
-                <a:cs typeface="Arial" panose="020B0604020202020204" pitchFamily="34" charset="0"/>
+              <a:rPr lang="en-US" sz="1200">
+                <a:latin typeface="Arial"/>
+                <a:cs typeface="Arial"/>
               </a:rPr>
               <a:t> Agadir Al-</a:t>
             </a:r>
             <a:r>
-              <a:rPr lang="en-US" sz="1200" dirty="0" err="1">
-                <a:latin typeface="Arial" panose="020B0604020202020204" pitchFamily="34" charset="0"/>
-                <a:cs typeface="Arial" panose="020B0604020202020204" pitchFamily="34" charset="0"/>
+              <a:rPr lang="en-US" sz="1200">
+                <a:latin typeface="Arial"/>
+                <a:cs typeface="Arial"/>
               </a:rPr>
               <a:t>Massira</a:t>
             </a:r>
             <a:r>
-              <a:rPr lang="en-US" sz="1200" dirty="0">
-                <a:latin typeface="Arial" panose="020B0604020202020204" pitchFamily="34" charset="0"/>
-                <a:cs typeface="Arial" panose="020B0604020202020204" pitchFamily="34" charset="0"/>
+              <a:rPr lang="en-US" sz="1200">
+                <a:latin typeface="Arial"/>
+                <a:cs typeface="Arial"/>
               </a:rPr>
               <a:t> au </a:t>
             </a:r>
             <a:r>
-              <a:rPr lang="en-US" sz="1200" dirty="0" err="1">
-                <a:latin typeface="Arial" panose="020B0604020202020204" pitchFamily="34" charset="0"/>
-                <a:cs typeface="Arial" panose="020B0604020202020204" pitchFamily="34" charset="0"/>
+              <a:rPr lang="en-US" sz="1200">
+                <a:latin typeface="Arial"/>
+                <a:cs typeface="Arial"/>
               </a:rPr>
               <a:t>centre</a:t>
             </a:r>
             <a:r>
-              <a:rPr lang="en-US" sz="1200" dirty="0">
-                <a:latin typeface="Arial" panose="020B0604020202020204" pitchFamily="34" charset="0"/>
-                <a:cs typeface="Arial" panose="020B0604020202020204" pitchFamily="34" charset="0"/>
+              <a:rPr lang="en-US" sz="1200">
+                <a:latin typeface="Arial"/>
+                <a:cs typeface="Arial"/>
               </a:rPr>
               <a:t> </a:t>
             </a:r>
             <a:r>
-              <a:rPr lang="en-US" sz="1200" dirty="0" err="1">
-                <a:latin typeface="Arial" panose="020B0604020202020204" pitchFamily="34" charset="0"/>
-                <a:cs typeface="Arial" panose="020B0604020202020204" pitchFamily="34" charset="0"/>
+              <a:rPr lang="en-US" sz="1200">
+                <a:latin typeface="Arial"/>
+                <a:cs typeface="Arial"/>
               </a:rPr>
               <a:t>ville</a:t>
             </a:r>
             <a:r>
-              <a:rPr lang="en-US" sz="1200" dirty="0">
-                <a:latin typeface="Arial" panose="020B0604020202020204" pitchFamily="34" charset="0"/>
-                <a:cs typeface="Arial" panose="020B0604020202020204" pitchFamily="34" charset="0"/>
+              <a:rPr lang="en-US" sz="1200">
+                <a:latin typeface="Arial"/>
+                <a:cs typeface="Arial"/>
               </a:rPr>
               <a:t>.</a:t>
             </a:r>
-            <a:endParaRPr lang="fr-FR" sz="1200" dirty="0">
+            <a:endParaRPr lang="fr-FR" sz="1200">
               <a:solidFill>
                 <a:schemeClr val="tx1">
                   <a:lumMod val="85000"/>
                   <a:lumOff val="15000"/>
                 </a:schemeClr>
               </a:solidFill>
-              <a:latin typeface="Arial" panose="020B0604020202020204" pitchFamily="34" charset="0"/>
-              <a:ea typeface="GulimChe" pitchFamily="49" charset="-127"/>
-              <a:cs typeface="Arial" panose="020B0604020202020204" pitchFamily="34" charset="0"/>
+              <a:latin typeface="Arial"/>
+              <a:ea typeface="GulimChe"/>
+              <a:cs typeface="Arial"/>
             </a:endParaRPr>
           </a:p>
         </p:txBody>
       </p:sp>
       <p:sp>
         <p:nvSpPr>
-          <p:cNvPr id="56" name="TextBox 55">
-            <a:extLst>
-              <a:ext uri="{FF2B5EF4-FFF2-40B4-BE49-F238E27FC236}">
-                <a16:creationId xmlns:a16="http://schemas.microsoft.com/office/drawing/2014/main" id="{088205E5-F16D-B163-BAB5-572EA1F73E1E}"/>
-              </a:ext>
-            </a:extLst>
-          </p:cNvPr>
+          <p:cNvPr id="1000123094" name="TextBox 55"/>
           <p:cNvSpPr txBox="1"/>
           <p:nvPr/>
         </p:nvSpPr>
-        <p:spPr>
+        <p:spPr bwMode="auto">
           <a:xfrm>
             <a:off x="277813" y="5184538"/>
             <a:ext cx="1227483" cy="369332"/>
@@ -13089,20 +13045,23 @@
           </a:bodyPr>
           <a:lstStyle/>
           <a:p>
+            <a:pPr>
+              <a:defRPr/>
+            </a:pPr>
             <a:r>
-              <a:rPr lang="fr-FR" b="1" dirty="0">
+              <a:rPr lang="fr-FR" b="1">
                 <a:solidFill>
                   <a:schemeClr val="bg2">
                     <a:lumMod val="90000"/>
                   </a:schemeClr>
                 </a:solidFill>
-                <a:latin typeface="Arial" panose="020B0604020202020204" pitchFamily="34" charset="0"/>
-                <a:ea typeface="GulimChe" pitchFamily="49" charset="-127"/>
-                <a:cs typeface="Arial" panose="020B0604020202020204" pitchFamily="34" charset="0"/>
+                <a:latin typeface="Arial"/>
+                <a:ea typeface="GulimChe"/>
+                <a:cs typeface="Arial"/>
               </a:rPr>
               <a:t>25 km</a:t>
             </a:r>
-            <a:endParaRPr lang="en-MA" b="1" dirty="0">
+            <a:endParaRPr b="1">
               <a:solidFill>
                 <a:schemeClr val="bg2">
                   <a:lumMod val="90000"/>
@@ -13114,13 +13073,7 @@
       </p:sp>
       <p:sp>
         <p:nvSpPr>
-          <p:cNvPr id="57" name="ZoneTexte 8">
-            <a:extLst>
-              <a:ext uri="{FF2B5EF4-FFF2-40B4-BE49-F238E27FC236}">
-                <a16:creationId xmlns:a16="http://schemas.microsoft.com/office/drawing/2014/main" id="{FDB544CC-D666-D43D-3218-E1F531F9F066}"/>
-              </a:ext>
-            </a:extLst>
-          </p:cNvPr>
+          <p:cNvPr id="544041490" name="ZoneTexte 8"/>
           <p:cNvSpPr txBox="1">
             <a:spLocks noChangeArrowheads="1"/>
           </p:cNvSpPr>
@@ -13148,96 +13101,93 @@
           </a:bodyPr>
           <a:lstStyle/>
           <a:p>
+            <a:pPr>
+              <a:defRPr/>
+            </a:pPr>
             <a:r>
-              <a:rPr lang="en-US" sz="1200" dirty="0">
-                <a:latin typeface="Arial" panose="020B0604020202020204" pitchFamily="34" charset="0"/>
-                <a:cs typeface="Arial" panose="020B0604020202020204" pitchFamily="34" charset="0"/>
+              <a:rPr lang="en-US" sz="1200">
+                <a:latin typeface="Arial"/>
+                <a:cs typeface="Arial"/>
               </a:rPr>
               <a:t>De </a:t>
             </a:r>
             <a:r>
-              <a:rPr lang="en-US" sz="1200" dirty="0" err="1">
-                <a:latin typeface="Arial" panose="020B0604020202020204" pitchFamily="34" charset="0"/>
-                <a:cs typeface="Arial" panose="020B0604020202020204" pitchFamily="34" charset="0"/>
+              <a:rPr lang="en-US" sz="1200">
+                <a:latin typeface="Arial"/>
+                <a:cs typeface="Arial"/>
               </a:rPr>
               <a:t>l’aéroport</a:t>
             </a:r>
             <a:r>
-              <a:rPr lang="en-US" sz="1200" dirty="0">
-                <a:latin typeface="Arial" panose="020B0604020202020204" pitchFamily="34" charset="0"/>
-                <a:cs typeface="Arial" panose="020B0604020202020204" pitchFamily="34" charset="0"/>
+              <a:rPr lang="en-US" sz="1200">
+                <a:latin typeface="Arial"/>
+                <a:cs typeface="Arial"/>
               </a:rPr>
               <a:t> </a:t>
             </a:r>
             <a:r>
-              <a:rPr lang="en-US" sz="1200" dirty="0" err="1">
-                <a:latin typeface="Arial" panose="020B0604020202020204" pitchFamily="34" charset="0"/>
-                <a:cs typeface="Arial" panose="020B0604020202020204" pitchFamily="34" charset="0"/>
+              <a:rPr lang="en-US" sz="1200">
+                <a:latin typeface="Arial"/>
+                <a:cs typeface="Arial"/>
               </a:rPr>
               <a:t>Ouarzazate</a:t>
             </a:r>
             <a:r>
-              <a:rPr lang="en-US" sz="1200" dirty="0">
-                <a:latin typeface="Arial" panose="020B0604020202020204" pitchFamily="34" charset="0"/>
-                <a:cs typeface="Arial" panose="020B0604020202020204" pitchFamily="34" charset="0"/>
+              <a:rPr lang="en-US" sz="1200">
+                <a:latin typeface="Arial"/>
+                <a:cs typeface="Arial"/>
               </a:rPr>
               <a:t> au </a:t>
             </a:r>
             <a:r>
-              <a:rPr lang="en-US" sz="1200" dirty="0" err="1">
-                <a:latin typeface="Arial" panose="020B0604020202020204" pitchFamily="34" charset="0"/>
-                <a:cs typeface="Arial" panose="020B0604020202020204" pitchFamily="34" charset="0"/>
+              <a:rPr lang="en-US" sz="1200">
+                <a:latin typeface="Arial"/>
+                <a:cs typeface="Arial"/>
               </a:rPr>
               <a:t>centre</a:t>
             </a:r>
             <a:r>
-              <a:rPr lang="en-US" sz="1200" dirty="0">
-                <a:latin typeface="Arial" panose="020B0604020202020204" pitchFamily="34" charset="0"/>
-                <a:cs typeface="Arial" panose="020B0604020202020204" pitchFamily="34" charset="0"/>
+              <a:rPr lang="en-US" sz="1200">
+                <a:latin typeface="Arial"/>
+                <a:cs typeface="Arial"/>
               </a:rPr>
               <a:t> </a:t>
             </a:r>
             <a:r>
-              <a:rPr lang="en-US" sz="1200" dirty="0" err="1">
-                <a:latin typeface="Arial" panose="020B0604020202020204" pitchFamily="34" charset="0"/>
-                <a:cs typeface="Arial" panose="020B0604020202020204" pitchFamily="34" charset="0"/>
+              <a:rPr lang="en-US" sz="1200">
+                <a:latin typeface="Arial"/>
+                <a:cs typeface="Arial"/>
               </a:rPr>
               <a:t>ville</a:t>
             </a:r>
             <a:r>
-              <a:rPr lang="en-US" sz="1200" dirty="0">
-                <a:latin typeface="Arial" panose="020B0604020202020204" pitchFamily="34" charset="0"/>
-                <a:cs typeface="Arial" panose="020B0604020202020204" pitchFamily="34" charset="0"/>
+              <a:rPr lang="en-US" sz="1200">
+                <a:latin typeface="Arial"/>
+                <a:cs typeface="Arial"/>
               </a:rPr>
               <a:t>.</a:t>
             </a:r>
-            <a:endParaRPr lang="fr-FR" sz="1200" dirty="0">
+            <a:endParaRPr lang="fr-FR" sz="1200">
               <a:solidFill>
                 <a:schemeClr val="tx1">
                   <a:lumMod val="85000"/>
                   <a:lumOff val="15000"/>
                 </a:schemeClr>
               </a:solidFill>
-              <a:latin typeface="Arial" panose="020B0604020202020204" pitchFamily="34" charset="0"/>
-              <a:ea typeface="GulimChe" pitchFamily="49" charset="-127"/>
-              <a:cs typeface="Arial" panose="020B0604020202020204" pitchFamily="34" charset="0"/>
+              <a:latin typeface="Arial"/>
+              <a:ea typeface="GulimChe"/>
+              <a:cs typeface="Arial"/>
             </a:endParaRPr>
           </a:p>
         </p:txBody>
       </p:sp>
       <p:sp>
         <p:nvSpPr>
-          <p:cNvPr id="59" name="TextBox 58">
-            <a:extLst>
-              <a:ext uri="{FF2B5EF4-FFF2-40B4-BE49-F238E27FC236}">
-                <a16:creationId xmlns:a16="http://schemas.microsoft.com/office/drawing/2014/main" id="{D7BE6A2E-DFB6-E3D5-F45F-32CBC02F66A7}"/>
-              </a:ext>
-            </a:extLst>
-          </p:cNvPr>
+          <p:cNvPr id="454737305" name="TextBox 58"/>
           <p:cNvSpPr txBox="1"/>
           <p:nvPr/>
         </p:nvSpPr>
-        <p:spPr>
+        <p:spPr bwMode="auto">
           <a:xfrm>
             <a:off x="277813" y="5896919"/>
             <a:ext cx="1227483" cy="369332"/>
@@ -13253,20 +13203,23 @@
           </a:bodyPr>
           <a:lstStyle/>
           <a:p>
+            <a:pPr>
+              <a:defRPr/>
+            </a:pPr>
             <a:r>
-              <a:rPr lang="fr-FR" b="1" dirty="0">
+              <a:rPr lang="fr-FR" b="1">
                 <a:solidFill>
                   <a:schemeClr val="bg2">
                     <a:lumMod val="90000"/>
                   </a:schemeClr>
                 </a:solidFill>
-                <a:latin typeface="Arial" panose="020B0604020202020204" pitchFamily="34" charset="0"/>
-                <a:ea typeface="GulimChe" pitchFamily="49" charset="-127"/>
-                <a:cs typeface="Arial" panose="020B0604020202020204" pitchFamily="34" charset="0"/>
+                <a:latin typeface="Arial"/>
+                <a:ea typeface="GulimChe"/>
+                <a:cs typeface="Arial"/>
               </a:rPr>
               <a:t>4.3 km</a:t>
             </a:r>
-            <a:endParaRPr lang="en-MA" b="1" dirty="0">
+            <a:endParaRPr b="1">
               <a:solidFill>
                 <a:schemeClr val="bg2">
                   <a:lumMod val="90000"/>
@@ -13278,17 +13231,11 @@
       </p:sp>
       <p:sp>
         <p:nvSpPr>
-          <p:cNvPr id="61" name="Rectangle 60">
-            <a:extLst>
-              <a:ext uri="{FF2B5EF4-FFF2-40B4-BE49-F238E27FC236}">
-                <a16:creationId xmlns:a16="http://schemas.microsoft.com/office/drawing/2014/main" id="{B4BB1E72-897C-AC8F-1929-3A32DBB98EFA}"/>
-              </a:ext>
-            </a:extLst>
-          </p:cNvPr>
+          <p:cNvPr id="1924720066" name="Rectangle 60"/>
           <p:cNvSpPr/>
           <p:nvPr/>
         </p:nvSpPr>
-        <p:spPr>
+        <p:spPr bwMode="auto">
           <a:xfrm>
             <a:off x="-13043" y="2243094"/>
             <a:ext cx="191533" cy="538061"/>
@@ -13323,24 +13270,20 @@
           <a:bodyPr rtlCol="0" anchor="ctr"/>
           <a:lstStyle/>
           <a:p>
-            <a:pPr algn="ctr"/>
-            <a:endParaRPr lang="en-MA"/>
+            <a:pPr algn="ctr">
+              <a:defRPr/>
+            </a:pPr>
+            <a:endParaRPr/>
           </a:p>
         </p:txBody>
       </p:sp>
       <p:sp>
         <p:nvSpPr>
-          <p:cNvPr id="74" name="Rectangle 73">
-            <a:extLst>
-              <a:ext uri="{FF2B5EF4-FFF2-40B4-BE49-F238E27FC236}">
-                <a16:creationId xmlns:a16="http://schemas.microsoft.com/office/drawing/2014/main" id="{231B4A4E-C942-B935-5AD4-3266648B512A}"/>
-              </a:ext>
-            </a:extLst>
-          </p:cNvPr>
+          <p:cNvPr id="892060158" name="Rectangle 73"/>
           <p:cNvSpPr/>
           <p:nvPr/>
         </p:nvSpPr>
-        <p:spPr>
+        <p:spPr bwMode="auto">
           <a:xfrm>
             <a:off x="-13043" y="2976740"/>
             <a:ext cx="191533" cy="538061"/>
@@ -13378,24 +13321,20 @@
           <a:bodyPr rtlCol="0" anchor="ctr"/>
           <a:lstStyle/>
           <a:p>
-            <a:pPr algn="ctr"/>
-            <a:endParaRPr lang="en-MA"/>
+            <a:pPr algn="ctr">
+              <a:defRPr/>
+            </a:pPr>
+            <a:endParaRPr/>
           </a:p>
         </p:txBody>
       </p:sp>
       <p:sp>
         <p:nvSpPr>
-          <p:cNvPr id="75" name="Rectangle 74">
-            <a:extLst>
-              <a:ext uri="{FF2B5EF4-FFF2-40B4-BE49-F238E27FC236}">
-                <a16:creationId xmlns:a16="http://schemas.microsoft.com/office/drawing/2014/main" id="{095D6236-9053-78B5-762A-FCEE63C9BB30}"/>
-              </a:ext>
-            </a:extLst>
-          </p:cNvPr>
+          <p:cNvPr id="1737852664" name="Rectangle 74"/>
           <p:cNvSpPr/>
           <p:nvPr/>
         </p:nvSpPr>
-        <p:spPr>
+        <p:spPr bwMode="auto">
           <a:xfrm>
             <a:off x="-13043" y="3710386"/>
             <a:ext cx="191533" cy="538061"/>
@@ -13430,24 +13369,20 @@
           <a:bodyPr rtlCol="0" anchor="ctr"/>
           <a:lstStyle/>
           <a:p>
-            <a:pPr algn="ctr"/>
-            <a:endParaRPr lang="en-MA"/>
+            <a:pPr algn="ctr">
+              <a:defRPr/>
+            </a:pPr>
+            <a:endParaRPr/>
           </a:p>
         </p:txBody>
       </p:sp>
       <p:sp>
         <p:nvSpPr>
-          <p:cNvPr id="76" name="Rectangle 75">
-            <a:extLst>
-              <a:ext uri="{FF2B5EF4-FFF2-40B4-BE49-F238E27FC236}">
-                <a16:creationId xmlns:a16="http://schemas.microsoft.com/office/drawing/2014/main" id="{9A9D4CF0-A9BC-8AB5-61D3-FD24DCF9FCB5}"/>
-              </a:ext>
-            </a:extLst>
-          </p:cNvPr>
+          <p:cNvPr id="890186633" name="Rectangle 75"/>
           <p:cNvSpPr/>
           <p:nvPr/>
         </p:nvSpPr>
-        <p:spPr>
+        <p:spPr bwMode="auto">
           <a:xfrm>
             <a:off x="-13043" y="4444032"/>
             <a:ext cx="191533" cy="538061"/>
@@ -13485,24 +13420,20 @@
           <a:bodyPr rtlCol="0" anchor="ctr"/>
           <a:lstStyle/>
           <a:p>
-            <a:pPr algn="ctr"/>
-            <a:endParaRPr lang="en-MA"/>
+            <a:pPr algn="ctr">
+              <a:defRPr/>
+            </a:pPr>
+            <a:endParaRPr/>
           </a:p>
         </p:txBody>
       </p:sp>
       <p:sp>
         <p:nvSpPr>
-          <p:cNvPr id="77" name="Rectangle 76">
-            <a:extLst>
-              <a:ext uri="{FF2B5EF4-FFF2-40B4-BE49-F238E27FC236}">
-                <a16:creationId xmlns:a16="http://schemas.microsoft.com/office/drawing/2014/main" id="{28D9FB80-6C3D-6BE5-03B7-511EF660ABD9}"/>
-              </a:ext>
-            </a:extLst>
-          </p:cNvPr>
+          <p:cNvPr id="1576466762" name="Rectangle 76"/>
           <p:cNvSpPr/>
           <p:nvPr/>
         </p:nvSpPr>
-        <p:spPr>
+        <p:spPr bwMode="auto">
           <a:xfrm>
             <a:off x="-13043" y="5177678"/>
             <a:ext cx="191533" cy="538061"/>
@@ -13537,24 +13468,20 @@
           <a:bodyPr rtlCol="0" anchor="ctr"/>
           <a:lstStyle/>
           <a:p>
-            <a:pPr algn="ctr"/>
-            <a:endParaRPr lang="en-MA"/>
+            <a:pPr algn="ctr">
+              <a:defRPr/>
+            </a:pPr>
+            <a:endParaRPr/>
           </a:p>
         </p:txBody>
       </p:sp>
       <p:sp>
         <p:nvSpPr>
-          <p:cNvPr id="78" name="Rectangle 77">
-            <a:extLst>
-              <a:ext uri="{FF2B5EF4-FFF2-40B4-BE49-F238E27FC236}">
-                <a16:creationId xmlns:a16="http://schemas.microsoft.com/office/drawing/2014/main" id="{916E5279-D7AF-8C5B-EF8F-5F0777B5BB08}"/>
-              </a:ext>
-            </a:extLst>
-          </p:cNvPr>
+          <p:cNvPr id="1396592153" name="Rectangle 77"/>
           <p:cNvSpPr/>
           <p:nvPr/>
         </p:nvSpPr>
-        <p:spPr>
+        <p:spPr bwMode="auto">
           <a:xfrm>
             <a:off x="-13043" y="5911324"/>
             <a:ext cx="191533" cy="538061"/>
@@ -13592,24 +13519,20 @@
           <a:bodyPr rtlCol="0" anchor="ctr"/>
           <a:lstStyle/>
           <a:p>
-            <a:pPr algn="ctr"/>
-            <a:endParaRPr lang="en-MA"/>
+            <a:pPr algn="ctr">
+              <a:defRPr/>
+            </a:pPr>
+            <a:endParaRPr/>
           </a:p>
         </p:txBody>
       </p:sp>
       <p:sp>
         <p:nvSpPr>
-          <p:cNvPr id="15" name="Ellipse 14" descr="point_Pointer">
-            <a:extLst>
-              <a:ext uri="{FF2B5EF4-FFF2-40B4-BE49-F238E27FC236}">
-                <a16:creationId xmlns:a16="http://schemas.microsoft.com/office/drawing/2014/main" id="{91DCE8F1-94D7-E27C-6AED-5687466FF857}"/>
-              </a:ext>
-            </a:extLst>
-          </p:cNvPr>
+          <p:cNvPr id="1092638190" name="Ellipse 14" descr="point_Pointer"/>
           <p:cNvSpPr/>
           <p:nvPr/>
         </p:nvSpPr>
-        <p:spPr>
+        <p:spPr bwMode="auto">
           <a:xfrm>
             <a:off x="8705097" y="606248"/>
             <a:ext cx="135760" cy="150735"/>
@@ -13641,7 +13564,9 @@
           <a:bodyPr rtlCol="0" anchor="ctr"/>
           <a:lstStyle/>
           <a:p>
-            <a:pPr algn="ctr"/>
+            <a:pPr algn="ctr">
+              <a:defRPr/>
+            </a:pPr>
             <a:endParaRPr lang="fr-FR">
               <a:solidFill>
                 <a:schemeClr val="tx1"/>
@@ -13652,17 +13577,11 @@
       </p:sp>
       <p:sp>
         <p:nvSpPr>
-          <p:cNvPr id="7" name="TextBox 13">
-            <a:extLst>
-              <a:ext uri="{FF2B5EF4-FFF2-40B4-BE49-F238E27FC236}">
-                <a16:creationId xmlns:a16="http://schemas.microsoft.com/office/drawing/2014/main" id="{C5AEDEF5-5F06-0822-6827-A8B17494F3DA}"/>
-              </a:ext>
-            </a:extLst>
-          </p:cNvPr>
+          <p:cNvPr id="1478424200" name="TextBox 13"/>
           <p:cNvSpPr txBox="1"/>
           <p:nvPr/>
         </p:nvSpPr>
-        <p:spPr>
+        <p:spPr bwMode="auto">
           <a:xfrm>
             <a:off x="5895945" y="2040706"/>
             <a:ext cx="2487595" cy="378624"/>
@@ -13678,49 +13597,44 @@
           </a:bodyPr>
           <a:lstStyle/>
           <a:p>
+            <a:pPr>
+              <a:defRPr/>
+            </a:pPr>
             <a:r>
-              <a:rPr lang="fr-FR" dirty="0">
+              <a:rPr lang="fr-FR">
                 <a:latin typeface="Arial"/>
                 <a:cs typeface="Arial"/>
               </a:rPr>
               <a:t>{{</a:t>
             </a:r>
             <a:r>
-              <a:rPr lang="fr-FR" dirty="0" err="1">
+              <a:rPr lang="fr-FR">
                 <a:latin typeface="Arial"/>
                 <a:cs typeface="Arial"/>
               </a:rPr>
               <a:t>destination_name</a:t>
             </a:r>
             <a:r>
-              <a:rPr lang="fr-FR" dirty="0">
+              <a:rPr lang="fr-FR">
                 <a:latin typeface="Arial"/>
                 <a:cs typeface="Arial"/>
               </a:rPr>
               <a:t>}}</a:t>
             </a:r>
-            <a:endParaRPr lang="fr-FR" dirty="0">
-              <a:latin typeface="Arial" panose="020B0604020202020204" pitchFamily="34" charset="0"/>
-              <a:cs typeface="Arial" panose="020B0604020202020204" pitchFamily="34" charset="0"/>
+            <a:endParaRPr lang="fr-FR">
+              <a:latin typeface="Arial"/>
+              <a:cs typeface="Arial"/>
             </a:endParaRPr>
           </a:p>
         </p:txBody>
       </p:sp>
       <p:cxnSp>
         <p:nvCxnSpPr>
-          <p:cNvPr id="14" name="Elbow Connector 31" descr="Map_Pointer">
-            <a:extLst>
-              <a:ext uri="{FF2B5EF4-FFF2-40B4-BE49-F238E27FC236}">
-                <a16:creationId xmlns:a16="http://schemas.microsoft.com/office/drawing/2014/main" id="{A8C1832A-B147-3522-E371-070865696A28}"/>
-              </a:ext>
-            </a:extLst>
-          </p:cNvPr>
-          <p:cNvCxnSpPr>
-            <a:cxnSpLocks/>
-          </p:cNvCxnSpPr>
+          <p:cNvPr id="1955399421" name="Elbow Connector 31" descr="Map_Pointer"/>
+          <p:cNvCxnSpPr/>
           <p:nvPr/>
         </p:nvCxnSpPr>
-        <p:spPr>
+        <p:spPr bwMode="auto">
           <a:xfrm flipV="1">
             <a:off x="7273673" y="1354662"/>
             <a:ext cx="2043160" cy="603958"/>
@@ -13753,28 +13667,31 @@
         </p:style>
       </p:cxnSp>
     </p:spTree>
-    <p:extLst>
-      <p:ext uri="{BB962C8B-B14F-4D97-AF65-F5344CB8AC3E}">
-        <p14:creationId xmlns:p14="http://schemas.microsoft.com/office/powerpoint/2010/main" val="3367240481"/>
-      </p:ext>
-    </p:extLst>
   </p:cSld>
   <p:clrMapOvr>
     <a:masterClrMapping/>
   </p:clrMapOvr>
+  <mc:AlternateContent xmlns:mc="http://schemas.openxmlformats.org/markup-compatibility/2006">
+    <mc:Choice xmlns:p159="http://schemas.microsoft.com/office/powerpoint/2015/09/main" xmlns:p14="http://schemas.microsoft.com/office/powerpoint/2010/main" Requires="p159">
+      <p:transition p14:dur="500" advClick="1"/>
+    </mc:Choice>
+    <mc:Fallback>
+      <p:transition advClick="1"/>
+    </mc:Fallback>
+  </mc:AlternateContent>
 </p:sld>
 </file>
 
 <file path=ppt/slides/slide2.xml><?xml version="1.0" encoding="utf-8"?>
-<p:sld xmlns:a="http://schemas.openxmlformats.org/drawingml/2006/main" xmlns:r="http://schemas.openxmlformats.org/officeDocument/2006/relationships" xmlns:p="http://schemas.openxmlformats.org/presentationml/2006/main">
-  <p:cSld>
+<p:sld xmlns:a="http://schemas.openxmlformats.org/drawingml/2006/main" xmlns:r="http://schemas.openxmlformats.org/officeDocument/2006/relationships" xmlns:p="http://schemas.openxmlformats.org/presentationml/2006/main" xmlns:m="http://schemas.openxmlformats.org/officeDocument/2006/math" xmlns:w="http://schemas.openxmlformats.org/wordprocessingml/2006/main" xmlns:mc="http://schemas.openxmlformats.org/markup-compatibility/2006" showMasterPhAnim="0" showMasterSp="1" show="1">
+  <p:cSld name="">
     <p:spTree>
       <p:nvGrpSpPr>
         <p:cNvPr id="1" name=""/>
         <p:cNvGrpSpPr/>
         <p:nvPr/>
       </p:nvGrpSpPr>
-      <p:grpSpPr>
+      <p:grpSpPr bwMode="auto">
         <a:xfrm>
           <a:off x="0" y="0"/>
           <a:ext cx="0" cy="0"/>
@@ -13784,17 +13701,11 @@
       </p:grpSpPr>
       <p:sp>
         <p:nvSpPr>
-          <p:cNvPr id="19" name="TextBox 18">
-            <a:extLst>
-              <a:ext uri="{FF2B5EF4-FFF2-40B4-BE49-F238E27FC236}">
-                <a16:creationId xmlns:a16="http://schemas.microsoft.com/office/drawing/2014/main" id="{F346133F-AD10-B009-5981-B885A2ABBCB8}"/>
-              </a:ext>
-            </a:extLst>
-          </p:cNvPr>
+          <p:cNvPr id="2060131215" name="TextBox 18"/>
           <p:cNvSpPr txBox="1"/>
           <p:nvPr/>
         </p:nvSpPr>
-        <p:spPr>
+        <p:spPr bwMode="auto">
           <a:xfrm>
             <a:off x="172606" y="3429000"/>
             <a:ext cx="11924801" cy="2154436"/>
@@ -13810,39 +13721,36 @@
           </a:bodyPr>
           <a:lstStyle/>
           <a:p>
+            <a:pPr>
+              <a:defRPr/>
+            </a:pPr>
             <a:r>
-              <a:rPr lang="fr-FR" sz="13400" b="1" kern="100" spc="-300" dirty="0">
+              <a:rPr lang="fr-FR" sz="13400" b="1" spc="-300">
                 <a:solidFill>
                   <a:srgbClr val="F6C819"/>
                 </a:solidFill>
-                <a:latin typeface="Arial" panose="020B0604020202020204" pitchFamily="34" charset="0"/>
-                <a:cs typeface="Arial" panose="020B0604020202020204" pitchFamily="34" charset="0"/>
+                <a:latin typeface="Arial"/>
+                <a:cs typeface="Arial"/>
               </a:rPr>
               <a:t>BENSLIMANE</a:t>
             </a:r>
-            <a:endParaRPr lang="en-MA" sz="13400" b="1" kern="100" spc="-300" dirty="0">
+            <a:endParaRPr sz="13400" b="1" spc="-300">
               <a:solidFill>
                 <a:srgbClr val="F6C819"/>
               </a:solidFill>
-              <a:latin typeface="Arial" panose="020B0604020202020204" pitchFamily="34" charset="0"/>
-              <a:cs typeface="Arial" panose="020B0604020202020204" pitchFamily="34" charset="0"/>
+              <a:latin typeface="Arial"/>
+              <a:cs typeface="Arial"/>
             </a:endParaRPr>
           </a:p>
         </p:txBody>
       </p:sp>
       <p:sp>
         <p:nvSpPr>
-          <p:cNvPr id="23" name="Rounded Rectangle 22">
-            <a:extLst>
-              <a:ext uri="{FF2B5EF4-FFF2-40B4-BE49-F238E27FC236}">
-                <a16:creationId xmlns:a16="http://schemas.microsoft.com/office/drawing/2014/main" id="{1D729671-153E-C5B3-75C7-0E93F5A28795}"/>
-              </a:ext>
-            </a:extLst>
-          </p:cNvPr>
+          <p:cNvPr id="1407648844" name="Rounded Rectangle 22"/>
           <p:cNvSpPr/>
           <p:nvPr/>
         </p:nvSpPr>
-        <p:spPr>
+        <p:spPr bwMode="auto">
           <a:xfrm>
             <a:off x="277421" y="1058809"/>
             <a:ext cx="11637158" cy="2986071"/>
@@ -13893,32 +13801,26 @@
           <a:bodyPr rtlCol="0" anchor="ctr"/>
           <a:lstStyle/>
           <a:p>
-            <a:pPr algn="ctr"/>
-            <a:endParaRPr lang="en-MA"/>
+            <a:pPr algn="ctr">
+              <a:defRPr/>
+            </a:pPr>
+            <a:endParaRPr/>
           </a:p>
         </p:txBody>
       </p:sp>
       <p:pic>
         <p:nvPicPr>
-          <p:cNvPr id="4" name="Picture 3">
-            <a:extLst>
-              <a:ext uri="{FF2B5EF4-FFF2-40B4-BE49-F238E27FC236}">
-                <a16:creationId xmlns:a16="http://schemas.microsoft.com/office/drawing/2014/main" id="{F00E6FEA-0530-C35C-27DD-9E7207899B47}"/>
-              </a:ext>
-            </a:extLst>
-          </p:cNvPr>
+          <p:cNvPr id="1805848784" name="Picture 3"/>
           <p:cNvPicPr>
             <a:picLocks noChangeAspect="1"/>
           </p:cNvPicPr>
           <p:nvPr/>
         </p:nvPicPr>
-        <p:blipFill>
+        <p:blipFill rotWithShape="1">
           <a:blip r:embed="rId3"/>
-          <a:stretch>
-            <a:fillRect/>
-          </a:stretch>
+          <a:stretch/>
         </p:blipFill>
-        <p:spPr>
+        <p:spPr bwMode="auto">
           <a:xfrm>
             <a:off x="10804797" y="132319"/>
             <a:ext cx="1053959" cy="857458"/>
@@ -13930,20 +13832,14 @@
       </p:pic>
       <p:sp>
         <p:nvSpPr>
-          <p:cNvPr id="18" name="TextBox 17">
-            <a:extLst>
-              <a:ext uri="{FF2B5EF4-FFF2-40B4-BE49-F238E27FC236}">
-                <a16:creationId xmlns:a16="http://schemas.microsoft.com/office/drawing/2014/main" id="{C48802A4-738E-04CD-D745-4004F93F1080}"/>
-              </a:ext>
-            </a:extLst>
-          </p:cNvPr>
+          <p:cNvPr id="249864056" name="TextBox 17"/>
           <p:cNvSpPr txBox="1"/>
           <p:nvPr/>
         </p:nvSpPr>
-        <p:spPr>
+        <p:spPr bwMode="auto">
           <a:xfrm>
-            <a:off x="494429" y="1457793"/>
-            <a:ext cx="11258966" cy="615553"/>
+            <a:off x="494428" y="1457793"/>
+            <a:ext cx="11291005" cy="609959"/>
           </a:xfrm>
           <a:prstGeom prst="rect">
             <a:avLst/>
@@ -13956,8 +13852,11 @@
           </a:bodyPr>
           <a:lstStyle/>
           <a:p>
+            <a:pPr>
+              <a:defRPr/>
+            </a:pPr>
             <a:r>
-              <a:rPr lang="fr-MA" sz="1600" dirty="0">
+              <a:rPr lang="fr-MA" sz="1600">
                 <a:solidFill>
                   <a:srgbClr val="1A1A1A"/>
                 </a:solidFill>
@@ -13967,7 +13866,7 @@
               <a:t>{{</a:t>
             </a:r>
             <a:r>
-              <a:rPr lang="fr-MA" sz="1600" dirty="0" err="1">
+              <a:rPr lang="fr-MA" sz="1600">
                 <a:solidFill>
                   <a:srgbClr val="1A1A1A"/>
                 </a:solidFill>
@@ -13977,7 +13876,17 @@
               <a:t>destination_paragraph</a:t>
             </a:r>
             <a:r>
-              <a:rPr lang="fr-MA" sz="1600" dirty="0">
+              <a:rPr lang="en-US" sz="1600">
+                <a:solidFill>
+                  <a:srgbClr val="1A1A1A"/>
+                </a:solidFill>
+                <a:latin typeface="Arial"/>
+                <a:cs typeface="Arial"/>
+              </a:rPr>
+              <a:t>:paragraphs=2</a:t>
+            </a:r>
+            <a:r>
+              <a:rPr lang="fr-MA" sz="1600">
                 <a:solidFill>
                   <a:srgbClr val="1A1A1A"/>
                 </a:solidFill>
@@ -13986,12 +13895,15 @@
               </a:rPr>
               <a:t>}}</a:t>
             </a:r>
-            <a:endParaRPr lang="fr-MA" dirty="0">
+            <a:endParaRPr lang="fr-MA">
               <a:ea typeface="Calibri"/>
               <a:cs typeface="Calibri"/>
             </a:endParaRPr>
           </a:p>
           <a:p>
+            <a:pPr>
+              <a:defRPr/>
+            </a:pPr>
             <a:endParaRPr lang="fr-MA">
               <a:latin typeface="Arial"/>
               <a:cs typeface="Arial"/>
@@ -14001,17 +13913,11 @@
       </p:sp>
       <p:grpSp>
         <p:nvGrpSpPr>
-          <p:cNvPr id="28" name="Group 27">
-            <a:extLst>
-              <a:ext uri="{FF2B5EF4-FFF2-40B4-BE49-F238E27FC236}">
-                <a16:creationId xmlns:a16="http://schemas.microsoft.com/office/drawing/2014/main" id="{1ED53907-A605-3293-CB2E-998AB877212A}"/>
-              </a:ext>
-            </a:extLst>
-          </p:cNvPr>
+          <p:cNvPr id="1859076887" name="Group 27"/>
           <p:cNvGrpSpPr/>
           <p:nvPr/>
         </p:nvGrpSpPr>
-        <p:grpSpPr>
+        <p:grpSpPr bwMode="auto">
           <a:xfrm>
             <a:off x="333245" y="314773"/>
             <a:ext cx="2235522" cy="376547"/>
@@ -14021,23 +13927,19 @@
         </p:grpSpPr>
         <p:sp>
           <p:nvSpPr>
-            <p:cNvPr id="29" name="Triangle 28">
-              <a:extLst>
-                <a:ext uri="{FF2B5EF4-FFF2-40B4-BE49-F238E27FC236}">
-                  <a16:creationId xmlns:a16="http://schemas.microsoft.com/office/drawing/2014/main" id="{CE4EBB4C-C733-DA0B-6A3B-9748FC8D2DF6}"/>
-                </a:ext>
-              </a:extLst>
-            </p:cNvPr>
+            <p:cNvPr id="29" name="Triangle 28"/>
             <p:cNvSpPr/>
             <p:nvPr/>
           </p:nvSpPr>
-          <p:spPr>
+          <p:spPr bwMode="auto">
             <a:xfrm rot="5400000">
               <a:off x="7503823" y="574425"/>
               <a:ext cx="460797" cy="397239"/>
             </a:xfrm>
             <a:prstGeom prst="triangle">
-              <a:avLst/>
+              <a:avLst>
+                <a:gd name="adj" fmla="val 50000"/>
+              </a:avLst>
             </a:prstGeom>
             <a:solidFill>
               <a:schemeClr val="tx1">
@@ -14069,30 +13971,28 @@
             <a:bodyPr rtlCol="0" anchor="ctr"/>
             <a:lstStyle/>
             <a:p>
-              <a:pPr algn="ctr"/>
-              <a:endParaRPr lang="en-MA" dirty="0"/>
+              <a:pPr algn="ctr">
+                <a:defRPr/>
+              </a:pPr>
+              <a:endParaRPr/>
             </a:p>
           </p:txBody>
         </p:sp>
         <p:sp>
           <p:nvSpPr>
-            <p:cNvPr id="30" name="Triangle 29">
-              <a:extLst>
-                <a:ext uri="{FF2B5EF4-FFF2-40B4-BE49-F238E27FC236}">
-                  <a16:creationId xmlns:a16="http://schemas.microsoft.com/office/drawing/2014/main" id="{A2D3D934-36D2-D320-4BF5-2BB1894E68B1}"/>
-                </a:ext>
-              </a:extLst>
-            </p:cNvPr>
+            <p:cNvPr id="30" name="Triangle 29"/>
             <p:cNvSpPr/>
             <p:nvPr/>
           </p:nvSpPr>
-          <p:spPr>
+          <p:spPr bwMode="auto">
             <a:xfrm rot="5400000">
               <a:off x="7893567" y="574425"/>
               <a:ext cx="460797" cy="397239"/>
             </a:xfrm>
             <a:prstGeom prst="triangle">
-              <a:avLst/>
+              <a:avLst>
+                <a:gd name="adj" fmla="val 50000"/>
+              </a:avLst>
             </a:prstGeom>
             <a:solidFill>
               <a:srgbClr val="FFC000"/>
@@ -14121,30 +14021,28 @@
             <a:bodyPr rtlCol="0" anchor="ctr"/>
             <a:lstStyle/>
             <a:p>
-              <a:pPr algn="ctr"/>
-              <a:endParaRPr lang="en-MA" dirty="0"/>
+              <a:pPr algn="ctr">
+                <a:defRPr/>
+              </a:pPr>
+              <a:endParaRPr/>
             </a:p>
           </p:txBody>
         </p:sp>
         <p:sp>
           <p:nvSpPr>
-            <p:cNvPr id="31" name="Triangle 30">
-              <a:extLst>
-                <a:ext uri="{FF2B5EF4-FFF2-40B4-BE49-F238E27FC236}">
-                  <a16:creationId xmlns:a16="http://schemas.microsoft.com/office/drawing/2014/main" id="{DF894CC3-AE44-2D95-09C3-1D4C234A037C}"/>
-                </a:ext>
-              </a:extLst>
-            </p:cNvPr>
+            <p:cNvPr id="31" name="Triangle 30"/>
             <p:cNvSpPr/>
             <p:nvPr/>
           </p:nvSpPr>
-          <p:spPr>
+          <p:spPr bwMode="auto">
             <a:xfrm rot="5400000">
               <a:off x="8673056" y="574425"/>
               <a:ext cx="460797" cy="397239"/>
             </a:xfrm>
             <a:prstGeom prst="triangle">
-              <a:avLst/>
+              <a:avLst>
+                <a:gd name="adj" fmla="val 50000"/>
+              </a:avLst>
             </a:prstGeom>
             <a:solidFill>
               <a:srgbClr val="00B050"/>
@@ -14173,30 +14071,28 @@
             <a:bodyPr rtlCol="0" anchor="ctr"/>
             <a:lstStyle/>
             <a:p>
-              <a:pPr algn="ctr"/>
-              <a:endParaRPr lang="en-MA" dirty="0"/>
+              <a:pPr algn="ctr">
+                <a:defRPr/>
+              </a:pPr>
+              <a:endParaRPr/>
             </a:p>
           </p:txBody>
         </p:sp>
         <p:sp>
           <p:nvSpPr>
-            <p:cNvPr id="32" name="Triangle 31">
-              <a:extLst>
-                <a:ext uri="{FF2B5EF4-FFF2-40B4-BE49-F238E27FC236}">
-                  <a16:creationId xmlns:a16="http://schemas.microsoft.com/office/drawing/2014/main" id="{A7B5BC56-1A93-21C0-6E0A-D8B92B30CB8E}"/>
-                </a:ext>
-              </a:extLst>
-            </p:cNvPr>
+            <p:cNvPr id="32" name="Triangle 31"/>
             <p:cNvSpPr/>
             <p:nvPr/>
           </p:nvSpPr>
-          <p:spPr>
+          <p:spPr bwMode="auto">
             <a:xfrm rot="5400000">
               <a:off x="9842290" y="574425"/>
               <a:ext cx="460797" cy="397239"/>
             </a:xfrm>
             <a:prstGeom prst="triangle">
-              <a:avLst/>
+              <a:avLst>
+                <a:gd name="adj" fmla="val 50000"/>
+              </a:avLst>
             </a:prstGeom>
             <a:solidFill>
               <a:schemeClr val="accent1"/>
@@ -14225,33 +14121,27 @@
             <a:bodyPr rtlCol="0" anchor="ctr"/>
             <a:lstStyle/>
             <a:p>
-              <a:pPr algn="ctr"/>
-              <a:endParaRPr lang="en-MA" dirty="0"/>
+              <a:pPr algn="ctr">
+                <a:defRPr/>
+              </a:pPr>
+              <a:endParaRPr/>
             </a:p>
           </p:txBody>
         </p:sp>
       </p:grpSp>
       <p:pic>
         <p:nvPicPr>
-          <p:cNvPr id="3" name="Image 2">
-            <a:extLst>
-              <a:ext uri="{FF2B5EF4-FFF2-40B4-BE49-F238E27FC236}">
-                <a16:creationId xmlns:a16="http://schemas.microsoft.com/office/drawing/2014/main" id="{F185B225-3993-D1B8-4F31-F50CE427AEE0}"/>
-              </a:ext>
-            </a:extLst>
-          </p:cNvPr>
+          <p:cNvPr id="498736763" name="Image 2"/>
           <p:cNvPicPr>
             <a:picLocks noChangeAspect="1"/>
           </p:cNvPicPr>
           <p:nvPr/>
         </p:nvPicPr>
-        <p:blipFill>
+        <p:blipFill rotWithShape="1">
           <a:blip r:embed="rId4"/>
-          <a:stretch>
-            <a:fillRect/>
-          </a:stretch>
+          <a:stretch/>
         </p:blipFill>
-        <p:spPr>
+        <p:spPr bwMode="auto">
           <a:xfrm>
             <a:off x="2302358" y="3531556"/>
             <a:ext cx="9899864" cy="3326444"/>
@@ -14262,20 +14152,23 @@
         </p:spPr>
       </p:pic>
     </p:spTree>
-    <p:extLst>
-      <p:ext uri="{BB962C8B-B14F-4D97-AF65-F5344CB8AC3E}">
-        <p14:creationId xmlns:p14="http://schemas.microsoft.com/office/powerpoint/2010/main" val="146670871"/>
-      </p:ext>
-    </p:extLst>
   </p:cSld>
   <p:clrMapOvr>
     <a:masterClrMapping/>
   </p:clrMapOvr>
+  <mc:AlternateContent xmlns:mc="http://schemas.openxmlformats.org/markup-compatibility/2006">
+    <mc:Choice xmlns:p159="http://schemas.microsoft.com/office/powerpoint/2015/09/main" xmlns:p14="http://schemas.microsoft.com/office/powerpoint/2010/main" Requires="p159">
+      <p:transition p14:dur="500" advClick="1"/>
+    </mc:Choice>
+    <mc:Fallback>
+      <p:transition advClick="1"/>
+    </mc:Fallback>
+  </mc:AlternateContent>
 </p:sld>
 </file>
 
 <file path=ppt/theme/theme1.xml><?xml version="1.0" encoding="utf-8"?>
-<a:theme xmlns:a="http://schemas.openxmlformats.org/drawingml/2006/main" name="Thème Office">
+<a:theme xmlns:a="http://schemas.openxmlformats.org/drawingml/2006/main" xmlns:r="http://schemas.openxmlformats.org/officeDocument/2006/relationships" xmlns:p="http://schemas.openxmlformats.org/presentationml/2006/main" name="Thème Office">
   <a:themeElements>
     <a:clrScheme name="Office">
       <a:dk1>
@@ -14317,108 +14210,14 @@
     </a:clrScheme>
     <a:fontScheme name="Office">
       <a:majorFont>
-        <a:latin typeface="Calibri Light" panose="020F0302020204030204"/>
-        <a:ea typeface=""/>
-        <a:cs typeface=""/>
-        <a:font script="Jpan" typeface="游ゴシック Light"/>
-        <a:font script="Hang" typeface="맑은 고딕"/>
-        <a:font script="Hans" typeface="等线 Light"/>
-        <a:font script="Hant" typeface="新細明體"/>
-        <a:font script="Arab" typeface="Times New Roman"/>
-        <a:font script="Hebr" typeface="Times New Roman"/>
-        <a:font script="Thai" typeface="Angsana New"/>
-        <a:font script="Ethi" typeface="Nyala"/>
-        <a:font script="Beng" typeface="Vrinda"/>
-        <a:font script="Gujr" typeface="Shruti"/>
-        <a:font script="Khmr" typeface="MoolBoran"/>
-        <a:font script="Knda" typeface="Tunga"/>
-        <a:font script="Guru" typeface="Raavi"/>
-        <a:font script="Cans" typeface="Euphemia"/>
-        <a:font script="Cher" typeface="Plantagenet Cherokee"/>
-        <a:font script="Yiii" typeface="Microsoft Yi Baiti"/>
-        <a:font script="Tibt" typeface="Microsoft Himalaya"/>
-        <a:font script="Thaa" typeface="MV Boli"/>
-        <a:font script="Deva" typeface="Mangal"/>
-        <a:font script="Telu" typeface="Gautami"/>
-        <a:font script="Taml" typeface="Latha"/>
-        <a:font script="Syrc" typeface="Estrangelo Edessa"/>
-        <a:font script="Orya" typeface="Kalinga"/>
-        <a:font script="Mlym" typeface="Kartika"/>
-        <a:font script="Laoo" typeface="DokChampa"/>
-        <a:font script="Sinh" typeface="Iskoola Pota"/>
-        <a:font script="Mong" typeface="Mongolian Baiti"/>
-        <a:font script="Viet" typeface="Times New Roman"/>
-        <a:font script="Uigh" typeface="Microsoft Uighur"/>
-        <a:font script="Geor" typeface="Sylfaen"/>
-        <a:font script="Armn" typeface="Arial"/>
-        <a:font script="Bugi" typeface="Leelawadee UI"/>
-        <a:font script="Bopo" typeface="Microsoft JhengHei"/>
-        <a:font script="Java" typeface="Javanese Text"/>
-        <a:font script="Lisu" typeface="Segoe UI"/>
-        <a:font script="Mymr" typeface="Myanmar Text"/>
-        <a:font script="Nkoo" typeface="Ebrima"/>
-        <a:font script="Olck" typeface="Nirmala UI"/>
-        <a:font script="Osma" typeface="Ebrima"/>
-        <a:font script="Phag" typeface="Phagspa"/>
-        <a:font script="Syrn" typeface="Estrangelo Edessa"/>
-        <a:font script="Syrj" typeface="Estrangelo Edessa"/>
-        <a:font script="Syre" typeface="Estrangelo Edessa"/>
-        <a:font script="Sora" typeface="Nirmala UI"/>
-        <a:font script="Tale" typeface="Microsoft Tai Le"/>
-        <a:font script="Talu" typeface="Microsoft New Tai Lue"/>
-        <a:font script="Tfng" typeface="Ebrima"/>
+        <a:latin typeface="Calibri Light"/>
+        <a:ea typeface="Arial"/>
+        <a:cs typeface="Arial"/>
       </a:majorFont>
       <a:minorFont>
-        <a:latin typeface="Calibri" panose="020F0502020204030204"/>
-        <a:ea typeface=""/>
-        <a:cs typeface=""/>
-        <a:font script="Jpan" typeface="游ゴシック"/>
-        <a:font script="Hang" typeface="맑은 고딕"/>
-        <a:font script="Hans" typeface="等线"/>
-        <a:font script="Hant" typeface="新細明體"/>
-        <a:font script="Arab" typeface="Arial"/>
-        <a:font script="Hebr" typeface="Arial"/>
-        <a:font script="Thai" typeface="Cordia New"/>
-        <a:font script="Ethi" typeface="Nyala"/>
-        <a:font script="Beng" typeface="Vrinda"/>
-        <a:font script="Gujr" typeface="Shruti"/>
-        <a:font script="Khmr" typeface="DaunPenh"/>
-        <a:font script="Knda" typeface="Tunga"/>
-        <a:font script="Guru" typeface="Raavi"/>
-        <a:font script="Cans" typeface="Euphemia"/>
-        <a:font script="Cher" typeface="Plantagenet Cherokee"/>
-        <a:font script="Yiii" typeface="Microsoft Yi Baiti"/>
-        <a:font script="Tibt" typeface="Microsoft Himalaya"/>
-        <a:font script="Thaa" typeface="MV Boli"/>
-        <a:font script="Deva" typeface="Mangal"/>
-        <a:font script="Telu" typeface="Gautami"/>
-        <a:font script="Taml" typeface="Latha"/>
-        <a:font script="Syrc" typeface="Estrangelo Edessa"/>
-        <a:font script="Orya" typeface="Kalinga"/>
-        <a:font script="Mlym" typeface="Kartika"/>
-        <a:font script="Laoo" typeface="DokChampa"/>
-        <a:font script="Sinh" typeface="Iskoola Pota"/>
-        <a:font script="Mong" typeface="Mongolian Baiti"/>
-        <a:font script="Viet" typeface="Arial"/>
-        <a:font script="Uigh" typeface="Microsoft Uighur"/>
-        <a:font script="Geor" typeface="Sylfaen"/>
-        <a:font script="Armn" typeface="Arial"/>
-        <a:font script="Bugi" typeface="Leelawadee UI"/>
-        <a:font script="Bopo" typeface="Microsoft JhengHei"/>
-        <a:font script="Java" typeface="Javanese Text"/>
-        <a:font script="Lisu" typeface="Segoe UI"/>
-        <a:font script="Mymr" typeface="Myanmar Text"/>
-        <a:font script="Nkoo" typeface="Ebrima"/>
-        <a:font script="Olck" typeface="Nirmala UI"/>
-        <a:font script="Osma" typeface="Ebrima"/>
-        <a:font script="Phag" typeface="Phagspa"/>
-        <a:font script="Syrn" typeface="Estrangelo Edessa"/>
-        <a:font script="Syrj" typeface="Estrangelo Edessa"/>
-        <a:font script="Syre" typeface="Estrangelo Edessa"/>
-        <a:font script="Sora" typeface="Nirmala UI"/>
-        <a:font script="Tale" typeface="Microsoft Tai Le"/>
-        <a:font script="Talu" typeface="Microsoft New Tai Lue"/>
-        <a:font script="Tfng" typeface="Ebrima"/>
+        <a:latin typeface="Calibri"/>
+        <a:ea typeface="Arial"/>
+        <a:cs typeface="Arial"/>
       </a:minorFont>
     </a:fontScheme>
     <a:fmtScheme name="Office">
@@ -14426,7 +14225,7 @@
         <a:solidFill>
           <a:schemeClr val="phClr"/>
         </a:solidFill>
-        <a:gradFill rotWithShape="1">
+        <a:gradFill>
           <a:gsLst>
             <a:gs pos="0">
               <a:schemeClr val="phClr">
@@ -14452,7 +14251,7 @@
           </a:gsLst>
           <a:lin ang="5400000" scaled="0"/>
         </a:gradFill>
-        <a:gradFill rotWithShape="1">
+        <a:gradFill>
           <a:gsLst>
             <a:gs pos="0">
               <a:schemeClr val="phClr">
@@ -14529,7 +14328,7 @@
             <a:satMod val="170000"/>
           </a:schemeClr>
         </a:solidFill>
-        <a:gradFill rotWithShape="1">
+        <a:gradFill>
           <a:gsLst>
             <a:gs pos="0">
               <a:schemeClr val="phClr">
@@ -14560,17 +14359,11 @@
     </a:fmtScheme>
   </a:themeElements>
   <a:objectDefaults/>
-  <a:extraClrSchemeLst/>
-  <a:extLst>
-    <a:ext uri="{05A4C25C-085E-4340-85A3-A5531E510DB2}">
-      <thm15:themeFamily xmlns:thm15="http://schemas.microsoft.com/office/thememl/2012/main" name="Office Theme" id="{62F939B6-93AF-4DB8-9C6B-D6C7DFDC589F}" vid="{4A3C46E8-61CC-4603-A589-7422A47A8E4A}"/>
-    </a:ext>
-  </a:extLst>
 </a:theme>
 </file>
 
 <file path=ppt/theme/theme2.xml><?xml version="1.0" encoding="utf-8"?>
-<a:theme xmlns:a="http://schemas.openxmlformats.org/drawingml/2006/main" name="Thème Office">
+<a:theme xmlns:a="http://schemas.openxmlformats.org/drawingml/2006/main" xmlns:r="http://schemas.openxmlformats.org/officeDocument/2006/relationships" xmlns:p="http://schemas.openxmlformats.org/presentationml/2006/main" name="Thème Office">
   <a:themeElements>
     <a:clrScheme name="Office">
       <a:dk1>
@@ -14612,108 +14405,14 @@
     </a:clrScheme>
     <a:fontScheme name="Office">
       <a:majorFont>
-        <a:latin typeface="Calibri Light" panose="020F0302020204030204"/>
-        <a:ea typeface=""/>
-        <a:cs typeface=""/>
-        <a:font script="Jpan" typeface="游ゴシック Light"/>
-        <a:font script="Hang" typeface="맑은 고딕"/>
-        <a:font script="Hans" typeface="等线 Light"/>
-        <a:font script="Hant" typeface="新細明體"/>
-        <a:font script="Arab" typeface="Times New Roman"/>
-        <a:font script="Hebr" typeface="Times New Roman"/>
-        <a:font script="Thai" typeface="Angsana New"/>
-        <a:font script="Ethi" typeface="Nyala"/>
-        <a:font script="Beng" typeface="Vrinda"/>
-        <a:font script="Gujr" typeface="Shruti"/>
-        <a:font script="Khmr" typeface="MoolBoran"/>
-        <a:font script="Knda" typeface="Tunga"/>
-        <a:font script="Guru" typeface="Raavi"/>
-        <a:font script="Cans" typeface="Euphemia"/>
-        <a:font script="Cher" typeface="Plantagenet Cherokee"/>
-        <a:font script="Yiii" typeface="Microsoft Yi Baiti"/>
-        <a:font script="Tibt" typeface="Microsoft Himalaya"/>
-        <a:font script="Thaa" typeface="MV Boli"/>
-        <a:font script="Deva" typeface="Mangal"/>
-        <a:font script="Telu" typeface="Gautami"/>
-        <a:font script="Taml" typeface="Latha"/>
-        <a:font script="Syrc" typeface="Estrangelo Edessa"/>
-        <a:font script="Orya" typeface="Kalinga"/>
-        <a:font script="Mlym" typeface="Kartika"/>
-        <a:font script="Laoo" typeface="DokChampa"/>
-        <a:font script="Sinh" typeface="Iskoola Pota"/>
-        <a:font script="Mong" typeface="Mongolian Baiti"/>
-        <a:font script="Viet" typeface="Times New Roman"/>
-        <a:font script="Uigh" typeface="Microsoft Uighur"/>
-        <a:font script="Geor" typeface="Sylfaen"/>
-        <a:font script="Armn" typeface="Arial"/>
-        <a:font script="Bugi" typeface="Leelawadee UI"/>
-        <a:font script="Bopo" typeface="Microsoft JhengHei"/>
-        <a:font script="Java" typeface="Javanese Text"/>
-        <a:font script="Lisu" typeface="Segoe UI"/>
-        <a:font script="Mymr" typeface="Myanmar Text"/>
-        <a:font script="Nkoo" typeface="Ebrima"/>
-        <a:font script="Olck" typeface="Nirmala UI"/>
-        <a:font script="Osma" typeface="Ebrima"/>
-        <a:font script="Phag" typeface="Phagspa"/>
-        <a:font script="Syrn" typeface="Estrangelo Edessa"/>
-        <a:font script="Syrj" typeface="Estrangelo Edessa"/>
-        <a:font script="Syre" typeface="Estrangelo Edessa"/>
-        <a:font script="Sora" typeface="Nirmala UI"/>
-        <a:font script="Tale" typeface="Microsoft Tai Le"/>
-        <a:font script="Talu" typeface="Microsoft New Tai Lue"/>
-        <a:font script="Tfng" typeface="Ebrima"/>
+        <a:latin typeface="Calibri Light"/>
+        <a:ea typeface="Arial"/>
+        <a:cs typeface="Arial"/>
       </a:majorFont>
       <a:minorFont>
-        <a:latin typeface="Calibri" panose="020F0502020204030204"/>
-        <a:ea typeface=""/>
-        <a:cs typeface=""/>
-        <a:font script="Jpan" typeface="游ゴシック"/>
-        <a:font script="Hang" typeface="맑은 고딕"/>
-        <a:font script="Hans" typeface="等线"/>
-        <a:font script="Hant" typeface="新細明體"/>
-        <a:font script="Arab" typeface="Arial"/>
-        <a:font script="Hebr" typeface="Arial"/>
-        <a:font script="Thai" typeface="Cordia New"/>
-        <a:font script="Ethi" typeface="Nyala"/>
-        <a:font script="Beng" typeface="Vrinda"/>
-        <a:font script="Gujr" typeface="Shruti"/>
-        <a:font script="Khmr" typeface="DaunPenh"/>
-        <a:font script="Knda" typeface="Tunga"/>
-        <a:font script="Guru" typeface="Raavi"/>
-        <a:font script="Cans" typeface="Euphemia"/>
-        <a:font script="Cher" typeface="Plantagenet Cherokee"/>
-        <a:font script="Yiii" typeface="Microsoft Yi Baiti"/>
-        <a:font script="Tibt" typeface="Microsoft Himalaya"/>
-        <a:font script="Thaa" typeface="MV Boli"/>
-        <a:font script="Deva" typeface="Mangal"/>
-        <a:font script="Telu" typeface="Gautami"/>
-        <a:font script="Taml" typeface="Latha"/>
-        <a:font script="Syrc" typeface="Estrangelo Edessa"/>
-        <a:font script="Orya" typeface="Kalinga"/>
-        <a:font script="Mlym" typeface="Kartika"/>
-        <a:font script="Laoo" typeface="DokChampa"/>
-        <a:font script="Sinh" typeface="Iskoola Pota"/>
-        <a:font script="Mong" typeface="Mongolian Baiti"/>
-        <a:font script="Viet" typeface="Arial"/>
-        <a:font script="Uigh" typeface="Microsoft Uighur"/>
-        <a:font script="Geor" typeface="Sylfaen"/>
-        <a:font script="Armn" typeface="Arial"/>
-        <a:font script="Bugi" typeface="Leelawadee UI"/>
-        <a:font script="Bopo" typeface="Microsoft JhengHei"/>
-        <a:font script="Java" typeface="Javanese Text"/>
-        <a:font script="Lisu" typeface="Segoe UI"/>
-        <a:font script="Mymr" typeface="Myanmar Text"/>
-        <a:font script="Nkoo" typeface="Ebrima"/>
-        <a:font script="Olck" typeface="Nirmala UI"/>
-        <a:font script="Osma" typeface="Ebrima"/>
-        <a:font script="Phag" typeface="Phagspa"/>
-        <a:font script="Syrn" typeface="Estrangelo Edessa"/>
-        <a:font script="Syrj" typeface="Estrangelo Edessa"/>
-        <a:font script="Syre" typeface="Estrangelo Edessa"/>
-        <a:font script="Sora" typeface="Nirmala UI"/>
-        <a:font script="Tale" typeface="Microsoft Tai Le"/>
-        <a:font script="Talu" typeface="Microsoft New Tai Lue"/>
-        <a:font script="Tfng" typeface="Ebrima"/>
+        <a:latin typeface="Calibri"/>
+        <a:ea typeface="Arial"/>
+        <a:cs typeface="Arial"/>
       </a:minorFont>
     </a:fontScheme>
     <a:fmtScheme name="Office">
@@ -14721,7 +14420,7 @@
         <a:solidFill>
           <a:schemeClr val="phClr"/>
         </a:solidFill>
-        <a:gradFill rotWithShape="1">
+        <a:gradFill>
           <a:gsLst>
             <a:gs pos="0">
               <a:schemeClr val="phClr">
@@ -14747,7 +14446,7 @@
           </a:gsLst>
           <a:lin ang="5400000" scaled="0"/>
         </a:gradFill>
-        <a:gradFill rotWithShape="1">
+        <a:gradFill>
           <a:gsLst>
             <a:gs pos="0">
               <a:schemeClr val="phClr">
@@ -14824,7 +14523,7 @@
             <a:satMod val="170000"/>
           </a:schemeClr>
         </a:solidFill>
-        <a:gradFill rotWithShape="1">
+        <a:gradFill>
           <a:gsLst>
             <a:gs pos="0">
               <a:schemeClr val="phClr">
@@ -14855,11 +14554,5 @@
     </a:fmtScheme>
   </a:themeElements>
   <a:objectDefaults/>
-  <a:extraClrSchemeLst/>
-  <a:extLst>
-    <a:ext uri="{05A4C25C-085E-4340-85A3-A5531E510DB2}">
-      <thm15:themeFamily xmlns:thm15="http://schemas.microsoft.com/office/thememl/2012/main" name="Office Theme" id="{62F939B6-93AF-4DB8-9C6B-D6C7DFDC589F}" vid="{4A3C46E8-61CC-4603-A589-7422A47A8E4A}"/>
-    </a:ext>
-  </a:extLst>
 </a:theme>
 </file>